--- a/gyeongsan/GSJOB2_2교시_강의_AI기초_직무분석.pptx
+++ b/gyeongsan/GSJOB2_2교시_강의_AI기초_직무분석.pptx
@@ -21,6 +21,8 @@
     <p:sldId id="269" r:id="rId20"/>
     <p:sldId id="270" r:id="rId21"/>
     <p:sldId id="271" r:id="rId22"/>
+    <p:sldId id="272" r:id="rId23"/>
+    <p:sldId id="273" r:id="rId24"/>
   </p:sldIdLst>
   <p:sldSz cx="18288000" cy="10287000" type="screen4x3"/>
   <p:notesSz cx="6858000" cy="9144000"/>
@@ -5162,7 +5164,7 @@
                 <a:ea typeface="Pretendard"/>
                 <a:cs typeface="Pretendard"/>
               </a:rPr>
-              <a:t>직무기술서와 NCS</a:t>
+              <a:t>시연 · 연습용 가상 공고</a:t>
             </a:r>
           </a:p>
         </p:txBody>
@@ -5203,7 +5205,7 @@
                 <a:ea typeface="Pretendard"/>
                 <a:cs typeface="Pretendard"/>
               </a:rPr>
-              <a:t>공고가 짧을 때 더 볼 곳</a:t>
+              <a:t>(가상) 대경로지스 — 물류관리 사무원</a:t>
             </a:r>
           </a:p>
         </p:txBody>
@@ -5240,18 +5242,235 @@
       </p:sp>
       <p:sp>
         <p:nvSpPr>
-          <p:cNvPr id="8" name="Rounded Rectangle 7"/>
-          <p:cNvSpPr/>
-          <p:nvPr/>
-        </p:nvSpPr>
-        <p:spPr>
-          <a:xfrm>
-            <a:off x="1143000" y="2895600"/>
-            <a:ext cx="16002000" cy="819150"/>
+          <p:cNvPr id="8" name="Rectangle 7"/>
+          <p:cNvSpPr/>
+          <p:nvPr/>
+        </p:nvSpPr>
+        <p:spPr>
+          <a:xfrm>
+            <a:off x="1143000" y="2781300"/>
+            <a:ext cx="2842260" cy="590550"/>
+          </a:xfrm>
+          <a:prstGeom prst="rect">
+            <a:avLst/>
+          </a:prstGeom>
+          <a:solidFill>
+            <a:srgbClr val="1E3E69"/>
+          </a:solidFill>
+          <a:ln>
+            <a:noFill/>
+          </a:ln>
+          <a:effectLst/>
+        </p:spPr>
+        <p:txBody>
+          <a:bodyPr rtlCol="0" anchor="ctr" wrap="square"/>
+          <a:lstStyle/>
+          <a:p>
+            <a:pPr algn="ctr"/>
+          </a:p>
+        </p:txBody>
+      </p:sp>
+      <p:sp>
+        <p:nvSpPr>
+          <p:cNvPr id="9" name="TextBox 8"/>
+          <p:cNvSpPr txBox="1"/>
+          <p:nvPr/>
+        </p:nvSpPr>
+        <p:spPr>
+          <a:xfrm>
+            <a:off x="1143000" y="2781300"/>
+            <a:ext cx="2842260" cy="590550"/>
+          </a:xfrm>
+          <a:prstGeom prst="rect">
+            <a:avLst/>
+          </a:prstGeom>
+          <a:noFill/>
+        </p:spPr>
+        <p:txBody>
+          <a:bodyPr wrap="square" lIns="0" rIns="0" tIns="0" bIns="0" anchor="ctr">
+            <a:spAutoFit/>
+          </a:bodyPr>
+          <a:lstStyle/>
+          <a:p>
+            <a:pPr algn="ctr">
+              <a:lnSpc>
+                <a:spcPct val="100000"/>
+              </a:lnSpc>
+            </a:pPr>
+            <a:r>
+              <a:rPr sz="2025" b="1">
+                <a:solidFill>
+                  <a:srgbClr val="FFFFFF"/>
+                </a:solidFill>
+                <a:latin typeface="Pretendard"/>
+                <a:ea typeface="Pretendard"/>
+                <a:cs typeface="Pretendard"/>
+              </a:rPr>
+              <a:t>칸</a:t>
+            </a:r>
+          </a:p>
+        </p:txBody>
+      </p:sp>
+      <p:sp>
+        <p:nvSpPr>
+          <p:cNvPr id="10" name="Rectangle 9"/>
+          <p:cNvSpPr/>
+          <p:nvPr/>
+        </p:nvSpPr>
+        <p:spPr>
+          <a:xfrm>
+            <a:off x="4023360" y="2781300"/>
+            <a:ext cx="13121640" cy="590550"/>
+          </a:xfrm>
+          <a:prstGeom prst="rect">
+            <a:avLst/>
+          </a:prstGeom>
+          <a:solidFill>
+            <a:srgbClr val="1E7F5B"/>
+          </a:solidFill>
+          <a:ln>
+            <a:noFill/>
+          </a:ln>
+          <a:effectLst/>
+        </p:spPr>
+        <p:txBody>
+          <a:bodyPr rtlCol="0" anchor="ctr" wrap="square"/>
+          <a:lstStyle/>
+          <a:p>
+            <a:pPr algn="ctr"/>
+          </a:p>
+        </p:txBody>
+      </p:sp>
+      <p:sp>
+        <p:nvSpPr>
+          <p:cNvPr id="11" name="TextBox 10"/>
+          <p:cNvSpPr txBox="1"/>
+          <p:nvPr/>
+        </p:nvSpPr>
+        <p:spPr>
+          <a:xfrm>
+            <a:off x="4023360" y="2781300"/>
+            <a:ext cx="13121640" cy="590550"/>
+          </a:xfrm>
+          <a:prstGeom prst="rect">
+            <a:avLst/>
+          </a:prstGeom>
+          <a:noFill/>
+        </p:spPr>
+        <p:txBody>
+          <a:bodyPr wrap="square" lIns="0" rIns="0" tIns="0" bIns="0" anchor="ctr">
+            <a:spAutoFit/>
+          </a:bodyPr>
+          <a:lstStyle/>
+          <a:p>
+            <a:pPr algn="ctr">
+              <a:lnSpc>
+                <a:spcPct val="100000"/>
+              </a:lnSpc>
+            </a:pPr>
+            <a:r>
+              <a:rPr sz="2025" b="1">
+                <a:solidFill>
+                  <a:srgbClr val="FFFFFF"/>
+                </a:solidFill>
+                <a:latin typeface="Pretendard"/>
+                <a:ea typeface="Pretendard"/>
+                <a:cs typeface="Pretendard"/>
+              </a:rPr>
+              <a:t>공고 문장</a:t>
+            </a:r>
+          </a:p>
+        </p:txBody>
+      </p:sp>
+      <p:sp>
+        <p:nvSpPr>
+          <p:cNvPr id="12" name="Rounded Rectangle 11"/>
+          <p:cNvSpPr/>
+          <p:nvPr/>
+        </p:nvSpPr>
+        <p:spPr>
+          <a:xfrm>
+            <a:off x="1143000" y="3448050"/>
+            <a:ext cx="2842260" cy="647700"/>
           </a:xfrm>
           <a:prstGeom prst="roundRect">
             <a:avLst>
-              <a:gd name="adj" fmla="val 5813"/>
+              <a:gd name="adj" fmla="val 5882"/>
+            </a:avLst>
+          </a:prstGeom>
+          <a:solidFill>
+            <a:srgbClr val="E6F4EE"/>
+          </a:solidFill>
+          <a:ln w="9525">
+            <a:solidFill>
+              <a:srgbClr val="C3E6D8"/>
+            </a:solidFill>
+          </a:ln>
+          <a:effectLst/>
+        </p:spPr>
+        <p:txBody>
+          <a:bodyPr rtlCol="0" anchor="ctr" wrap="square"/>
+          <a:lstStyle/>
+          <a:p>
+            <a:pPr algn="ctr"/>
+          </a:p>
+        </p:txBody>
+      </p:sp>
+      <p:sp>
+        <p:nvSpPr>
+          <p:cNvPr id="13" name="TextBox 12"/>
+          <p:cNvSpPr txBox="1"/>
+          <p:nvPr/>
+        </p:nvSpPr>
+        <p:spPr>
+          <a:xfrm>
+            <a:off x="1238250" y="3448050"/>
+            <a:ext cx="2651760" cy="647700"/>
+          </a:xfrm>
+          <a:prstGeom prst="rect">
+            <a:avLst/>
+          </a:prstGeom>
+          <a:noFill/>
+        </p:spPr>
+        <p:txBody>
+          <a:bodyPr wrap="square" lIns="0" rIns="0" tIns="0" bIns="0" anchor="ctr">
+            <a:spAutoFit/>
+          </a:bodyPr>
+          <a:lstStyle/>
+          <a:p>
+            <a:pPr algn="l">
+              <a:lnSpc>
+                <a:spcPct val="115000"/>
+              </a:lnSpc>
+            </a:pPr>
+            <a:r>
+              <a:rPr sz="1875" b="1">
+                <a:solidFill>
+                  <a:srgbClr val="1E3E69"/>
+                </a:solidFill>
+                <a:latin typeface="Pretendard"/>
+                <a:ea typeface="Pretendard"/>
+                <a:cs typeface="Pretendard"/>
+              </a:rPr>
+              <a:t>주요 업무</a:t>
+            </a:r>
+          </a:p>
+        </p:txBody>
+      </p:sp>
+      <p:sp>
+        <p:nvSpPr>
+          <p:cNvPr id="14" name="Rounded Rectangle 13"/>
+          <p:cNvSpPr/>
+          <p:nvPr/>
+        </p:nvSpPr>
+        <p:spPr>
+          <a:xfrm>
+            <a:off x="4023360" y="3448050"/>
+            <a:ext cx="13121640" cy="647700"/>
+          </a:xfrm>
+          <a:prstGeom prst="roundRect">
+            <a:avLst>
+              <a:gd name="adj" fmla="val 5882"/>
             </a:avLst>
           </a:prstGeom>
           <a:solidFill>
@@ -5274,130 +5493,134 @@
       </p:sp>
       <p:sp>
         <p:nvSpPr>
-          <p:cNvPr id="9" name="Oval 8"/>
-          <p:cNvSpPr/>
-          <p:nvPr/>
-        </p:nvSpPr>
-        <p:spPr>
-          <a:xfrm>
-            <a:off x="1390650" y="3038475"/>
-            <a:ext cx="533400" cy="533400"/>
-          </a:xfrm>
-          <a:prstGeom prst="ellipse">
-            <a:avLst/>
-          </a:prstGeom>
-          <a:solidFill>
-            <a:srgbClr val="1E3E69"/>
-          </a:solidFill>
-          <a:ln>
-            <a:noFill/>
-          </a:ln>
-          <a:effectLst/>
-        </p:spPr>
-        <p:txBody>
-          <a:bodyPr rtlCol="0" anchor="ctr" wrap="square"/>
-          <a:lstStyle/>
-          <a:p>
-            <a:pPr algn="ctr"/>
-          </a:p>
-        </p:txBody>
-      </p:sp>
-      <p:sp>
-        <p:nvSpPr>
-          <p:cNvPr id="10" name="TextBox 9"/>
-          <p:cNvSpPr txBox="1"/>
-          <p:nvPr/>
-        </p:nvSpPr>
-        <p:spPr>
-          <a:xfrm>
-            <a:off x="1390650" y="3162300"/>
-            <a:ext cx="533400" cy="323850"/>
-          </a:xfrm>
-          <a:prstGeom prst="rect">
-            <a:avLst/>
-          </a:prstGeom>
-          <a:noFill/>
-        </p:spPr>
-        <p:txBody>
-          <a:bodyPr wrap="square" lIns="0" rIns="0" tIns="0" bIns="0" anchor="t">
+          <p:cNvPr id="15" name="TextBox 14"/>
+          <p:cNvSpPr txBox="1"/>
+          <p:nvPr/>
+        </p:nvSpPr>
+        <p:spPr>
+          <a:xfrm>
+            <a:off x="4118610" y="3448050"/>
+            <a:ext cx="12931140" cy="647700"/>
+          </a:xfrm>
+          <a:prstGeom prst="rect">
+            <a:avLst/>
+          </a:prstGeom>
+          <a:noFill/>
+        </p:spPr>
+        <p:txBody>
+          <a:bodyPr wrap="square" lIns="0" rIns="0" tIns="0" bIns="0" anchor="ctr">
             <a:spAutoFit/>
           </a:bodyPr>
           <a:lstStyle/>
           <a:p>
             <a:pPr algn="ctr">
               <a:lnSpc>
-                <a:spcPct val="100000"/>
-              </a:lnSpc>
-            </a:pPr>
-            <a:r>
-              <a:rPr sz="2100" b="1">
-                <a:solidFill>
-                  <a:srgbClr val="FFFFFF"/>
-                </a:solidFill>
-                <a:latin typeface="Pretendard"/>
-                <a:ea typeface="Pretendard"/>
-                <a:cs typeface="Pretendard"/>
-              </a:rPr>
-              <a:t>1</a:t>
-            </a:r>
-          </a:p>
-        </p:txBody>
-      </p:sp>
-      <p:sp>
-        <p:nvSpPr>
-          <p:cNvPr id="11" name="TextBox 10"/>
-          <p:cNvSpPr txBox="1"/>
-          <p:nvPr/>
-        </p:nvSpPr>
-        <p:spPr>
-          <a:xfrm>
-            <a:off x="2190750" y="2895600"/>
-            <a:ext cx="14573250" cy="819150"/>
-          </a:xfrm>
-          <a:prstGeom prst="rect">
-            <a:avLst/>
-          </a:prstGeom>
-          <a:noFill/>
-        </p:spPr>
-        <p:txBody>
-          <a:bodyPr wrap="square" lIns="0" rIns="0" tIns="0" bIns="0" anchor="ctr">
-            <a:spAutoFit/>
-          </a:bodyPr>
-          <a:lstStyle/>
-          <a:p>
-            <a:pPr algn="l">
-              <a:lnSpc>
-                <a:spcPct val="100000"/>
-              </a:lnSpc>
-            </a:pPr>
-            <a:r>
-              <a:rPr sz="2325" b="1">
-                <a:solidFill>
-                  <a:srgbClr val="1E3E69"/>
-                </a:solidFill>
-                <a:latin typeface="Pretendard"/>
-                <a:ea typeface="Pretendard"/>
-                <a:cs typeface="Pretendard"/>
-              </a:rPr>
-              <a:t>공고에 붙은 직무기술서가 있으면 「필요 지식 · 기술 · 태도」를 봅니다</a:t>
-            </a:r>
-          </a:p>
-        </p:txBody>
-      </p:sp>
-      <p:sp>
-        <p:nvSpPr>
-          <p:cNvPr id="12" name="Rounded Rectangle 11"/>
-          <p:cNvSpPr/>
-          <p:nvPr/>
-        </p:nvSpPr>
-        <p:spPr>
-          <a:xfrm>
-            <a:off x="1143000" y="3886200"/>
-            <a:ext cx="16002000" cy="819150"/>
+                <a:spcPct val="115000"/>
+              </a:lnSpc>
+            </a:pPr>
+            <a:r>
+              <a:rPr sz="1875" b="0">
+                <a:solidFill>
+                  <a:srgbClr val="22252B"/>
+                </a:solidFill>
+                <a:latin typeface="Pretendard"/>
+                <a:ea typeface="Pretendard"/>
+                <a:cs typeface="Pretendard"/>
+              </a:rPr>
+              <a:t>입고 · 출고 일정 관리 및 전산 입력 / 거래처 주문 확인 · 배차 조율 / 재고 현황 점검 및 월간 보고 / 현장 작업자와 일정 소통</a:t>
+            </a:r>
+          </a:p>
+        </p:txBody>
+      </p:sp>
+      <p:sp>
+        <p:nvSpPr>
+          <p:cNvPr id="16" name="Rounded Rectangle 15"/>
+          <p:cNvSpPr/>
+          <p:nvPr/>
+        </p:nvSpPr>
+        <p:spPr>
+          <a:xfrm>
+            <a:off x="1143000" y="4171950"/>
+            <a:ext cx="2842260" cy="647700"/>
           </a:xfrm>
           <a:prstGeom prst="roundRect">
             <a:avLst>
-              <a:gd name="adj" fmla="val 5813"/>
+              <a:gd name="adj" fmla="val 5882"/>
+            </a:avLst>
+          </a:prstGeom>
+          <a:solidFill>
+            <a:srgbClr val="E6F4EE"/>
+          </a:solidFill>
+          <a:ln w="9525">
+            <a:solidFill>
+              <a:srgbClr val="C3E6D8"/>
+            </a:solidFill>
+          </a:ln>
+          <a:effectLst/>
+        </p:spPr>
+        <p:txBody>
+          <a:bodyPr rtlCol="0" anchor="ctr" wrap="square"/>
+          <a:lstStyle/>
+          <a:p>
+            <a:pPr algn="ctr"/>
+          </a:p>
+        </p:txBody>
+      </p:sp>
+      <p:sp>
+        <p:nvSpPr>
+          <p:cNvPr id="17" name="TextBox 16"/>
+          <p:cNvSpPr txBox="1"/>
+          <p:nvPr/>
+        </p:nvSpPr>
+        <p:spPr>
+          <a:xfrm>
+            <a:off x="1238250" y="4171950"/>
+            <a:ext cx="2651760" cy="647700"/>
+          </a:xfrm>
+          <a:prstGeom prst="rect">
+            <a:avLst/>
+          </a:prstGeom>
+          <a:noFill/>
+        </p:spPr>
+        <p:txBody>
+          <a:bodyPr wrap="square" lIns="0" rIns="0" tIns="0" bIns="0" anchor="ctr">
+            <a:spAutoFit/>
+          </a:bodyPr>
+          <a:lstStyle/>
+          <a:p>
+            <a:pPr algn="l">
+              <a:lnSpc>
+                <a:spcPct val="115000"/>
+              </a:lnSpc>
+            </a:pPr>
+            <a:r>
+              <a:rPr sz="1875" b="1">
+                <a:solidFill>
+                  <a:srgbClr val="1E3E69"/>
+                </a:solidFill>
+                <a:latin typeface="Pretendard"/>
+                <a:ea typeface="Pretendard"/>
+                <a:cs typeface="Pretendard"/>
+              </a:rPr>
+              <a:t>자격 요건</a:t>
+            </a:r>
+          </a:p>
+        </p:txBody>
+      </p:sp>
+      <p:sp>
+        <p:nvSpPr>
+          <p:cNvPr id="18" name="Rounded Rectangle 17"/>
+          <p:cNvSpPr/>
+          <p:nvPr/>
+        </p:nvSpPr>
+        <p:spPr>
+          <a:xfrm>
+            <a:off x="4023360" y="4171950"/>
+            <a:ext cx="13121640" cy="647700"/>
+          </a:xfrm>
+          <a:prstGeom prst="roundRect">
+            <a:avLst>
+              <a:gd name="adj" fmla="val 5882"/>
             </a:avLst>
           </a:prstGeom>
           <a:solidFill>
@@ -5420,130 +5643,134 @@
       </p:sp>
       <p:sp>
         <p:nvSpPr>
-          <p:cNvPr id="13" name="Oval 12"/>
-          <p:cNvSpPr/>
-          <p:nvPr/>
-        </p:nvSpPr>
-        <p:spPr>
-          <a:xfrm>
-            <a:off x="1390650" y="4029075"/>
-            <a:ext cx="533400" cy="533400"/>
-          </a:xfrm>
-          <a:prstGeom prst="ellipse">
-            <a:avLst/>
-          </a:prstGeom>
-          <a:solidFill>
-            <a:srgbClr val="1E3E69"/>
-          </a:solidFill>
-          <a:ln>
-            <a:noFill/>
-          </a:ln>
-          <a:effectLst/>
-        </p:spPr>
-        <p:txBody>
-          <a:bodyPr rtlCol="0" anchor="ctr" wrap="square"/>
-          <a:lstStyle/>
-          <a:p>
-            <a:pPr algn="ctr"/>
-          </a:p>
-        </p:txBody>
-      </p:sp>
-      <p:sp>
-        <p:nvSpPr>
-          <p:cNvPr id="14" name="TextBox 13"/>
-          <p:cNvSpPr txBox="1"/>
-          <p:nvPr/>
-        </p:nvSpPr>
-        <p:spPr>
-          <a:xfrm>
-            <a:off x="1390650" y="4152900"/>
-            <a:ext cx="533400" cy="323850"/>
-          </a:xfrm>
-          <a:prstGeom prst="rect">
-            <a:avLst/>
-          </a:prstGeom>
-          <a:noFill/>
-        </p:spPr>
-        <p:txBody>
-          <a:bodyPr wrap="square" lIns="0" rIns="0" tIns="0" bIns="0" anchor="t">
+          <p:cNvPr id="19" name="TextBox 18"/>
+          <p:cNvSpPr txBox="1"/>
+          <p:nvPr/>
+        </p:nvSpPr>
+        <p:spPr>
+          <a:xfrm>
+            <a:off x="4118610" y="4171950"/>
+            <a:ext cx="12931140" cy="647700"/>
+          </a:xfrm>
+          <a:prstGeom prst="rect">
+            <a:avLst/>
+          </a:prstGeom>
+          <a:noFill/>
+        </p:spPr>
+        <p:txBody>
+          <a:bodyPr wrap="square" lIns="0" rIns="0" tIns="0" bIns="0" anchor="ctr">
             <a:spAutoFit/>
           </a:bodyPr>
           <a:lstStyle/>
           <a:p>
             <a:pPr algn="ctr">
               <a:lnSpc>
-                <a:spcPct val="100000"/>
-              </a:lnSpc>
-            </a:pPr>
-            <a:r>
-              <a:rPr sz="2100" b="1">
-                <a:solidFill>
-                  <a:srgbClr val="FFFFFF"/>
-                </a:solidFill>
-                <a:latin typeface="Pretendard"/>
-                <a:ea typeface="Pretendard"/>
-                <a:cs typeface="Pretendard"/>
-              </a:rPr>
-              <a:t>2</a:t>
-            </a:r>
-          </a:p>
-        </p:txBody>
-      </p:sp>
-      <p:sp>
-        <p:nvSpPr>
-          <p:cNvPr id="15" name="TextBox 14"/>
-          <p:cNvSpPr txBox="1"/>
-          <p:nvPr/>
-        </p:nvSpPr>
-        <p:spPr>
-          <a:xfrm>
-            <a:off x="2190750" y="3886200"/>
-            <a:ext cx="14573250" cy="819150"/>
-          </a:xfrm>
-          <a:prstGeom prst="rect">
-            <a:avLst/>
-          </a:prstGeom>
-          <a:noFill/>
-        </p:spPr>
-        <p:txBody>
-          <a:bodyPr wrap="square" lIns="0" rIns="0" tIns="0" bIns="0" anchor="ctr">
-            <a:spAutoFit/>
-          </a:bodyPr>
-          <a:lstStyle/>
-          <a:p>
-            <a:pPr algn="l">
-              <a:lnSpc>
-                <a:spcPct val="100000"/>
-              </a:lnSpc>
-            </a:pPr>
-            <a:r>
-              <a:rPr sz="2325" b="1">
-                <a:solidFill>
-                  <a:srgbClr val="1E3E69"/>
-                </a:solidFill>
-                <a:latin typeface="Pretendard"/>
-                <a:ea typeface="Pretendard"/>
-                <a:cs typeface="Pretendard"/>
-              </a:rPr>
-              <a:t>NCS(국가직무능력표준) 사이트 ncs.go.kr 에서 직무별 능력단위를 찾아봅니다</a:t>
-            </a:r>
-          </a:p>
-        </p:txBody>
-      </p:sp>
-      <p:sp>
-        <p:nvSpPr>
-          <p:cNvPr id="16" name="Rounded Rectangle 15"/>
-          <p:cNvSpPr/>
-          <p:nvPr/>
-        </p:nvSpPr>
-        <p:spPr>
-          <a:xfrm>
-            <a:off x="1143000" y="4876800"/>
-            <a:ext cx="16002000" cy="819150"/>
+                <a:spcPct val="115000"/>
+              </a:lnSpc>
+            </a:pPr>
+            <a:r>
+              <a:rPr sz="1875" b="0">
+                <a:solidFill>
+                  <a:srgbClr val="22252B"/>
+                </a:solidFill>
+                <a:latin typeface="Pretendard"/>
+                <a:ea typeface="Pretendard"/>
+                <a:cs typeface="Pretendard"/>
+              </a:rPr>
+              <a:t>컴퓨터 활용 가능(엑셀) / 원활한 의사소통</a:t>
+            </a:r>
+          </a:p>
+        </p:txBody>
+      </p:sp>
+      <p:sp>
+        <p:nvSpPr>
+          <p:cNvPr id="20" name="Rounded Rectangle 19"/>
+          <p:cNvSpPr/>
+          <p:nvPr/>
+        </p:nvSpPr>
+        <p:spPr>
+          <a:xfrm>
+            <a:off x="1143000" y="4895850"/>
+            <a:ext cx="2842260" cy="647700"/>
           </a:xfrm>
           <a:prstGeom prst="roundRect">
             <a:avLst>
-              <a:gd name="adj" fmla="val 5813"/>
+              <a:gd name="adj" fmla="val 5882"/>
+            </a:avLst>
+          </a:prstGeom>
+          <a:solidFill>
+            <a:srgbClr val="E6F4EE"/>
+          </a:solidFill>
+          <a:ln w="9525">
+            <a:solidFill>
+              <a:srgbClr val="C3E6D8"/>
+            </a:solidFill>
+          </a:ln>
+          <a:effectLst/>
+        </p:spPr>
+        <p:txBody>
+          <a:bodyPr rtlCol="0" anchor="ctr" wrap="square"/>
+          <a:lstStyle/>
+          <a:p>
+            <a:pPr algn="ctr"/>
+          </a:p>
+        </p:txBody>
+      </p:sp>
+      <p:sp>
+        <p:nvSpPr>
+          <p:cNvPr id="21" name="TextBox 20"/>
+          <p:cNvSpPr txBox="1"/>
+          <p:nvPr/>
+        </p:nvSpPr>
+        <p:spPr>
+          <a:xfrm>
+            <a:off x="1238250" y="4895850"/>
+            <a:ext cx="2651760" cy="647700"/>
+          </a:xfrm>
+          <a:prstGeom prst="rect">
+            <a:avLst/>
+          </a:prstGeom>
+          <a:noFill/>
+        </p:spPr>
+        <p:txBody>
+          <a:bodyPr wrap="square" lIns="0" rIns="0" tIns="0" bIns="0" anchor="ctr">
+            <a:spAutoFit/>
+          </a:bodyPr>
+          <a:lstStyle/>
+          <a:p>
+            <a:pPr algn="l">
+              <a:lnSpc>
+                <a:spcPct val="115000"/>
+              </a:lnSpc>
+            </a:pPr>
+            <a:r>
+              <a:rPr sz="1875" b="1">
+                <a:solidFill>
+                  <a:srgbClr val="1E3E69"/>
+                </a:solidFill>
+                <a:latin typeface="Pretendard"/>
+                <a:ea typeface="Pretendard"/>
+                <a:cs typeface="Pretendard"/>
+              </a:rPr>
+              <a:t>우대 사항</a:t>
+            </a:r>
+          </a:p>
+        </p:txBody>
+      </p:sp>
+      <p:sp>
+        <p:nvSpPr>
+          <p:cNvPr id="22" name="Rounded Rectangle 21"/>
+          <p:cNvSpPr/>
+          <p:nvPr/>
+        </p:nvSpPr>
+        <p:spPr>
+          <a:xfrm>
+            <a:off x="4023360" y="4895850"/>
+            <a:ext cx="13121640" cy="647700"/>
+          </a:xfrm>
+          <a:prstGeom prst="roundRect">
+            <a:avLst>
+              <a:gd name="adj" fmla="val 5882"/>
             </a:avLst>
           </a:prstGeom>
           <a:solidFill>
@@ -5566,130 +5793,134 @@
       </p:sp>
       <p:sp>
         <p:nvSpPr>
-          <p:cNvPr id="17" name="Oval 16"/>
-          <p:cNvSpPr/>
-          <p:nvPr/>
-        </p:nvSpPr>
-        <p:spPr>
-          <a:xfrm>
-            <a:off x="1390650" y="5019675"/>
-            <a:ext cx="533400" cy="533400"/>
-          </a:xfrm>
-          <a:prstGeom prst="ellipse">
-            <a:avLst/>
-          </a:prstGeom>
-          <a:solidFill>
-            <a:srgbClr val="1E3E69"/>
-          </a:solidFill>
-          <a:ln>
-            <a:noFill/>
-          </a:ln>
-          <a:effectLst/>
-        </p:spPr>
-        <p:txBody>
-          <a:bodyPr rtlCol="0" anchor="ctr" wrap="square"/>
-          <a:lstStyle/>
-          <a:p>
-            <a:pPr algn="ctr"/>
-          </a:p>
-        </p:txBody>
-      </p:sp>
-      <p:sp>
-        <p:nvSpPr>
-          <p:cNvPr id="18" name="TextBox 17"/>
-          <p:cNvSpPr txBox="1"/>
-          <p:nvPr/>
-        </p:nvSpPr>
-        <p:spPr>
-          <a:xfrm>
-            <a:off x="1390650" y="5143500"/>
-            <a:ext cx="533400" cy="323850"/>
-          </a:xfrm>
-          <a:prstGeom prst="rect">
-            <a:avLst/>
-          </a:prstGeom>
-          <a:noFill/>
-        </p:spPr>
-        <p:txBody>
-          <a:bodyPr wrap="square" lIns="0" rIns="0" tIns="0" bIns="0" anchor="t">
+          <p:cNvPr id="23" name="TextBox 22"/>
+          <p:cNvSpPr txBox="1"/>
+          <p:nvPr/>
+        </p:nvSpPr>
+        <p:spPr>
+          <a:xfrm>
+            <a:off x="4118610" y="4895850"/>
+            <a:ext cx="12931140" cy="647700"/>
+          </a:xfrm>
+          <a:prstGeom prst="rect">
+            <a:avLst/>
+          </a:prstGeom>
+          <a:noFill/>
+        </p:spPr>
+        <p:txBody>
+          <a:bodyPr wrap="square" lIns="0" rIns="0" tIns="0" bIns="0" anchor="ctr">
             <a:spAutoFit/>
           </a:bodyPr>
           <a:lstStyle/>
           <a:p>
             <a:pPr algn="ctr">
               <a:lnSpc>
-                <a:spcPct val="100000"/>
-              </a:lnSpc>
-            </a:pPr>
-            <a:r>
-              <a:rPr sz="2100" b="1">
-                <a:solidFill>
-                  <a:srgbClr val="FFFFFF"/>
-                </a:solidFill>
-                <a:latin typeface="Pretendard"/>
-                <a:ea typeface="Pretendard"/>
-                <a:cs typeface="Pretendard"/>
-              </a:rPr>
-              <a:t>3</a:t>
-            </a:r>
-          </a:p>
-        </p:txBody>
-      </p:sp>
-      <p:sp>
-        <p:nvSpPr>
-          <p:cNvPr id="19" name="TextBox 18"/>
-          <p:cNvSpPr txBox="1"/>
-          <p:nvPr/>
-        </p:nvSpPr>
-        <p:spPr>
-          <a:xfrm>
-            <a:off x="2190750" y="4876800"/>
-            <a:ext cx="14573250" cy="819150"/>
-          </a:xfrm>
-          <a:prstGeom prst="rect">
-            <a:avLst/>
-          </a:prstGeom>
-          <a:noFill/>
-        </p:spPr>
-        <p:txBody>
-          <a:bodyPr wrap="square" lIns="0" rIns="0" tIns="0" bIns="0" anchor="ctr">
-            <a:spAutoFit/>
-          </a:bodyPr>
-          <a:lstStyle/>
-          <a:p>
-            <a:pPr algn="l">
-              <a:lnSpc>
-                <a:spcPct val="100000"/>
-              </a:lnSpc>
-            </a:pPr>
-            <a:r>
-              <a:rPr sz="2325" b="1">
-                <a:solidFill>
-                  <a:srgbClr val="1E3E69"/>
-                </a:solidFill>
-                <a:latin typeface="Pretendard"/>
-                <a:ea typeface="Pretendard"/>
-                <a:cs typeface="Pretendard"/>
-              </a:rPr>
-              <a:t>같은 직종 공고 두세 개를 나란히 보면 공통 역량이 드러납니다</a:t>
-            </a:r>
-          </a:p>
-        </p:txBody>
-      </p:sp>
-      <p:sp>
-        <p:nvSpPr>
-          <p:cNvPr id="20" name="Rounded Rectangle 19"/>
-          <p:cNvSpPr/>
-          <p:nvPr/>
-        </p:nvSpPr>
-        <p:spPr>
-          <a:xfrm>
-            <a:off x="1143000" y="5867400"/>
-            <a:ext cx="16002000" cy="819150"/>
+                <a:spcPct val="115000"/>
+              </a:lnSpc>
+            </a:pPr>
+            <a:r>
+              <a:rPr sz="1875" b="0">
+                <a:solidFill>
+                  <a:srgbClr val="22252B"/>
+                </a:solidFill>
+                <a:latin typeface="Pretendard"/>
+                <a:ea typeface="Pretendard"/>
+                <a:cs typeface="Pretendard"/>
+              </a:rPr>
+              <a:t>물류 · 영업관리 경력자 / 거래처 관리 경험 / 운전면허 소지자</a:t>
+            </a:r>
+          </a:p>
+        </p:txBody>
+      </p:sp>
+      <p:sp>
+        <p:nvSpPr>
+          <p:cNvPr id="24" name="Rounded Rectangle 23"/>
+          <p:cNvSpPr/>
+          <p:nvPr/>
+        </p:nvSpPr>
+        <p:spPr>
+          <a:xfrm>
+            <a:off x="1143000" y="5619750"/>
+            <a:ext cx="2842260" cy="647700"/>
           </a:xfrm>
           <a:prstGeom prst="roundRect">
             <a:avLst>
-              <a:gd name="adj" fmla="val 5813"/>
+              <a:gd name="adj" fmla="val 5882"/>
+            </a:avLst>
+          </a:prstGeom>
+          <a:solidFill>
+            <a:srgbClr val="E6F4EE"/>
+          </a:solidFill>
+          <a:ln w="9525">
+            <a:solidFill>
+              <a:srgbClr val="C3E6D8"/>
+            </a:solidFill>
+          </a:ln>
+          <a:effectLst/>
+        </p:spPr>
+        <p:txBody>
+          <a:bodyPr rtlCol="0" anchor="ctr" wrap="square"/>
+          <a:lstStyle/>
+          <a:p>
+            <a:pPr algn="ctr"/>
+          </a:p>
+        </p:txBody>
+      </p:sp>
+      <p:sp>
+        <p:nvSpPr>
+          <p:cNvPr id="25" name="TextBox 24"/>
+          <p:cNvSpPr txBox="1"/>
+          <p:nvPr/>
+        </p:nvSpPr>
+        <p:spPr>
+          <a:xfrm>
+            <a:off x="1238250" y="5619750"/>
+            <a:ext cx="2651760" cy="647700"/>
+          </a:xfrm>
+          <a:prstGeom prst="rect">
+            <a:avLst/>
+          </a:prstGeom>
+          <a:noFill/>
+        </p:spPr>
+        <p:txBody>
+          <a:bodyPr wrap="square" lIns="0" rIns="0" tIns="0" bIns="0" anchor="ctr">
+            <a:spAutoFit/>
+          </a:bodyPr>
+          <a:lstStyle/>
+          <a:p>
+            <a:pPr algn="l">
+              <a:lnSpc>
+                <a:spcPct val="115000"/>
+              </a:lnSpc>
+            </a:pPr>
+            <a:r>
+              <a:rPr sz="1875" b="1">
+                <a:solidFill>
+                  <a:srgbClr val="1E3E69"/>
+                </a:solidFill>
+                <a:latin typeface="Pretendard"/>
+                <a:ea typeface="Pretendard"/>
+                <a:cs typeface="Pretendard"/>
+              </a:rPr>
+              <a:t>근무 조건</a:t>
+            </a:r>
+          </a:p>
+        </p:txBody>
+      </p:sp>
+      <p:sp>
+        <p:nvSpPr>
+          <p:cNvPr id="26" name="Rounded Rectangle 25"/>
+          <p:cNvSpPr/>
+          <p:nvPr/>
+        </p:nvSpPr>
+        <p:spPr>
+          <a:xfrm>
+            <a:off x="4023360" y="5619750"/>
+            <a:ext cx="13121640" cy="647700"/>
+          </a:xfrm>
+          <a:prstGeom prst="roundRect">
+            <a:avLst>
+              <a:gd name="adj" fmla="val 5882"/>
             </a:avLst>
           </a:prstGeom>
           <a:solidFill>
@@ -5712,20 +5943,102 @@
       </p:sp>
       <p:sp>
         <p:nvSpPr>
-          <p:cNvPr id="21" name="Oval 20"/>
-          <p:cNvSpPr/>
-          <p:nvPr/>
-        </p:nvSpPr>
-        <p:spPr>
-          <a:xfrm>
-            <a:off x="1390650" y="6010275"/>
-            <a:ext cx="533400" cy="533400"/>
-          </a:xfrm>
-          <a:prstGeom prst="ellipse">
-            <a:avLst/>
-          </a:prstGeom>
-          <a:solidFill>
-            <a:srgbClr val="1E3E69"/>
+          <p:cNvPr id="27" name="TextBox 26"/>
+          <p:cNvSpPr txBox="1"/>
+          <p:nvPr/>
+        </p:nvSpPr>
+        <p:spPr>
+          <a:xfrm>
+            <a:off x="4118610" y="5619750"/>
+            <a:ext cx="12931140" cy="647700"/>
+          </a:xfrm>
+          <a:prstGeom prst="rect">
+            <a:avLst/>
+          </a:prstGeom>
+          <a:noFill/>
+        </p:spPr>
+        <p:txBody>
+          <a:bodyPr wrap="square" lIns="0" rIns="0" tIns="0" bIns="0" anchor="ctr">
+            <a:spAutoFit/>
+          </a:bodyPr>
+          <a:lstStyle/>
+          <a:p>
+            <a:pPr algn="ctr">
+              <a:lnSpc>
+                <a:spcPct val="115000"/>
+              </a:lnSpc>
+            </a:pPr>
+            <a:r>
+              <a:rPr sz="1875" b="0">
+                <a:solidFill>
+                  <a:srgbClr val="22252B"/>
+                </a:solidFill>
+                <a:latin typeface="Pretendard"/>
+                <a:ea typeface="Pretendard"/>
+                <a:cs typeface="Pretendard"/>
+              </a:rPr>
+              <a:t>정규직 · 주 5일 · 09:00~18:00 · 급여 회사 내규에 따름</a:t>
+            </a:r>
+          </a:p>
+        </p:txBody>
+      </p:sp>
+      <p:sp>
+        <p:nvSpPr>
+          <p:cNvPr id="28" name="TextBox 27"/>
+          <p:cNvSpPr txBox="1"/>
+          <p:nvPr/>
+        </p:nvSpPr>
+        <p:spPr>
+          <a:xfrm>
+            <a:off x="1143000" y="7620000"/>
+            <a:ext cx="16002000" cy="342900"/>
+          </a:xfrm>
+          <a:prstGeom prst="rect">
+            <a:avLst/>
+          </a:prstGeom>
+          <a:noFill/>
+        </p:spPr>
+        <p:txBody>
+          <a:bodyPr wrap="square" lIns="0" rIns="0" tIns="0" bIns="0" anchor="t">
+            <a:spAutoFit/>
+          </a:bodyPr>
+          <a:lstStyle/>
+          <a:p>
+            <a:pPr algn="l">
+              <a:lnSpc>
+                <a:spcPct val="100000"/>
+              </a:lnSpc>
+            </a:pPr>
+            <a:r>
+              <a:rPr sz="1875" b="1">
+                <a:solidFill>
+                  <a:srgbClr val="5E6370"/>
+                </a:solidFill>
+                <a:latin typeface="Pretendard"/>
+                <a:ea typeface="Pretendard"/>
+                <a:cs typeface="Pretendard"/>
+              </a:rPr>
+              <a:t>학습사이트 「연습 재료」에서 복사합니다 — 실제 공고가 없는 분은 이 공고로 따라 합니다</a:t>
+            </a:r>
+          </a:p>
+        </p:txBody>
+      </p:sp>
+      <p:sp>
+        <p:nvSpPr>
+          <p:cNvPr id="29" name="Rectangle 28"/>
+          <p:cNvSpPr/>
+          <p:nvPr/>
+        </p:nvSpPr>
+        <p:spPr>
+          <a:xfrm>
+            <a:off x="1143000" y="8058150"/>
+            <a:ext cx="16002000" cy="9525"/>
+          </a:xfrm>
+          <a:prstGeom prst="rect">
+            <a:avLst/>
+          </a:prstGeom>
+          <a:solidFill>
+            <a:srgbClr val="D8E1EE"/>
           </a:solidFill>
           <a:ln>
             <a:noFill/>
@@ -5742,194 +6055,7 @@
       </p:sp>
       <p:sp>
         <p:nvSpPr>
-          <p:cNvPr id="22" name="TextBox 21"/>
-          <p:cNvSpPr txBox="1"/>
-          <p:nvPr/>
-        </p:nvSpPr>
-        <p:spPr>
-          <a:xfrm>
-            <a:off x="1390650" y="6134100"/>
-            <a:ext cx="533400" cy="323850"/>
-          </a:xfrm>
-          <a:prstGeom prst="rect">
-            <a:avLst/>
-          </a:prstGeom>
-          <a:noFill/>
-        </p:spPr>
-        <p:txBody>
-          <a:bodyPr wrap="square" lIns="0" rIns="0" tIns="0" bIns="0" anchor="t">
-            <a:spAutoFit/>
-          </a:bodyPr>
-          <a:lstStyle/>
-          <a:p>
-            <a:pPr algn="ctr">
-              <a:lnSpc>
-                <a:spcPct val="100000"/>
-              </a:lnSpc>
-            </a:pPr>
-            <a:r>
-              <a:rPr sz="2100" b="1">
-                <a:solidFill>
-                  <a:srgbClr val="FFFFFF"/>
-                </a:solidFill>
-                <a:latin typeface="Pretendard"/>
-                <a:ea typeface="Pretendard"/>
-                <a:cs typeface="Pretendard"/>
-              </a:rPr>
-              <a:t>4</a:t>
-            </a:r>
-          </a:p>
-        </p:txBody>
-      </p:sp>
-      <p:sp>
-        <p:nvSpPr>
-          <p:cNvPr id="23" name="TextBox 22"/>
-          <p:cNvSpPr txBox="1"/>
-          <p:nvPr/>
-        </p:nvSpPr>
-        <p:spPr>
-          <a:xfrm>
-            <a:off x="2190750" y="5867400"/>
-            <a:ext cx="14573250" cy="819150"/>
-          </a:xfrm>
-          <a:prstGeom prst="rect">
-            <a:avLst/>
-          </a:prstGeom>
-          <a:noFill/>
-        </p:spPr>
-        <p:txBody>
-          <a:bodyPr wrap="square" lIns="0" rIns="0" tIns="0" bIns="0" anchor="ctr">
-            <a:spAutoFit/>
-          </a:bodyPr>
-          <a:lstStyle/>
-          <a:p>
-            <a:pPr algn="l">
-              <a:lnSpc>
-                <a:spcPct val="100000"/>
-              </a:lnSpc>
-            </a:pPr>
-            <a:r>
-              <a:rPr sz="2325" b="1">
-                <a:solidFill>
-                  <a:srgbClr val="1E3E69"/>
-                </a:solidFill>
-                <a:latin typeface="Pretendard"/>
-                <a:ea typeface="Pretendard"/>
-                <a:cs typeface="Pretendard"/>
-              </a:rPr>
-              <a:t>1교시 흥미 유형의 강점 낱말과 겹치는 역량에 표시합니다</a:t>
-            </a:r>
-          </a:p>
-        </p:txBody>
-      </p:sp>
-      <p:sp>
-        <p:nvSpPr>
-          <p:cNvPr id="24" name="Rounded Rectangle 23"/>
-          <p:cNvSpPr/>
-          <p:nvPr/>
-        </p:nvSpPr>
-        <p:spPr>
-          <a:xfrm>
-            <a:off x="1143000" y="6953250"/>
-            <a:ext cx="16002000" cy="876300"/>
-          </a:xfrm>
-          <a:prstGeom prst="roundRect">
-            <a:avLst>
-              <a:gd name="adj" fmla="val 5434"/>
-            </a:avLst>
-          </a:prstGeom>
-          <a:solidFill>
-            <a:srgbClr val="E6F4EE"/>
-          </a:solidFill>
-          <a:ln w="9525">
-            <a:solidFill>
-              <a:srgbClr val="C3E6D8"/>
-            </a:solidFill>
-          </a:ln>
-          <a:effectLst/>
-        </p:spPr>
-        <p:txBody>
-          <a:bodyPr rtlCol="0" anchor="ctr" wrap="square"/>
-          <a:lstStyle/>
-          <a:p>
-            <a:pPr algn="ctr"/>
-          </a:p>
-        </p:txBody>
-      </p:sp>
-      <p:sp>
-        <p:nvSpPr>
-          <p:cNvPr id="25" name="TextBox 24"/>
-          <p:cNvSpPr txBox="1"/>
-          <p:nvPr/>
-        </p:nvSpPr>
-        <p:spPr>
-          <a:xfrm>
-            <a:off x="1143000" y="7200900"/>
-            <a:ext cx="16002000" cy="438150"/>
-          </a:xfrm>
-          <a:prstGeom prst="rect">
-            <a:avLst/>
-          </a:prstGeom>
-          <a:noFill/>
-        </p:spPr>
-        <p:txBody>
-          <a:bodyPr wrap="square" lIns="0" rIns="0" tIns="0" bIns="0" anchor="t">
-            <a:spAutoFit/>
-          </a:bodyPr>
-          <a:lstStyle/>
-          <a:p>
-            <a:pPr algn="ctr">
-              <a:lnSpc>
-                <a:spcPct val="100000"/>
-              </a:lnSpc>
-            </a:pPr>
-            <a:r>
-              <a:rPr sz="2475" b="1">
-                <a:solidFill>
-                  <a:srgbClr val="1E3E69"/>
-                </a:solidFill>
-                <a:latin typeface="Pretendard"/>
-                <a:ea typeface="Pretendard"/>
-                <a:cs typeface="Pretendard"/>
-              </a:rPr>
-              <a:t>찾은 역량이 3교시 이력서 · 자기소개서의 뼈대가 됩니다</a:t>
-            </a:r>
-          </a:p>
-        </p:txBody>
-      </p:sp>
-      <p:sp>
-        <p:nvSpPr>
-          <p:cNvPr id="26" name="Rectangle 25"/>
-          <p:cNvSpPr/>
-          <p:nvPr/>
-        </p:nvSpPr>
-        <p:spPr>
-          <a:xfrm>
-            <a:off x="1143000" y="8058150"/>
-            <a:ext cx="16002000" cy="9525"/>
-          </a:xfrm>
-          <a:prstGeom prst="rect">
-            <a:avLst/>
-          </a:prstGeom>
-          <a:solidFill>
-            <a:srgbClr val="D8E1EE"/>
-          </a:solidFill>
-          <a:ln>
-            <a:noFill/>
-          </a:ln>
-          <a:effectLst/>
-        </p:spPr>
-        <p:txBody>
-          <a:bodyPr rtlCol="0" anchor="ctr" wrap="square"/>
-          <a:lstStyle/>
-          <a:p>
-            <a:pPr algn="ctr"/>
-          </a:p>
-        </p:txBody>
-      </p:sp>
-      <p:sp>
-        <p:nvSpPr>
-          <p:cNvPr id="27" name="TextBox 26"/>
+          <p:cNvPr id="30" name="TextBox 29"/>
           <p:cNvSpPr txBox="1"/>
           <p:nvPr/>
         </p:nvSpPr>
@@ -5970,7 +6096,7 @@
       </p:sp>
       <p:sp>
         <p:nvSpPr>
-          <p:cNvPr id="28" name="TextBox 27"/>
+          <p:cNvPr id="31" name="TextBox 30"/>
           <p:cNvSpPr txBox="1"/>
           <p:nvPr/>
         </p:nvSpPr>
@@ -6119,274 +6245,130 @@
       </p:sp>
       <p:sp>
         <p:nvSpPr>
-          <p:cNvPr id="5" name="Rounded Rectangle 4"/>
-          <p:cNvSpPr/>
-          <p:nvPr/>
-        </p:nvSpPr>
-        <p:spPr>
-          <a:xfrm>
-            <a:off x="12744450" y="1181100"/>
-            <a:ext cx="4400550" cy="590550"/>
+          <p:cNvPr id="5" name="TextBox 4"/>
+          <p:cNvSpPr txBox="1"/>
+          <p:nvPr/>
+        </p:nvSpPr>
+        <p:spPr>
+          <a:xfrm>
+            <a:off x="1143000" y="838200"/>
+            <a:ext cx="16002000" cy="342900"/>
+          </a:xfrm>
+          <a:prstGeom prst="rect">
+            <a:avLst/>
+          </a:prstGeom>
+          <a:noFill/>
+        </p:spPr>
+        <p:txBody>
+          <a:bodyPr wrap="square" lIns="0" rIns="0" tIns="0" bIns="0" anchor="t">
+            <a:spAutoFit/>
+          </a:bodyPr>
+          <a:lstStyle/>
+          <a:p>
+            <a:pPr algn="l">
+              <a:lnSpc>
+                <a:spcPct val="100000"/>
+              </a:lnSpc>
+            </a:pPr>
+            <a:r>
+              <a:rPr sz="1950" b="1" spc="160">
+                <a:solidFill>
+                  <a:srgbClr val="1E7F5B"/>
+                </a:solidFill>
+                <a:latin typeface="Pretendard"/>
+                <a:ea typeface="Pretendard"/>
+                <a:cs typeface="Pretendard"/>
+              </a:rPr>
+              <a:t>직무기술서와 NCS</a:t>
+            </a:r>
+          </a:p>
+        </p:txBody>
+      </p:sp>
+      <p:sp>
+        <p:nvSpPr>
+          <p:cNvPr id="6" name="TextBox 5"/>
+          <p:cNvSpPr txBox="1"/>
+          <p:nvPr/>
+        </p:nvSpPr>
+        <p:spPr>
+          <a:xfrm>
+            <a:off x="1143000" y="1162050"/>
+            <a:ext cx="16002000" cy="762000"/>
+          </a:xfrm>
+          <a:prstGeom prst="rect">
+            <a:avLst/>
+          </a:prstGeom>
+          <a:noFill/>
+        </p:spPr>
+        <p:txBody>
+          <a:bodyPr wrap="square" lIns="0" rIns="0" tIns="0" bIns="0" anchor="t">
+            <a:spAutoFit/>
+          </a:bodyPr>
+          <a:lstStyle/>
+          <a:p>
+            <a:pPr algn="l">
+              <a:lnSpc>
+                <a:spcPct val="100000"/>
+              </a:lnSpc>
+            </a:pPr>
+            <a:r>
+              <a:rPr sz="5100" b="1">
+                <a:solidFill>
+                  <a:srgbClr val="1E3E69"/>
+                </a:solidFill>
+                <a:latin typeface="Pretendard"/>
+                <a:ea typeface="Pretendard"/>
+                <a:cs typeface="Pretendard"/>
+              </a:rPr>
+              <a:t>공고가 짧을 때 더 볼 곳</a:t>
+            </a:r>
+          </a:p>
+        </p:txBody>
+      </p:sp>
+      <p:sp>
+        <p:nvSpPr>
+          <p:cNvPr id="7" name="Rectangle 6"/>
+          <p:cNvSpPr/>
+          <p:nvPr/>
+        </p:nvSpPr>
+        <p:spPr>
+          <a:xfrm>
+            <a:off x="1143000" y="2038350"/>
+            <a:ext cx="16002000" cy="28575"/>
+          </a:xfrm>
+          <a:prstGeom prst="rect">
+            <a:avLst/>
+          </a:prstGeom>
+          <a:solidFill>
+            <a:srgbClr val="1E3E69"/>
+          </a:solidFill>
+          <a:ln>
+            <a:noFill/>
+          </a:ln>
+          <a:effectLst/>
+        </p:spPr>
+        <p:txBody>
+          <a:bodyPr rtlCol="0" anchor="ctr" wrap="square"/>
+          <a:lstStyle/>
+          <a:p>
+            <a:pPr algn="ctr"/>
+          </a:p>
+        </p:txBody>
+      </p:sp>
+      <p:sp>
+        <p:nvSpPr>
+          <p:cNvPr id="8" name="Rounded Rectangle 7"/>
+          <p:cNvSpPr/>
+          <p:nvPr/>
+        </p:nvSpPr>
+        <p:spPr>
+          <a:xfrm>
+            <a:off x="1143000" y="2895600"/>
+            <a:ext cx="16002000" cy="819150"/>
           </a:xfrm>
           <a:prstGeom prst="roundRect">
             <a:avLst>
-              <a:gd name="adj" fmla="val 50000"/>
-            </a:avLst>
-          </a:prstGeom>
-          <a:solidFill>
-            <a:srgbClr val="1E7F5B"/>
-          </a:solidFill>
-          <a:ln>
-            <a:noFill/>
-          </a:ln>
-          <a:effectLst/>
-        </p:spPr>
-        <p:txBody>
-          <a:bodyPr rtlCol="0" anchor="ctr" wrap="square"/>
-          <a:lstStyle/>
-          <a:p>
-            <a:pPr algn="ctr"/>
-          </a:p>
-        </p:txBody>
-      </p:sp>
-      <p:sp>
-        <p:nvSpPr>
-          <p:cNvPr id="6" name="Oval 5"/>
-          <p:cNvSpPr/>
-          <p:nvPr/>
-        </p:nvSpPr>
-        <p:spPr>
-          <a:xfrm>
-            <a:off x="13068300" y="1400175"/>
-            <a:ext cx="152400" cy="152400"/>
-          </a:xfrm>
-          <a:prstGeom prst="ellipse">
-            <a:avLst/>
-          </a:prstGeom>
-          <a:solidFill>
-            <a:srgbClr val="FFFFFF"/>
-          </a:solidFill>
-          <a:ln>
-            <a:noFill/>
-          </a:ln>
-          <a:effectLst/>
-        </p:spPr>
-        <p:txBody>
-          <a:bodyPr rtlCol="0" anchor="ctr" wrap="square"/>
-          <a:lstStyle/>
-          <a:p>
-            <a:pPr algn="ctr"/>
-          </a:p>
-        </p:txBody>
-      </p:sp>
-      <p:sp>
-        <p:nvSpPr>
-          <p:cNvPr id="7" name="TextBox 6"/>
-          <p:cNvSpPr txBox="1"/>
-          <p:nvPr/>
-        </p:nvSpPr>
-        <p:spPr>
-          <a:xfrm>
-            <a:off x="13258800" y="1295400"/>
-            <a:ext cx="3657600" cy="381000"/>
-          </a:xfrm>
-          <a:prstGeom prst="rect">
-            <a:avLst/>
-          </a:prstGeom>
-          <a:noFill/>
-        </p:spPr>
-        <p:txBody>
-          <a:bodyPr wrap="square" lIns="0" rIns="0" tIns="0" bIns="0" anchor="t">
-            <a:spAutoFit/>
-          </a:bodyPr>
-          <a:lstStyle/>
-          <a:p>
-            <a:pPr algn="ctr">
-              <a:lnSpc>
-                <a:spcPct val="100000"/>
-              </a:lnSpc>
-            </a:pPr>
-            <a:r>
-              <a:rPr sz="2325" b="1">
-                <a:solidFill>
-                  <a:srgbClr val="FFFFFF"/>
-                </a:solidFill>
-                <a:latin typeface="Pretendard"/>
-                <a:ea typeface="Pretendard"/>
-                <a:cs typeface="Pretendard"/>
-              </a:rPr>
-              <a:t>전문은 학습사이트</a:t>
-            </a:r>
-          </a:p>
-        </p:txBody>
-      </p:sp>
-      <p:sp>
-        <p:nvSpPr>
-          <p:cNvPr id="8" name="TextBox 7"/>
-          <p:cNvSpPr txBox="1"/>
-          <p:nvPr/>
-        </p:nvSpPr>
-        <p:spPr>
-          <a:xfrm>
-            <a:off x="1143000" y="838200"/>
-            <a:ext cx="11220450" cy="342900"/>
-          </a:xfrm>
-          <a:prstGeom prst="rect">
-            <a:avLst/>
-          </a:prstGeom>
-          <a:noFill/>
-        </p:spPr>
-        <p:txBody>
-          <a:bodyPr wrap="square" lIns="0" rIns="0" tIns="0" bIns="0" anchor="t">
-            <a:spAutoFit/>
-          </a:bodyPr>
-          <a:lstStyle/>
-          <a:p>
-            <a:pPr algn="l">
-              <a:lnSpc>
-                <a:spcPct val="100000"/>
-              </a:lnSpc>
-            </a:pPr>
-            <a:r>
-              <a:rPr sz="1950" b="1" spc="160">
-                <a:solidFill>
-                  <a:srgbClr val="1E7F5B"/>
-                </a:solidFill>
-                <a:latin typeface="Pretendard"/>
-                <a:ea typeface="Pretendard"/>
-                <a:cs typeface="Pretendard"/>
-              </a:rPr>
-              <a:t>실습 프롬프트 L2-1</a:t>
-            </a:r>
-          </a:p>
-        </p:txBody>
-      </p:sp>
-      <p:sp>
-        <p:nvSpPr>
-          <p:cNvPr id="9" name="TextBox 8"/>
-          <p:cNvSpPr txBox="1"/>
-          <p:nvPr/>
-        </p:nvSpPr>
-        <p:spPr>
-          <a:xfrm>
-            <a:off x="1143000" y="1162050"/>
-            <a:ext cx="11220450" cy="762000"/>
-          </a:xfrm>
-          <a:prstGeom prst="rect">
-            <a:avLst/>
-          </a:prstGeom>
-          <a:noFill/>
-        </p:spPr>
-        <p:txBody>
-          <a:bodyPr wrap="square" lIns="0" rIns="0" tIns="0" bIns="0" anchor="t">
-            <a:spAutoFit/>
-          </a:bodyPr>
-          <a:lstStyle/>
-          <a:p>
-            <a:pPr algn="l">
-              <a:lnSpc>
-                <a:spcPct val="100000"/>
-              </a:lnSpc>
-            </a:pPr>
-            <a:r>
-              <a:rPr sz="5100" b="1">
-                <a:solidFill>
-                  <a:srgbClr val="1E3E69"/>
-                </a:solidFill>
-                <a:latin typeface="Pretendard"/>
-                <a:ea typeface="Pretendard"/>
-                <a:cs typeface="Pretendard"/>
-              </a:rPr>
-              <a:t>직무분석 — 핵심 역량 · 키워드 찾기</a:t>
-            </a:r>
-          </a:p>
-        </p:txBody>
-      </p:sp>
-      <p:sp>
-        <p:nvSpPr>
-          <p:cNvPr id="10" name="Rectangle 9"/>
-          <p:cNvSpPr/>
-          <p:nvPr/>
-        </p:nvSpPr>
-        <p:spPr>
-          <a:xfrm>
-            <a:off x="1143000" y="2038350"/>
-            <a:ext cx="16002000" cy="28575"/>
-          </a:xfrm>
-          <a:prstGeom prst="rect">
-            <a:avLst/>
-          </a:prstGeom>
-          <a:solidFill>
-            <a:srgbClr val="1E3E69"/>
-          </a:solidFill>
-          <a:ln>
-            <a:noFill/>
-          </a:ln>
-          <a:effectLst/>
-        </p:spPr>
-        <p:txBody>
-          <a:bodyPr rtlCol="0" anchor="ctr" wrap="square"/>
-          <a:lstStyle/>
-          <a:p>
-            <a:pPr algn="ctr"/>
-          </a:p>
-        </p:txBody>
-      </p:sp>
-      <p:sp>
-        <p:nvSpPr>
-          <p:cNvPr id="11" name="TextBox 10"/>
-          <p:cNvSpPr txBox="1"/>
-          <p:nvPr/>
-        </p:nvSpPr>
-        <p:spPr>
-          <a:xfrm>
-            <a:off x="1143000" y="3143250"/>
-            <a:ext cx="16002000" cy="400050"/>
-          </a:xfrm>
-          <a:prstGeom prst="rect">
-            <a:avLst/>
-          </a:prstGeom>
-          <a:noFill/>
-        </p:spPr>
-        <p:txBody>
-          <a:bodyPr wrap="square" lIns="0" rIns="0" tIns="0" bIns="0" anchor="t">
-            <a:spAutoFit/>
-          </a:bodyPr>
-          <a:lstStyle/>
-          <a:p>
-            <a:pPr algn="l">
-              <a:lnSpc>
-                <a:spcPct val="100000"/>
-              </a:lnSpc>
-            </a:pPr>
-            <a:r>
-              <a:rPr sz="2250" b="1">
-                <a:solidFill>
-                  <a:srgbClr val="1E7F5B"/>
-                </a:solidFill>
-                <a:latin typeface="Pretendard"/>
-                <a:ea typeface="Pretendard"/>
-                <a:cs typeface="Pretendard"/>
-              </a:rPr>
-              <a:t>핵심 — 공고를 붙이고, 역량 · 키워드 · 흥미 유형 연결을 받는다</a:t>
-            </a:r>
-          </a:p>
-        </p:txBody>
-      </p:sp>
-      <p:sp>
-        <p:nvSpPr>
-          <p:cNvPr id="12" name="Rounded Rectangle 11"/>
-          <p:cNvSpPr/>
-          <p:nvPr/>
-        </p:nvSpPr>
-        <p:spPr>
-          <a:xfrm>
-            <a:off x="1143000" y="3714750"/>
-            <a:ext cx="16002000" cy="2495550"/>
-          </a:xfrm>
-          <a:prstGeom prst="roundRect">
-            <a:avLst>
-              <a:gd name="adj" fmla="val 1908"/>
+              <a:gd name="adj" fmla="val 5813"/>
             </a:avLst>
           </a:prstGeom>
           <a:solidFill>
@@ -6409,16 +6391,16 @@
       </p:sp>
       <p:sp>
         <p:nvSpPr>
-          <p:cNvPr id="13" name="Rectangle 12"/>
-          <p:cNvSpPr/>
-          <p:nvPr/>
-        </p:nvSpPr>
-        <p:spPr>
-          <a:xfrm>
-            <a:off x="1143000" y="3714750"/>
-            <a:ext cx="57150" cy="2495550"/>
-          </a:xfrm>
-          <a:prstGeom prst="rect">
+          <p:cNvPr id="9" name="Oval 8"/>
+          <p:cNvSpPr/>
+          <p:nvPr/>
+        </p:nvSpPr>
+        <p:spPr>
+          <a:xfrm>
+            <a:off x="1390650" y="3038475"/>
+            <a:ext cx="533400" cy="533400"/>
+          </a:xfrm>
+          <a:prstGeom prst="ellipse">
             <a:avLst/>
           </a:prstGeom>
           <a:solidFill>
@@ -6439,14 +6421,14 @@
       </p:sp>
       <p:sp>
         <p:nvSpPr>
-          <p:cNvPr id="14" name="deckgen:ornament"/>
-          <p:cNvSpPr txBox="1"/>
-          <p:nvPr/>
-        </p:nvSpPr>
-        <p:spPr>
-          <a:xfrm>
-            <a:off x="1466850" y="3848100"/>
-            <a:ext cx="857250" cy="1143000"/>
+          <p:cNvPr id="10" name="TextBox 9"/>
+          <p:cNvSpPr txBox="1"/>
+          <p:nvPr/>
+        </p:nvSpPr>
+        <p:spPr>
+          <a:xfrm>
+            <a:off x="1390650" y="3162300"/>
+            <a:ext cx="533400" cy="323850"/>
           </a:xfrm>
           <a:prstGeom prst="rect">
             <a:avLst/>
@@ -6459,54 +6441,54 @@
           </a:bodyPr>
           <a:lstStyle/>
           <a:p>
+            <a:pPr algn="ctr">
+              <a:lnSpc>
+                <a:spcPct val="100000"/>
+              </a:lnSpc>
+            </a:pPr>
+            <a:r>
+              <a:rPr sz="2100" b="1">
+                <a:solidFill>
+                  <a:srgbClr val="FFFFFF"/>
+                </a:solidFill>
+                <a:latin typeface="Pretendard"/>
+                <a:ea typeface="Pretendard"/>
+                <a:cs typeface="Pretendard"/>
+              </a:rPr>
+              <a:t>1</a:t>
+            </a:r>
+          </a:p>
+        </p:txBody>
+      </p:sp>
+      <p:sp>
+        <p:nvSpPr>
+          <p:cNvPr id="11" name="TextBox 10"/>
+          <p:cNvSpPr txBox="1"/>
+          <p:nvPr/>
+        </p:nvSpPr>
+        <p:spPr>
+          <a:xfrm>
+            <a:off x="2190750" y="2895600"/>
+            <a:ext cx="14573250" cy="819150"/>
+          </a:xfrm>
+          <a:prstGeom prst="rect">
+            <a:avLst/>
+          </a:prstGeom>
+          <a:noFill/>
+        </p:spPr>
+        <p:txBody>
+          <a:bodyPr wrap="square" lIns="0" rIns="0" tIns="0" bIns="0" anchor="ctr">
+            <a:spAutoFit/>
+          </a:bodyPr>
+          <a:lstStyle/>
+          <a:p>
             <a:pPr algn="l">
               <a:lnSpc>
                 <a:spcPct val="100000"/>
               </a:lnSpc>
             </a:pPr>
             <a:r>
-              <a:rPr sz="8250" b="1">
-                <a:solidFill>
-                  <a:srgbClr val="DDE4EF"/>
-                </a:solidFill>
-                <a:latin typeface="Pretendard"/>
-                <a:ea typeface="Pretendard"/>
-                <a:cs typeface="Pretendard"/>
-              </a:rPr>
-              <a:t>“</a:t>
-            </a:r>
-          </a:p>
-        </p:txBody>
-      </p:sp>
-      <p:sp>
-        <p:nvSpPr>
-          <p:cNvPr id="15" name="TextBox 14"/>
-          <p:cNvSpPr txBox="1"/>
-          <p:nvPr/>
-        </p:nvSpPr>
-        <p:spPr>
-          <a:xfrm>
-            <a:off x="1676400" y="4038600"/>
-            <a:ext cx="14954250" cy="2000250"/>
-          </a:xfrm>
-          <a:prstGeom prst="rect">
-            <a:avLst/>
-          </a:prstGeom>
-          <a:noFill/>
-        </p:spPr>
-        <p:txBody>
-          <a:bodyPr wrap="square" lIns="0" rIns="0" tIns="0" bIns="0" anchor="t">
-            <a:spAutoFit/>
-          </a:bodyPr>
-          <a:lstStyle/>
-          <a:p>
-            <a:pPr algn="l">
-              <a:lnSpc>
-                <a:spcPct val="150000"/>
-              </a:lnSpc>
-            </a:pPr>
-            <a:r>
-              <a:rPr sz="2700" b="1">
+              <a:rPr sz="2325" b="1">
                 <a:solidFill>
                   <a:srgbClr val="1E3E69"/>
                 </a:solidFill>
@@ -6514,27 +6496,61 @@
                 <a:ea typeface="Pretendard"/>
                 <a:cs typeface="Pretendard"/>
               </a:rPr>
-              <a:t>[역할] 채용 경력 많은 직무분석 전문가 [자료] 공고의 주요 업무 · 자격 요건 · 우대 사항 · 내 흥미 유형 [과업] ① 핵심 역량 3가지 ② 서류에 살릴 키워드 5개 ③ 흥미 유형과의 연결 두 줄 [형식] 표 — 역량 · 공고 근거 문장 · 내가 준비할 것 [조건] 공고에 없으면 「공고에 없음」</a:t>
-            </a:r>
-          </a:p>
-        </p:txBody>
-      </p:sp>
-      <p:sp>
-        <p:nvSpPr>
-          <p:cNvPr id="16" name="Rectangle 15"/>
-          <p:cNvSpPr/>
-          <p:nvPr/>
-        </p:nvSpPr>
-        <p:spPr>
-          <a:xfrm>
-            <a:off x="1143000" y="6667500"/>
-            <a:ext cx="47625" cy="914400"/>
-          </a:xfrm>
-          <a:prstGeom prst="rect">
-            <a:avLst/>
-          </a:prstGeom>
-          <a:solidFill>
-            <a:srgbClr val="1E7F5B"/>
+              <a:t>공고에 붙은 직무기술서가 있으면 「필요 지식 · 기술 · 태도」를 봅니다</a:t>
+            </a:r>
+          </a:p>
+        </p:txBody>
+      </p:sp>
+      <p:sp>
+        <p:nvSpPr>
+          <p:cNvPr id="12" name="Rounded Rectangle 11"/>
+          <p:cNvSpPr/>
+          <p:nvPr/>
+        </p:nvSpPr>
+        <p:spPr>
+          <a:xfrm>
+            <a:off x="1143000" y="3886200"/>
+            <a:ext cx="16002000" cy="819150"/>
+          </a:xfrm>
+          <a:prstGeom prst="roundRect">
+            <a:avLst>
+              <a:gd name="adj" fmla="val 5813"/>
+            </a:avLst>
+          </a:prstGeom>
+          <a:solidFill>
+            <a:srgbClr val="F4F7FA"/>
+          </a:solidFill>
+          <a:ln w="9525">
+            <a:solidFill>
+              <a:srgbClr val="D8E1EE"/>
+            </a:solidFill>
+          </a:ln>
+          <a:effectLst/>
+        </p:spPr>
+        <p:txBody>
+          <a:bodyPr rtlCol="0" anchor="ctr" wrap="square"/>
+          <a:lstStyle/>
+          <a:p>
+            <a:pPr algn="ctr"/>
+          </a:p>
+        </p:txBody>
+      </p:sp>
+      <p:sp>
+        <p:nvSpPr>
+          <p:cNvPr id="13" name="Oval 12"/>
+          <p:cNvSpPr/>
+          <p:nvPr/>
+        </p:nvSpPr>
+        <p:spPr>
+          <a:xfrm>
+            <a:off x="1390650" y="4029075"/>
+            <a:ext cx="533400" cy="533400"/>
+          </a:xfrm>
+          <a:prstGeom prst="ellipse">
+            <a:avLst/>
+          </a:prstGeom>
+          <a:solidFill>
+            <a:srgbClr val="1E3E69"/>
           </a:solidFill>
           <a:ln>
             <a:noFill/>
@@ -6551,14 +6567,14 @@
       </p:sp>
       <p:sp>
         <p:nvSpPr>
-          <p:cNvPr id="17" name="TextBox 16"/>
-          <p:cNvSpPr txBox="1"/>
-          <p:nvPr/>
-        </p:nvSpPr>
-        <p:spPr>
-          <a:xfrm>
-            <a:off x="1409700" y="6686550"/>
-            <a:ext cx="15735300" cy="323850"/>
+          <p:cNvPr id="14" name="TextBox 13"/>
+          <p:cNvSpPr txBox="1"/>
+          <p:nvPr/>
+        </p:nvSpPr>
+        <p:spPr>
+          <a:xfrm>
+            <a:off x="1390650" y="4152900"/>
+            <a:ext cx="533400" cy="323850"/>
           </a:xfrm>
           <a:prstGeom prst="rect">
             <a:avLst/>
@@ -6571,22 +6587,127 @@
           </a:bodyPr>
           <a:lstStyle/>
           <a:p>
+            <a:pPr algn="ctr">
+              <a:lnSpc>
+                <a:spcPct val="100000"/>
+              </a:lnSpc>
+            </a:pPr>
+            <a:r>
+              <a:rPr sz="2100" b="1">
+                <a:solidFill>
+                  <a:srgbClr val="FFFFFF"/>
+                </a:solidFill>
+                <a:latin typeface="Pretendard"/>
+                <a:ea typeface="Pretendard"/>
+                <a:cs typeface="Pretendard"/>
+              </a:rPr>
+              <a:t>2</a:t>
+            </a:r>
+          </a:p>
+        </p:txBody>
+      </p:sp>
+      <p:sp>
+        <p:nvSpPr>
+          <p:cNvPr id="15" name="TextBox 14"/>
+          <p:cNvSpPr txBox="1"/>
+          <p:nvPr/>
+        </p:nvSpPr>
+        <p:spPr>
+          <a:xfrm>
+            <a:off x="2190750" y="3886200"/>
+            <a:ext cx="14573250" cy="819150"/>
+          </a:xfrm>
+          <a:prstGeom prst="rect">
+            <a:avLst/>
+          </a:prstGeom>
+          <a:noFill/>
+        </p:spPr>
+        <p:txBody>
+          <a:bodyPr wrap="square" lIns="0" rIns="0" tIns="0" bIns="0" anchor="ctr">
+            <a:spAutoFit/>
+          </a:bodyPr>
+          <a:lstStyle/>
+          <a:p>
             <a:pPr algn="l">
               <a:lnSpc>
                 <a:spcPct val="100000"/>
               </a:lnSpc>
             </a:pPr>
             <a:r>
-              <a:rPr sz="1875" b="1" spc="150">
-                <a:solidFill>
-                  <a:srgbClr val="1E7F5B"/>
-                </a:solidFill>
-                <a:latin typeface="Pretendard"/>
-                <a:ea typeface="Pretendard"/>
-                <a:cs typeface="Pretendard"/>
-              </a:rPr>
-              <a:t>확인할 것</a:t>
-            </a:r>
+              <a:rPr sz="2325" b="1">
+                <a:solidFill>
+                  <a:srgbClr val="1E3E69"/>
+                </a:solidFill>
+                <a:latin typeface="Pretendard"/>
+                <a:ea typeface="Pretendard"/>
+                <a:cs typeface="Pretendard"/>
+              </a:rPr>
+              <a:t>NCS(국가직무능력표준) 사이트 ncs.go.kr 에서 직무별 능력단위를 찾아봅니다</a:t>
+            </a:r>
+          </a:p>
+        </p:txBody>
+      </p:sp>
+      <p:sp>
+        <p:nvSpPr>
+          <p:cNvPr id="16" name="Rounded Rectangle 15"/>
+          <p:cNvSpPr/>
+          <p:nvPr/>
+        </p:nvSpPr>
+        <p:spPr>
+          <a:xfrm>
+            <a:off x="1143000" y="4876800"/>
+            <a:ext cx="16002000" cy="819150"/>
+          </a:xfrm>
+          <a:prstGeom prst="roundRect">
+            <a:avLst>
+              <a:gd name="adj" fmla="val 5813"/>
+            </a:avLst>
+          </a:prstGeom>
+          <a:solidFill>
+            <a:srgbClr val="F4F7FA"/>
+          </a:solidFill>
+          <a:ln w="9525">
+            <a:solidFill>
+              <a:srgbClr val="D8E1EE"/>
+            </a:solidFill>
+          </a:ln>
+          <a:effectLst/>
+        </p:spPr>
+        <p:txBody>
+          <a:bodyPr rtlCol="0" anchor="ctr" wrap="square"/>
+          <a:lstStyle/>
+          <a:p>
+            <a:pPr algn="ctr"/>
+          </a:p>
+        </p:txBody>
+      </p:sp>
+      <p:sp>
+        <p:nvSpPr>
+          <p:cNvPr id="17" name="Oval 16"/>
+          <p:cNvSpPr/>
+          <p:nvPr/>
+        </p:nvSpPr>
+        <p:spPr>
+          <a:xfrm>
+            <a:off x="1390650" y="5019675"/>
+            <a:ext cx="533400" cy="533400"/>
+          </a:xfrm>
+          <a:prstGeom prst="ellipse">
+            <a:avLst/>
+          </a:prstGeom>
+          <a:solidFill>
+            <a:srgbClr val="1E3E69"/>
+          </a:solidFill>
+          <a:ln>
+            <a:noFill/>
+          </a:ln>
+          <a:effectLst/>
+        </p:spPr>
+        <p:txBody>
+          <a:bodyPr rtlCol="0" anchor="ctr" wrap="square"/>
+          <a:lstStyle/>
+          <a:p>
+            <a:pPr algn="ctr"/>
           </a:p>
         </p:txBody>
       </p:sp>
@@ -6598,8 +6719,8 @@
         </p:nvSpPr>
         <p:spPr>
           <a:xfrm>
-            <a:off x="1409700" y="7067550"/>
-            <a:ext cx="15735300" cy="762000"/>
+            <a:off x="1390650" y="5143500"/>
+            <a:ext cx="533400" cy="323850"/>
           </a:xfrm>
           <a:prstGeom prst="rect">
             <a:avLst/>
@@ -6612,9 +6733,271 @@
           </a:bodyPr>
           <a:lstStyle/>
           <a:p>
+            <a:pPr algn="ctr">
+              <a:lnSpc>
+                <a:spcPct val="100000"/>
+              </a:lnSpc>
+            </a:pPr>
+            <a:r>
+              <a:rPr sz="2100" b="1">
+                <a:solidFill>
+                  <a:srgbClr val="FFFFFF"/>
+                </a:solidFill>
+                <a:latin typeface="Pretendard"/>
+                <a:ea typeface="Pretendard"/>
+                <a:cs typeface="Pretendard"/>
+              </a:rPr>
+              <a:t>3</a:t>
+            </a:r>
+          </a:p>
+        </p:txBody>
+      </p:sp>
+      <p:sp>
+        <p:nvSpPr>
+          <p:cNvPr id="19" name="TextBox 18"/>
+          <p:cNvSpPr txBox="1"/>
+          <p:nvPr/>
+        </p:nvSpPr>
+        <p:spPr>
+          <a:xfrm>
+            <a:off x="2190750" y="4876800"/>
+            <a:ext cx="14573250" cy="819150"/>
+          </a:xfrm>
+          <a:prstGeom prst="rect">
+            <a:avLst/>
+          </a:prstGeom>
+          <a:noFill/>
+        </p:spPr>
+        <p:txBody>
+          <a:bodyPr wrap="square" lIns="0" rIns="0" tIns="0" bIns="0" anchor="ctr">
+            <a:spAutoFit/>
+          </a:bodyPr>
+          <a:lstStyle/>
+          <a:p>
             <a:pPr algn="l">
               <a:lnSpc>
-                <a:spcPct val="140000"/>
+                <a:spcPct val="100000"/>
+              </a:lnSpc>
+            </a:pPr>
+            <a:r>
+              <a:rPr sz="2325" b="1">
+                <a:solidFill>
+                  <a:srgbClr val="1E3E69"/>
+                </a:solidFill>
+                <a:latin typeface="Pretendard"/>
+                <a:ea typeface="Pretendard"/>
+                <a:cs typeface="Pretendard"/>
+              </a:rPr>
+              <a:t>같은 직종 공고 두세 개를 나란히 보면 공통 역량이 드러납니다</a:t>
+            </a:r>
+          </a:p>
+        </p:txBody>
+      </p:sp>
+      <p:sp>
+        <p:nvSpPr>
+          <p:cNvPr id="20" name="Rounded Rectangle 19"/>
+          <p:cNvSpPr/>
+          <p:nvPr/>
+        </p:nvSpPr>
+        <p:spPr>
+          <a:xfrm>
+            <a:off x="1143000" y="5867400"/>
+            <a:ext cx="16002000" cy="819150"/>
+          </a:xfrm>
+          <a:prstGeom prst="roundRect">
+            <a:avLst>
+              <a:gd name="adj" fmla="val 5813"/>
+            </a:avLst>
+          </a:prstGeom>
+          <a:solidFill>
+            <a:srgbClr val="F4F7FA"/>
+          </a:solidFill>
+          <a:ln w="9525">
+            <a:solidFill>
+              <a:srgbClr val="D8E1EE"/>
+            </a:solidFill>
+          </a:ln>
+          <a:effectLst/>
+        </p:spPr>
+        <p:txBody>
+          <a:bodyPr rtlCol="0" anchor="ctr" wrap="square"/>
+          <a:lstStyle/>
+          <a:p>
+            <a:pPr algn="ctr"/>
+          </a:p>
+        </p:txBody>
+      </p:sp>
+      <p:sp>
+        <p:nvSpPr>
+          <p:cNvPr id="21" name="Oval 20"/>
+          <p:cNvSpPr/>
+          <p:nvPr/>
+        </p:nvSpPr>
+        <p:spPr>
+          <a:xfrm>
+            <a:off x="1390650" y="6010275"/>
+            <a:ext cx="533400" cy="533400"/>
+          </a:xfrm>
+          <a:prstGeom prst="ellipse">
+            <a:avLst/>
+          </a:prstGeom>
+          <a:solidFill>
+            <a:srgbClr val="1E3E69"/>
+          </a:solidFill>
+          <a:ln>
+            <a:noFill/>
+          </a:ln>
+          <a:effectLst/>
+        </p:spPr>
+        <p:txBody>
+          <a:bodyPr rtlCol="0" anchor="ctr" wrap="square"/>
+          <a:lstStyle/>
+          <a:p>
+            <a:pPr algn="ctr"/>
+          </a:p>
+        </p:txBody>
+      </p:sp>
+      <p:sp>
+        <p:nvSpPr>
+          <p:cNvPr id="22" name="TextBox 21"/>
+          <p:cNvSpPr txBox="1"/>
+          <p:nvPr/>
+        </p:nvSpPr>
+        <p:spPr>
+          <a:xfrm>
+            <a:off x="1390650" y="6134100"/>
+            <a:ext cx="533400" cy="323850"/>
+          </a:xfrm>
+          <a:prstGeom prst="rect">
+            <a:avLst/>
+          </a:prstGeom>
+          <a:noFill/>
+        </p:spPr>
+        <p:txBody>
+          <a:bodyPr wrap="square" lIns="0" rIns="0" tIns="0" bIns="0" anchor="t">
+            <a:spAutoFit/>
+          </a:bodyPr>
+          <a:lstStyle/>
+          <a:p>
+            <a:pPr algn="ctr">
+              <a:lnSpc>
+                <a:spcPct val="100000"/>
+              </a:lnSpc>
+            </a:pPr>
+            <a:r>
+              <a:rPr sz="2100" b="1">
+                <a:solidFill>
+                  <a:srgbClr val="FFFFFF"/>
+                </a:solidFill>
+                <a:latin typeface="Pretendard"/>
+                <a:ea typeface="Pretendard"/>
+                <a:cs typeface="Pretendard"/>
+              </a:rPr>
+              <a:t>4</a:t>
+            </a:r>
+          </a:p>
+        </p:txBody>
+      </p:sp>
+      <p:sp>
+        <p:nvSpPr>
+          <p:cNvPr id="23" name="TextBox 22"/>
+          <p:cNvSpPr txBox="1"/>
+          <p:nvPr/>
+        </p:nvSpPr>
+        <p:spPr>
+          <a:xfrm>
+            <a:off x="2190750" y="5867400"/>
+            <a:ext cx="14573250" cy="819150"/>
+          </a:xfrm>
+          <a:prstGeom prst="rect">
+            <a:avLst/>
+          </a:prstGeom>
+          <a:noFill/>
+        </p:spPr>
+        <p:txBody>
+          <a:bodyPr wrap="square" lIns="0" rIns="0" tIns="0" bIns="0" anchor="ctr">
+            <a:spAutoFit/>
+          </a:bodyPr>
+          <a:lstStyle/>
+          <a:p>
+            <a:pPr algn="l">
+              <a:lnSpc>
+                <a:spcPct val="100000"/>
+              </a:lnSpc>
+            </a:pPr>
+            <a:r>
+              <a:rPr sz="2325" b="1">
+                <a:solidFill>
+                  <a:srgbClr val="1E3E69"/>
+                </a:solidFill>
+                <a:latin typeface="Pretendard"/>
+                <a:ea typeface="Pretendard"/>
+                <a:cs typeface="Pretendard"/>
+              </a:rPr>
+              <a:t>1교시 흥미 유형의 강점 낱말과 겹치는 역량에 표시합니다</a:t>
+            </a:r>
+          </a:p>
+        </p:txBody>
+      </p:sp>
+      <p:sp>
+        <p:nvSpPr>
+          <p:cNvPr id="24" name="Rounded Rectangle 23"/>
+          <p:cNvSpPr/>
+          <p:nvPr/>
+        </p:nvSpPr>
+        <p:spPr>
+          <a:xfrm>
+            <a:off x="1143000" y="6953250"/>
+            <a:ext cx="16002000" cy="876300"/>
+          </a:xfrm>
+          <a:prstGeom prst="roundRect">
+            <a:avLst>
+              <a:gd name="adj" fmla="val 5434"/>
+            </a:avLst>
+          </a:prstGeom>
+          <a:solidFill>
+            <a:srgbClr val="E6F4EE"/>
+          </a:solidFill>
+          <a:ln w="9525">
+            <a:solidFill>
+              <a:srgbClr val="C3E6D8"/>
+            </a:solidFill>
+          </a:ln>
+          <a:effectLst/>
+        </p:spPr>
+        <p:txBody>
+          <a:bodyPr rtlCol="0" anchor="ctr" wrap="square"/>
+          <a:lstStyle/>
+          <a:p>
+            <a:pPr algn="ctr"/>
+          </a:p>
+        </p:txBody>
+      </p:sp>
+      <p:sp>
+        <p:nvSpPr>
+          <p:cNvPr id="25" name="TextBox 24"/>
+          <p:cNvSpPr txBox="1"/>
+          <p:nvPr/>
+        </p:nvSpPr>
+        <p:spPr>
+          <a:xfrm>
+            <a:off x="1143000" y="7200900"/>
+            <a:ext cx="16002000" cy="438150"/>
+          </a:xfrm>
+          <a:prstGeom prst="rect">
+            <a:avLst/>
+          </a:prstGeom>
+          <a:noFill/>
+        </p:spPr>
+        <p:txBody>
+          <a:bodyPr wrap="square" lIns="0" rIns="0" tIns="0" bIns="0" anchor="t">
+            <a:spAutoFit/>
+          </a:bodyPr>
+          <a:lstStyle/>
+          <a:p>
+            <a:pPr algn="ctr">
+              <a:lnSpc>
+                <a:spcPct val="100000"/>
               </a:lnSpc>
             </a:pPr>
             <a:r>
@@ -6626,14 +7009,14 @@
                 <a:ea typeface="Pretendard"/>
                 <a:cs typeface="Pretendard"/>
               </a:rPr>
-              <a:t>근거 문장이 실제 공고에 있는지 대조합니다</a:t>
-            </a:r>
-          </a:p>
-        </p:txBody>
-      </p:sp>
-      <p:sp>
-        <p:nvSpPr>
-          <p:cNvPr id="19" name="Rectangle 18"/>
+              <a:t>찾은 역량이 3교시 이력서 · 자기소개서의 뼈대가 됩니다</a:t>
+            </a:r>
+          </a:p>
+        </p:txBody>
+      </p:sp>
+      <p:sp>
+        <p:nvSpPr>
+          <p:cNvPr id="26" name="Rectangle 25"/>
           <p:cNvSpPr/>
           <p:nvPr/>
         </p:nvSpPr>
@@ -6663,7 +7046,7 @@
       </p:sp>
       <p:sp>
         <p:nvSpPr>
-          <p:cNvPr id="20" name="TextBox 19"/>
+          <p:cNvPr id="27" name="TextBox 26"/>
           <p:cNvSpPr txBox="1"/>
           <p:nvPr/>
         </p:nvSpPr>
@@ -6704,7 +7087,7 @@
       </p:sp>
       <p:sp>
         <p:nvSpPr>
-          <p:cNvPr id="21" name="TextBox 20"/>
+          <p:cNvPr id="28" name="TextBox 27"/>
           <p:cNvSpPr txBox="1"/>
           <p:nvPr/>
         </p:nvSpPr>
@@ -6859,8 +7242,8 @@
         </p:nvSpPr>
         <p:spPr>
           <a:xfrm>
-            <a:off x="13582650" y="1181100"/>
-            <a:ext cx="3562350" cy="590550"/>
+            <a:off x="12744450" y="1181100"/>
+            <a:ext cx="4400550" cy="590550"/>
           </a:xfrm>
           <a:prstGeom prst="roundRect">
             <a:avLst>
@@ -6891,7 +7274,7 @@
         </p:nvSpPr>
         <p:spPr>
           <a:xfrm>
-            <a:off x="13906500" y="1400175"/>
+            <a:off x="13068300" y="1400175"/>
             <a:ext cx="152400" cy="152400"/>
           </a:xfrm>
           <a:prstGeom prst="ellipse">
@@ -6921,8 +7304,8 @@
         </p:nvSpPr>
         <p:spPr>
           <a:xfrm>
-            <a:off x="14097000" y="1295400"/>
-            <a:ext cx="2819400" cy="381000"/>
+            <a:off x="13258800" y="1295400"/>
+            <a:ext cx="3657600" cy="381000"/>
           </a:xfrm>
           <a:prstGeom prst="rect">
             <a:avLst/>
@@ -6949,7 +7332,7 @@
                 <a:ea typeface="Pretendard"/>
                 <a:cs typeface="Pretendard"/>
               </a:rPr>
-              <a:t>직무분석 메모</a:t>
+              <a:t>전문은 학습사이트</a:t>
             </a:r>
           </a:p>
         </p:txBody>
@@ -6963,7 +7346,7 @@
         <p:spPr>
           <a:xfrm>
             <a:off x="1143000" y="838200"/>
-            <a:ext cx="12058650" cy="342900"/>
+            <a:ext cx="11220450" cy="342900"/>
           </a:xfrm>
           <a:prstGeom prst="rect">
             <a:avLst/>
@@ -6990,7 +7373,7 @@
                 <a:ea typeface="Pretendard"/>
                 <a:cs typeface="Pretendard"/>
               </a:rPr>
-              <a:t>2교시 산출물</a:t>
+              <a:t>실습 프롬프트 L2-1</a:t>
             </a:r>
           </a:p>
         </p:txBody>
@@ -7004,7 +7387,7 @@
         <p:spPr>
           <a:xfrm>
             <a:off x="1143000" y="1162050"/>
-            <a:ext cx="12058650" cy="762000"/>
+            <a:ext cx="11220450" cy="762000"/>
           </a:xfrm>
           <a:prstGeom prst="rect">
             <a:avLst/>
@@ -7031,7 +7414,7 @@
                 <a:ea typeface="Pretendard"/>
                 <a:cs typeface="Pretendard"/>
               </a:rPr>
-              <a:t>직무분석 메모</a:t>
+              <a:t>직무분석 — 핵심 역량 · 키워드 찾기</a:t>
             </a:r>
           </a:p>
         </p:txBody>
@@ -7068,18 +7451,59 @@
       </p:sp>
       <p:sp>
         <p:nvSpPr>
-          <p:cNvPr id="11" name="Rounded Rectangle 10"/>
-          <p:cNvSpPr/>
-          <p:nvPr/>
-        </p:nvSpPr>
-        <p:spPr>
-          <a:xfrm>
-            <a:off x="1143000" y="2476500"/>
-            <a:ext cx="4000500" cy="793750"/>
+          <p:cNvPr id="11" name="TextBox 10"/>
+          <p:cNvSpPr txBox="1"/>
+          <p:nvPr/>
+        </p:nvSpPr>
+        <p:spPr>
+          <a:xfrm>
+            <a:off x="1143000" y="3143250"/>
+            <a:ext cx="16002000" cy="400050"/>
+          </a:xfrm>
+          <a:prstGeom prst="rect">
+            <a:avLst/>
+          </a:prstGeom>
+          <a:noFill/>
+        </p:spPr>
+        <p:txBody>
+          <a:bodyPr wrap="square" lIns="0" rIns="0" tIns="0" bIns="0" anchor="t">
+            <a:spAutoFit/>
+          </a:bodyPr>
+          <a:lstStyle/>
+          <a:p>
+            <a:pPr algn="l">
+              <a:lnSpc>
+                <a:spcPct val="100000"/>
+              </a:lnSpc>
+            </a:pPr>
+            <a:r>
+              <a:rPr sz="2250" b="1">
+                <a:solidFill>
+                  <a:srgbClr val="1E7F5B"/>
+                </a:solidFill>
+                <a:latin typeface="Pretendard"/>
+                <a:ea typeface="Pretendard"/>
+                <a:cs typeface="Pretendard"/>
+              </a:rPr>
+              <a:t>핵심 — 공고를 붙이고, 역량 · 키워드 · 흥미 유형 연결을 받는다</a:t>
+            </a:r>
+          </a:p>
+        </p:txBody>
+      </p:sp>
+      <p:sp>
+        <p:nvSpPr>
+          <p:cNvPr id="12" name="Rounded Rectangle 11"/>
+          <p:cNvSpPr/>
+          <p:nvPr/>
+        </p:nvSpPr>
+        <p:spPr>
+          <a:xfrm>
+            <a:off x="1143000" y="3714750"/>
+            <a:ext cx="16002000" cy="2495550"/>
           </a:xfrm>
           <a:prstGeom prst="roundRect">
             <a:avLst>
-              <a:gd name="adj" fmla="val 7200"/>
+              <a:gd name="adj" fmla="val 1908"/>
             </a:avLst>
           </a:prstGeom>
           <a:solidFill>
@@ -7102,14 +7526,14 @@
       </p:sp>
       <p:sp>
         <p:nvSpPr>
-          <p:cNvPr id="12" name="Rectangle 11"/>
-          <p:cNvSpPr/>
-          <p:nvPr/>
-        </p:nvSpPr>
-        <p:spPr>
-          <a:xfrm>
-            <a:off x="1143000" y="2476500"/>
-            <a:ext cx="57150" cy="793750"/>
+          <p:cNvPr id="13" name="Rectangle 12"/>
+          <p:cNvSpPr/>
+          <p:nvPr/>
+        </p:nvSpPr>
+        <p:spPr>
+          <a:xfrm>
+            <a:off x="1143000" y="3714750"/>
+            <a:ext cx="57150" cy="2495550"/>
           </a:xfrm>
           <a:prstGeom prst="rect">
             <a:avLst/>
@@ -7132,14 +7556,14 @@
       </p:sp>
       <p:sp>
         <p:nvSpPr>
-          <p:cNvPr id="13" name="TextBox 12"/>
-          <p:cNvSpPr txBox="1"/>
-          <p:nvPr/>
-        </p:nvSpPr>
-        <p:spPr>
-          <a:xfrm>
-            <a:off x="1409700" y="2590800"/>
-            <a:ext cx="3467100" cy="565150"/>
+          <p:cNvPr id="14" name="deckgen:ornament"/>
+          <p:cNvSpPr txBox="1"/>
+          <p:nvPr/>
+        </p:nvSpPr>
+        <p:spPr>
+          <a:xfrm>
+            <a:off x="1466850" y="3848100"/>
+            <a:ext cx="857250" cy="1143000"/>
           </a:xfrm>
           <a:prstGeom prst="rect">
             <a:avLst/>
@@ -7152,13 +7576,54 @@
           </a:bodyPr>
           <a:lstStyle/>
           <a:p>
-            <a:pPr>
-              <a:lnSpc>
-                <a:spcPct val="115000"/>
-              </a:lnSpc>
-            </a:pPr>
-            <a:r>
-              <a:rPr sz="1725" b="1">
+            <a:pPr algn="l">
+              <a:lnSpc>
+                <a:spcPct val="100000"/>
+              </a:lnSpc>
+            </a:pPr>
+            <a:r>
+              <a:rPr sz="8250" b="1">
+                <a:solidFill>
+                  <a:srgbClr val="DDE4EF"/>
+                </a:solidFill>
+                <a:latin typeface="Pretendard"/>
+                <a:ea typeface="Pretendard"/>
+                <a:cs typeface="Pretendard"/>
+              </a:rPr>
+              <a:t>“</a:t>
+            </a:r>
+          </a:p>
+        </p:txBody>
+      </p:sp>
+      <p:sp>
+        <p:nvSpPr>
+          <p:cNvPr id="15" name="TextBox 14"/>
+          <p:cNvSpPr txBox="1"/>
+          <p:nvPr/>
+        </p:nvSpPr>
+        <p:spPr>
+          <a:xfrm>
+            <a:off x="1676400" y="4038600"/>
+            <a:ext cx="14954250" cy="2000250"/>
+          </a:xfrm>
+          <a:prstGeom prst="rect">
+            <a:avLst/>
+          </a:prstGeom>
+          <a:noFill/>
+        </p:spPr>
+        <p:txBody>
+          <a:bodyPr wrap="square" lIns="0" rIns="0" tIns="0" bIns="0" anchor="t">
+            <a:spAutoFit/>
+          </a:bodyPr>
+          <a:lstStyle/>
+          <a:p>
+            <a:pPr algn="l">
+              <a:lnSpc>
+                <a:spcPct val="150000"/>
+              </a:lnSpc>
+            </a:pPr>
+            <a:r>
+              <a:rPr sz="2700" b="1">
                 <a:solidFill>
                   <a:srgbClr val="1E3E69"/>
                 </a:solidFill>
@@ -7166,95 +7631,8 @@
                 <a:ea typeface="Pretendard"/>
                 <a:cs typeface="Pretendard"/>
               </a:rPr>
-              <a:t>지원 직종 · 공고</a:t>
-            </a:r>
-          </a:p>
-          <a:p>
-            <a:pPr>
-              <a:lnSpc>
-                <a:spcPct val="120000"/>
-              </a:lnSpc>
-              <a:spcBef>
-                <a:spcPts val="300"/>
-              </a:spcBef>
-            </a:pPr>
-            <a:r>
-              <a:rPr sz="1650" b="0">
-                <a:solidFill>
-                  <a:srgbClr val="5E6370"/>
-                </a:solidFill>
-                <a:latin typeface="Pretendard"/>
-                <a:ea typeface="Pretendard"/>
-                <a:cs typeface="Pretendard"/>
-              </a:rPr>
-              <a:t>회사 이름은 빼도 됩니다</a:t>
-            </a:r>
-          </a:p>
-        </p:txBody>
-      </p:sp>
-      <p:sp>
-        <p:nvSpPr>
-          <p:cNvPr id="14" name="Rectangle 13"/>
-          <p:cNvSpPr/>
-          <p:nvPr/>
-        </p:nvSpPr>
-        <p:spPr>
-          <a:xfrm>
-            <a:off x="5143500" y="2476500"/>
-            <a:ext cx="12001500" cy="793750"/>
-          </a:xfrm>
-          <a:prstGeom prst="rect">
-            <a:avLst/>
-          </a:prstGeom>
-          <a:solidFill>
-            <a:srgbClr val="FFFFFF"/>
-          </a:solidFill>
-          <a:ln w="9525">
-            <a:solidFill>
-              <a:srgbClr val="D8E1EE"/>
-            </a:solidFill>
-          </a:ln>
-          <a:effectLst/>
-        </p:spPr>
-        <p:txBody>
-          <a:bodyPr rtlCol="0" anchor="ctr" wrap="square"/>
-          <a:lstStyle/>
-          <a:p>
-            <a:pPr algn="ctr"/>
-          </a:p>
-        </p:txBody>
-      </p:sp>
-      <p:sp>
-        <p:nvSpPr>
-          <p:cNvPr id="15" name="Rounded Rectangle 14"/>
-          <p:cNvSpPr/>
-          <p:nvPr/>
-        </p:nvSpPr>
-        <p:spPr>
-          <a:xfrm>
-            <a:off x="1143000" y="3403600"/>
-            <a:ext cx="4000500" cy="1244600"/>
-          </a:xfrm>
-          <a:prstGeom prst="roundRect">
-            <a:avLst>
-              <a:gd name="adj" fmla="val 4591"/>
-            </a:avLst>
-          </a:prstGeom>
-          <a:solidFill>
-            <a:srgbClr val="F4F7FA"/>
-          </a:solidFill>
-          <a:ln w="9525">
-            <a:solidFill>
-              <a:srgbClr val="D8E1EE"/>
-            </a:solidFill>
-          </a:ln>
-          <a:effectLst/>
-        </p:spPr>
-        <p:txBody>
-          <a:bodyPr rtlCol="0" anchor="ctr" wrap="square"/>
-          <a:lstStyle/>
-          <a:p>
-            <a:pPr algn="ctr"/>
+              <a:t>[역할] 채용 경력 많은 직무분석 전문가 [자료] 공고의 주요 업무 · 자격 요건 · 우대 사항 · 내 흥미 유형 [과업] ① 핵심 역량 3가지 ② 서류에 살릴 키워드 5개 ③ 흥미 유형과의 연결 두 줄 [형식] 표 — 역량 · 공고 근거 문장 · 내가 준비할 것 [조건] 공고에 없으면 「공고에 없음」</a:t>
+            </a:r>
           </a:p>
         </p:txBody>
       </p:sp>
@@ -7266,14 +7644,14 @@
         </p:nvSpPr>
         <p:spPr>
           <a:xfrm>
-            <a:off x="1143000" y="3403600"/>
-            <a:ext cx="57150" cy="1244600"/>
-          </a:xfrm>
-          <a:prstGeom prst="rect">
-            <a:avLst/>
-          </a:prstGeom>
-          <a:solidFill>
-            <a:srgbClr val="1E3E69"/>
+            <a:off x="1143000" y="6667500"/>
+            <a:ext cx="47625" cy="914400"/>
+          </a:xfrm>
+          <a:prstGeom prst="rect">
+            <a:avLst/>
+          </a:prstGeom>
+          <a:solidFill>
+            <a:srgbClr val="1E7F5B"/>
           </a:solidFill>
           <a:ln>
             <a:noFill/>
@@ -7296,8 +7674,8 @@
         </p:nvSpPr>
         <p:spPr>
           <a:xfrm>
-            <a:off x="1409700" y="3517900"/>
-            <a:ext cx="3467100" cy="1016000"/>
+            <a:off x="1409700" y="6686550"/>
+            <a:ext cx="15735300" cy="323850"/>
           </a:xfrm>
           <a:prstGeom prst="rect">
             <a:avLst/>
@@ -7310,13 +7688,54 @@
           </a:bodyPr>
           <a:lstStyle/>
           <a:p>
-            <a:pPr>
-              <a:lnSpc>
-                <a:spcPct val="115000"/>
-              </a:lnSpc>
-            </a:pPr>
-            <a:r>
-              <a:rPr sz="1725" b="1">
+            <a:pPr algn="l">
+              <a:lnSpc>
+                <a:spcPct val="100000"/>
+              </a:lnSpc>
+            </a:pPr>
+            <a:r>
+              <a:rPr sz="1875" b="1" spc="150">
+                <a:solidFill>
+                  <a:srgbClr val="1E7F5B"/>
+                </a:solidFill>
+                <a:latin typeface="Pretendard"/>
+                <a:ea typeface="Pretendard"/>
+                <a:cs typeface="Pretendard"/>
+              </a:rPr>
+              <a:t>확인할 것</a:t>
+            </a:r>
+          </a:p>
+        </p:txBody>
+      </p:sp>
+      <p:sp>
+        <p:nvSpPr>
+          <p:cNvPr id="18" name="TextBox 17"/>
+          <p:cNvSpPr txBox="1"/>
+          <p:nvPr/>
+        </p:nvSpPr>
+        <p:spPr>
+          <a:xfrm>
+            <a:off x="1409700" y="7067550"/>
+            <a:ext cx="15735300" cy="762000"/>
+          </a:xfrm>
+          <a:prstGeom prst="rect">
+            <a:avLst/>
+          </a:prstGeom>
+          <a:noFill/>
+        </p:spPr>
+        <p:txBody>
+          <a:bodyPr wrap="square" lIns="0" rIns="0" tIns="0" bIns="0" anchor="t">
+            <a:spAutoFit/>
+          </a:bodyPr>
+          <a:lstStyle/>
+          <a:p>
+            <a:pPr algn="l">
+              <a:lnSpc>
+                <a:spcPct val="140000"/>
+              </a:lnSpc>
+            </a:pPr>
+            <a:r>
+              <a:rPr sz="2475" b="1">
                 <a:solidFill>
                   <a:srgbClr val="1E3E69"/>
                 </a:solidFill>
@@ -7324,61 +7743,8 @@
                 <a:ea typeface="Pretendard"/>
                 <a:cs typeface="Pretendard"/>
               </a:rPr>
-              <a:t>핵심 역량 3가지</a:t>
-            </a:r>
-          </a:p>
-          <a:p>
-            <a:pPr>
-              <a:lnSpc>
-                <a:spcPct val="120000"/>
-              </a:lnSpc>
-              <a:spcBef>
-                <a:spcPts val="300"/>
-              </a:spcBef>
-            </a:pPr>
-            <a:r>
-              <a:rPr sz="1650" b="0">
-                <a:solidFill>
-                  <a:srgbClr val="5E6370"/>
-                </a:solidFill>
-                <a:latin typeface="Pretendard"/>
-                <a:ea typeface="Pretendard"/>
-                <a:cs typeface="Pretendard"/>
-              </a:rPr>
-              <a:t>공고 근거 문장과 함께</a:t>
-            </a:r>
-          </a:p>
-        </p:txBody>
-      </p:sp>
-      <p:sp>
-        <p:nvSpPr>
-          <p:cNvPr id="18" name="Rectangle 17"/>
-          <p:cNvSpPr/>
-          <p:nvPr/>
-        </p:nvSpPr>
-        <p:spPr>
-          <a:xfrm>
-            <a:off x="5143500" y="3403600"/>
-            <a:ext cx="12001500" cy="1244600"/>
-          </a:xfrm>
-          <a:prstGeom prst="rect">
-            <a:avLst/>
-          </a:prstGeom>
-          <a:solidFill>
-            <a:srgbClr val="FFFFFF"/>
-          </a:solidFill>
-          <a:ln w="9525">
-            <a:solidFill>
-              <a:srgbClr val="D8E1EE"/>
-            </a:solidFill>
-          </a:ln>
-          <a:effectLst/>
-        </p:spPr>
-        <p:txBody>
-          <a:bodyPr rtlCol="0" anchor="ctr" wrap="square"/>
-          <a:lstStyle/>
-          <a:p>
-            <a:pPr algn="ctr"/>
+              <a:t>근거 문장이 실제 공고에 있는지 대조합니다</a:t>
+            </a:r>
           </a:p>
         </p:txBody>
       </p:sp>
@@ -7390,8 +7756,8 @@
         </p:nvSpPr>
         <p:spPr>
           <a:xfrm>
-            <a:off x="5295900" y="4025900"/>
-            <a:ext cx="11696700" cy="9525"/>
+            <a:off x="1143000" y="8058150"/>
+            <a:ext cx="16002000" cy="9525"/>
           </a:xfrm>
           <a:prstGeom prst="rect">
             <a:avLst/>
@@ -7414,582 +7780,7 @@
       </p:sp>
       <p:sp>
         <p:nvSpPr>
-          <p:cNvPr id="20" name="Rounded Rectangle 19"/>
-          <p:cNvSpPr/>
-          <p:nvPr/>
-        </p:nvSpPr>
-        <p:spPr>
-          <a:xfrm>
-            <a:off x="1143000" y="4781550"/>
-            <a:ext cx="4000500" cy="793750"/>
-          </a:xfrm>
-          <a:prstGeom prst="roundRect">
-            <a:avLst>
-              <a:gd name="adj" fmla="val 7200"/>
-            </a:avLst>
-          </a:prstGeom>
-          <a:solidFill>
-            <a:srgbClr val="F4F7FA"/>
-          </a:solidFill>
-          <a:ln w="9525">
-            <a:solidFill>
-              <a:srgbClr val="D8E1EE"/>
-            </a:solidFill>
-          </a:ln>
-          <a:effectLst/>
-        </p:spPr>
-        <p:txBody>
-          <a:bodyPr rtlCol="0" anchor="ctr" wrap="square"/>
-          <a:lstStyle/>
-          <a:p>
-            <a:pPr algn="ctr"/>
-          </a:p>
-        </p:txBody>
-      </p:sp>
-      <p:sp>
-        <p:nvSpPr>
-          <p:cNvPr id="21" name="Rectangle 20"/>
-          <p:cNvSpPr/>
-          <p:nvPr/>
-        </p:nvSpPr>
-        <p:spPr>
-          <a:xfrm>
-            <a:off x="1143000" y="4781550"/>
-            <a:ext cx="57150" cy="793750"/>
-          </a:xfrm>
-          <a:prstGeom prst="rect">
-            <a:avLst/>
-          </a:prstGeom>
-          <a:solidFill>
-            <a:srgbClr val="1E3E69"/>
-          </a:solidFill>
-          <a:ln>
-            <a:noFill/>
-          </a:ln>
-          <a:effectLst/>
-        </p:spPr>
-        <p:txBody>
-          <a:bodyPr rtlCol="0" anchor="ctr" wrap="square"/>
-          <a:lstStyle/>
-          <a:p>
-            <a:pPr algn="ctr"/>
-          </a:p>
-        </p:txBody>
-      </p:sp>
-      <p:sp>
-        <p:nvSpPr>
-          <p:cNvPr id="22" name="TextBox 21"/>
-          <p:cNvSpPr txBox="1"/>
-          <p:nvPr/>
-        </p:nvSpPr>
-        <p:spPr>
-          <a:xfrm>
-            <a:off x="1409700" y="4895850"/>
-            <a:ext cx="3467100" cy="565150"/>
-          </a:xfrm>
-          <a:prstGeom prst="rect">
-            <a:avLst/>
-          </a:prstGeom>
-          <a:noFill/>
-        </p:spPr>
-        <p:txBody>
-          <a:bodyPr wrap="square" lIns="0" rIns="0" tIns="0" bIns="0" anchor="t">
-            <a:spAutoFit/>
-          </a:bodyPr>
-          <a:lstStyle/>
-          <a:p>
-            <a:pPr>
-              <a:lnSpc>
-                <a:spcPct val="115000"/>
-              </a:lnSpc>
-            </a:pPr>
-            <a:r>
-              <a:rPr sz="1725" b="1">
-                <a:solidFill>
-                  <a:srgbClr val="1E3E69"/>
-                </a:solidFill>
-                <a:latin typeface="Pretendard"/>
-                <a:ea typeface="Pretendard"/>
-                <a:cs typeface="Pretendard"/>
-              </a:rPr>
-              <a:t>핵심 키워드 5개</a:t>
-            </a:r>
-          </a:p>
-          <a:p>
-            <a:pPr>
-              <a:lnSpc>
-                <a:spcPct val="120000"/>
-              </a:lnSpc>
-              <a:spcBef>
-                <a:spcPts val="300"/>
-              </a:spcBef>
-            </a:pPr>
-            <a:r>
-              <a:rPr sz="1650" b="0">
-                <a:solidFill>
-                  <a:srgbClr val="5E6370"/>
-                </a:solidFill>
-                <a:latin typeface="Pretendard"/>
-                <a:ea typeface="Pretendard"/>
-                <a:cs typeface="Pretendard"/>
-              </a:rPr>
-              <a:t>서류에 그대로 살릴 낱말</a:t>
-            </a:r>
-          </a:p>
-        </p:txBody>
-      </p:sp>
-      <p:sp>
-        <p:nvSpPr>
-          <p:cNvPr id="23" name="Rectangle 22"/>
-          <p:cNvSpPr/>
-          <p:nvPr/>
-        </p:nvSpPr>
-        <p:spPr>
-          <a:xfrm>
-            <a:off x="5143500" y="4781550"/>
-            <a:ext cx="12001500" cy="793750"/>
-          </a:xfrm>
-          <a:prstGeom prst="rect">
-            <a:avLst/>
-          </a:prstGeom>
-          <a:solidFill>
-            <a:srgbClr val="FFFFFF"/>
-          </a:solidFill>
-          <a:ln w="9525">
-            <a:solidFill>
-              <a:srgbClr val="D8E1EE"/>
-            </a:solidFill>
-          </a:ln>
-          <a:effectLst/>
-        </p:spPr>
-        <p:txBody>
-          <a:bodyPr rtlCol="0" anchor="ctr" wrap="square"/>
-          <a:lstStyle/>
-          <a:p>
-            <a:pPr algn="ctr"/>
-          </a:p>
-        </p:txBody>
-      </p:sp>
-      <p:sp>
-        <p:nvSpPr>
-          <p:cNvPr id="24" name="Rounded Rectangle 23"/>
-          <p:cNvSpPr/>
-          <p:nvPr/>
-        </p:nvSpPr>
-        <p:spPr>
-          <a:xfrm>
-            <a:off x="1143000" y="5708650"/>
-            <a:ext cx="4000500" cy="793750"/>
-          </a:xfrm>
-          <a:prstGeom prst="roundRect">
-            <a:avLst>
-              <a:gd name="adj" fmla="val 7200"/>
-            </a:avLst>
-          </a:prstGeom>
-          <a:solidFill>
-            <a:srgbClr val="F4F7FA"/>
-          </a:solidFill>
-          <a:ln w="9525">
-            <a:solidFill>
-              <a:srgbClr val="D8E1EE"/>
-            </a:solidFill>
-          </a:ln>
-          <a:effectLst/>
-        </p:spPr>
-        <p:txBody>
-          <a:bodyPr rtlCol="0" anchor="ctr" wrap="square"/>
-          <a:lstStyle/>
-          <a:p>
-            <a:pPr algn="ctr"/>
-          </a:p>
-        </p:txBody>
-      </p:sp>
-      <p:sp>
-        <p:nvSpPr>
-          <p:cNvPr id="25" name="Rectangle 24"/>
-          <p:cNvSpPr/>
-          <p:nvPr/>
-        </p:nvSpPr>
-        <p:spPr>
-          <a:xfrm>
-            <a:off x="1143000" y="5708650"/>
-            <a:ext cx="57150" cy="793750"/>
-          </a:xfrm>
-          <a:prstGeom prst="rect">
-            <a:avLst/>
-          </a:prstGeom>
-          <a:solidFill>
-            <a:srgbClr val="1E3E69"/>
-          </a:solidFill>
-          <a:ln>
-            <a:noFill/>
-          </a:ln>
-          <a:effectLst/>
-        </p:spPr>
-        <p:txBody>
-          <a:bodyPr rtlCol="0" anchor="ctr" wrap="square"/>
-          <a:lstStyle/>
-          <a:p>
-            <a:pPr algn="ctr"/>
-          </a:p>
-        </p:txBody>
-      </p:sp>
-      <p:sp>
-        <p:nvSpPr>
-          <p:cNvPr id="26" name="TextBox 25"/>
-          <p:cNvSpPr txBox="1"/>
-          <p:nvPr/>
-        </p:nvSpPr>
-        <p:spPr>
-          <a:xfrm>
-            <a:off x="1409700" y="5822950"/>
-            <a:ext cx="3467100" cy="565150"/>
-          </a:xfrm>
-          <a:prstGeom prst="rect">
-            <a:avLst/>
-          </a:prstGeom>
-          <a:noFill/>
-        </p:spPr>
-        <p:txBody>
-          <a:bodyPr wrap="square" lIns="0" rIns="0" tIns="0" bIns="0" anchor="t">
-            <a:spAutoFit/>
-          </a:bodyPr>
-          <a:lstStyle/>
-          <a:p>
-            <a:pPr>
-              <a:lnSpc>
-                <a:spcPct val="115000"/>
-              </a:lnSpc>
-            </a:pPr>
-            <a:r>
-              <a:rPr sz="1725" b="1">
-                <a:solidFill>
-                  <a:srgbClr val="1E3E69"/>
-                </a:solidFill>
-                <a:latin typeface="Pretendard"/>
-                <a:ea typeface="Pretendard"/>
-                <a:cs typeface="Pretendard"/>
-              </a:rPr>
-              <a:t>내 흥미 유형과의 연결</a:t>
-            </a:r>
-          </a:p>
-          <a:p>
-            <a:pPr>
-              <a:lnSpc>
-                <a:spcPct val="120000"/>
-              </a:lnSpc>
-              <a:spcBef>
-                <a:spcPts val="300"/>
-              </a:spcBef>
-            </a:pPr>
-            <a:r>
-              <a:rPr sz="1650" b="0">
-                <a:solidFill>
-                  <a:srgbClr val="5E6370"/>
-                </a:solidFill>
-                <a:latin typeface="Pretendard"/>
-                <a:ea typeface="Pretendard"/>
-                <a:cs typeface="Pretendard"/>
-              </a:rPr>
-              <a:t>두 줄</a:t>
-            </a:r>
-          </a:p>
-        </p:txBody>
-      </p:sp>
-      <p:sp>
-        <p:nvSpPr>
-          <p:cNvPr id="27" name="Rectangle 26"/>
-          <p:cNvSpPr/>
-          <p:nvPr/>
-        </p:nvSpPr>
-        <p:spPr>
-          <a:xfrm>
-            <a:off x="5143500" y="5708650"/>
-            <a:ext cx="12001500" cy="793750"/>
-          </a:xfrm>
-          <a:prstGeom prst="rect">
-            <a:avLst/>
-          </a:prstGeom>
-          <a:solidFill>
-            <a:srgbClr val="FFFFFF"/>
-          </a:solidFill>
-          <a:ln w="9525">
-            <a:solidFill>
-              <a:srgbClr val="D8E1EE"/>
-            </a:solidFill>
-          </a:ln>
-          <a:effectLst/>
-        </p:spPr>
-        <p:txBody>
-          <a:bodyPr rtlCol="0" anchor="ctr" wrap="square"/>
-          <a:lstStyle/>
-          <a:p>
-            <a:pPr algn="ctr"/>
-          </a:p>
-        </p:txBody>
-      </p:sp>
-      <p:sp>
-        <p:nvSpPr>
-          <p:cNvPr id="28" name="Rounded Rectangle 27"/>
-          <p:cNvSpPr/>
-          <p:nvPr/>
-        </p:nvSpPr>
-        <p:spPr>
-          <a:xfrm>
-            <a:off x="1143000" y="6635750"/>
-            <a:ext cx="4000500" cy="793750"/>
-          </a:xfrm>
-          <a:prstGeom prst="roundRect">
-            <a:avLst>
-              <a:gd name="adj" fmla="val 7200"/>
-            </a:avLst>
-          </a:prstGeom>
-          <a:solidFill>
-            <a:srgbClr val="F4F7FA"/>
-          </a:solidFill>
-          <a:ln w="9525">
-            <a:solidFill>
-              <a:srgbClr val="D8E1EE"/>
-            </a:solidFill>
-          </a:ln>
-          <a:effectLst/>
-        </p:spPr>
-        <p:txBody>
-          <a:bodyPr rtlCol="0" anchor="ctr" wrap="square"/>
-          <a:lstStyle/>
-          <a:p>
-            <a:pPr algn="ctr"/>
-          </a:p>
-        </p:txBody>
-      </p:sp>
-      <p:sp>
-        <p:nvSpPr>
-          <p:cNvPr id="29" name="Rectangle 28"/>
-          <p:cNvSpPr/>
-          <p:nvPr/>
-        </p:nvSpPr>
-        <p:spPr>
-          <a:xfrm>
-            <a:off x="1143000" y="6635750"/>
-            <a:ext cx="57150" cy="793750"/>
-          </a:xfrm>
-          <a:prstGeom prst="rect">
-            <a:avLst/>
-          </a:prstGeom>
-          <a:solidFill>
-            <a:srgbClr val="1E3E69"/>
-          </a:solidFill>
-          <a:ln>
-            <a:noFill/>
-          </a:ln>
-          <a:effectLst/>
-        </p:spPr>
-        <p:txBody>
-          <a:bodyPr rtlCol="0" anchor="ctr" wrap="square"/>
-          <a:lstStyle/>
-          <a:p>
-            <a:pPr algn="ctr"/>
-          </a:p>
-        </p:txBody>
-      </p:sp>
-      <p:sp>
-        <p:nvSpPr>
-          <p:cNvPr id="30" name="TextBox 29"/>
-          <p:cNvSpPr txBox="1"/>
-          <p:nvPr/>
-        </p:nvSpPr>
-        <p:spPr>
-          <a:xfrm>
-            <a:off x="1409700" y="6750050"/>
-            <a:ext cx="3467100" cy="565150"/>
-          </a:xfrm>
-          <a:prstGeom prst="rect">
-            <a:avLst/>
-          </a:prstGeom>
-          <a:noFill/>
-        </p:spPr>
-        <p:txBody>
-          <a:bodyPr wrap="square" lIns="0" rIns="0" tIns="0" bIns="0" anchor="t">
-            <a:spAutoFit/>
-          </a:bodyPr>
-          <a:lstStyle/>
-          <a:p>
-            <a:pPr>
-              <a:lnSpc>
-                <a:spcPct val="115000"/>
-              </a:lnSpc>
-            </a:pPr>
-            <a:r>
-              <a:rPr sz="1725" b="1">
-                <a:solidFill>
-                  <a:srgbClr val="1E3E69"/>
-                </a:solidFill>
-                <a:latin typeface="Pretendard"/>
-                <a:ea typeface="Pretendard"/>
-                <a:cs typeface="Pretendard"/>
-              </a:rPr>
-              <a:t>보완할 것 한 가지</a:t>
-            </a:r>
-          </a:p>
-          <a:p>
-            <a:pPr>
-              <a:lnSpc>
-                <a:spcPct val="120000"/>
-              </a:lnSpc>
-              <a:spcBef>
-                <a:spcPts val="300"/>
-              </a:spcBef>
-            </a:pPr>
-            <a:r>
-              <a:rPr sz="1650" b="0">
-                <a:solidFill>
-                  <a:srgbClr val="5E6370"/>
-                </a:solidFill>
-                <a:latin typeface="Pretendard"/>
-                <a:ea typeface="Pretendard"/>
-                <a:cs typeface="Pretendard"/>
-              </a:rPr>
-              <a:t>자격 · 경험 · 공부</a:t>
-            </a:r>
-          </a:p>
-        </p:txBody>
-      </p:sp>
-      <p:sp>
-        <p:nvSpPr>
-          <p:cNvPr id="31" name="Rectangle 30"/>
-          <p:cNvSpPr/>
-          <p:nvPr/>
-        </p:nvSpPr>
-        <p:spPr>
-          <a:xfrm>
-            <a:off x="5143500" y="6635750"/>
-            <a:ext cx="12001500" cy="793750"/>
-          </a:xfrm>
-          <a:prstGeom prst="rect">
-            <a:avLst/>
-          </a:prstGeom>
-          <a:solidFill>
-            <a:srgbClr val="FFFFFF"/>
-          </a:solidFill>
-          <a:ln w="9525">
-            <a:solidFill>
-              <a:srgbClr val="D8E1EE"/>
-            </a:solidFill>
-          </a:ln>
-          <a:effectLst/>
-        </p:spPr>
-        <p:txBody>
-          <a:bodyPr rtlCol="0" anchor="ctr" wrap="square"/>
-          <a:lstStyle/>
-          <a:p>
-            <a:pPr algn="ctr"/>
-          </a:p>
-        </p:txBody>
-      </p:sp>
-      <p:sp>
-        <p:nvSpPr>
-          <p:cNvPr id="32" name="Rectangle 31"/>
-          <p:cNvSpPr/>
-          <p:nvPr/>
-        </p:nvSpPr>
-        <p:spPr>
-          <a:xfrm>
-            <a:off x="1143000" y="7600950"/>
-            <a:ext cx="38100" cy="323850"/>
-          </a:xfrm>
-          <a:prstGeom prst="rect">
-            <a:avLst/>
-          </a:prstGeom>
-          <a:solidFill>
-            <a:srgbClr val="C3E6D8"/>
-          </a:solidFill>
-          <a:ln>
-            <a:noFill/>
-          </a:ln>
-          <a:effectLst/>
-        </p:spPr>
-        <p:txBody>
-          <a:bodyPr rtlCol="0" anchor="ctr" wrap="square"/>
-          <a:lstStyle/>
-          <a:p>
-            <a:pPr algn="ctr"/>
-          </a:p>
-        </p:txBody>
-      </p:sp>
-      <p:sp>
-        <p:nvSpPr>
-          <p:cNvPr id="33" name="TextBox 32"/>
-          <p:cNvSpPr txBox="1"/>
-          <p:nvPr/>
-        </p:nvSpPr>
-        <p:spPr>
-          <a:xfrm>
-            <a:off x="1314450" y="7600950"/>
-            <a:ext cx="15830550" cy="342900"/>
-          </a:xfrm>
-          <a:prstGeom prst="rect">
-            <a:avLst/>
-          </a:prstGeom>
-          <a:noFill/>
-        </p:spPr>
-        <p:txBody>
-          <a:bodyPr wrap="square" lIns="0" rIns="0" tIns="0" bIns="0" anchor="t">
-            <a:spAutoFit/>
-          </a:bodyPr>
-          <a:lstStyle/>
-          <a:p>
-            <a:pPr algn="l">
-              <a:lnSpc>
-                <a:spcPct val="100000"/>
-              </a:lnSpc>
-            </a:pPr>
-            <a:r>
-              <a:rPr sz="1725" b="1">
-                <a:solidFill>
-                  <a:srgbClr val="5E6370"/>
-                </a:solidFill>
-                <a:latin typeface="Pretendard"/>
-                <a:ea typeface="Pretendard"/>
-                <a:cs typeface="Pretendard"/>
-              </a:rPr>
-              <a:t>메모장 · 한글 · 워드 파일에 붙여 두고, 한 줄은 패들릿 「2교시 강의 · 나누기」에 올립니다</a:t>
-            </a:r>
-          </a:p>
-        </p:txBody>
-      </p:sp>
-      <p:sp>
-        <p:nvSpPr>
-          <p:cNvPr id="34" name="Rectangle 33"/>
-          <p:cNvSpPr/>
-          <p:nvPr/>
-        </p:nvSpPr>
-        <p:spPr>
-          <a:xfrm>
-            <a:off x="1143000" y="8058150"/>
-            <a:ext cx="16002000" cy="9525"/>
-          </a:xfrm>
-          <a:prstGeom prst="rect">
-            <a:avLst/>
-          </a:prstGeom>
-          <a:solidFill>
-            <a:srgbClr val="D8E1EE"/>
-          </a:solidFill>
-          <a:ln>
-            <a:noFill/>
-          </a:ln>
-          <a:effectLst/>
-        </p:spPr>
-        <p:txBody>
-          <a:bodyPr rtlCol="0" anchor="ctr" wrap="square"/>
-          <a:lstStyle/>
-          <a:p>
-            <a:pPr algn="ctr"/>
-          </a:p>
-        </p:txBody>
-      </p:sp>
-      <p:sp>
-        <p:nvSpPr>
-          <p:cNvPr id="35" name="TextBox 34"/>
+          <p:cNvPr id="20" name="TextBox 19"/>
           <p:cNvSpPr txBox="1"/>
           <p:nvPr/>
         </p:nvSpPr>
@@ -8030,7 +7821,7 @@
       </p:sp>
       <p:sp>
         <p:nvSpPr>
-          <p:cNvPr id="36" name="TextBox 35"/>
+          <p:cNvPr id="21" name="TextBox 20"/>
           <p:cNvSpPr txBox="1"/>
           <p:nvPr/>
         </p:nvSpPr>
@@ -8213,7 +8004,7 @@
                 <a:ea typeface="Pretendard"/>
                 <a:cs typeface="Pretendard"/>
               </a:rPr>
-              <a:t>결과 확인</a:t>
+              <a:t>시연 결과 예시 · 최정우(가명, 52)</a:t>
             </a:r>
           </a:p>
         </p:txBody>
@@ -8254,7 +8045,7 @@
                 <a:ea typeface="Pretendard"/>
                 <a:cs typeface="Pretendard"/>
               </a:rPr>
-              <a:t>이렇게 나왔으면 잘된 것입니다</a:t>
+              <a:t>섬유회사 영업관리 22년 → 물류관리 사무원</a:t>
             </a:r>
           </a:p>
         </p:txBody>
@@ -8291,18 +8082,306 @@
       </p:sp>
       <p:sp>
         <p:nvSpPr>
-          <p:cNvPr id="8" name="Rounded Rectangle 7"/>
-          <p:cNvSpPr/>
-          <p:nvPr/>
-        </p:nvSpPr>
-        <p:spPr>
-          <a:xfrm>
-            <a:off x="1143000" y="2571750"/>
-            <a:ext cx="16002000" cy="937260"/>
+          <p:cNvPr id="8" name="Rectangle 7"/>
+          <p:cNvSpPr/>
+          <p:nvPr/>
+        </p:nvSpPr>
+        <p:spPr>
+          <a:xfrm>
+            <a:off x="1143000" y="2781300"/>
+            <a:ext cx="3482340" cy="590550"/>
+          </a:xfrm>
+          <a:prstGeom prst="rect">
+            <a:avLst/>
+          </a:prstGeom>
+          <a:solidFill>
+            <a:srgbClr val="1E3E69"/>
+          </a:solidFill>
+          <a:ln>
+            <a:noFill/>
+          </a:ln>
+          <a:effectLst/>
+        </p:spPr>
+        <p:txBody>
+          <a:bodyPr rtlCol="0" anchor="ctr" wrap="square"/>
+          <a:lstStyle/>
+          <a:p>
+            <a:pPr algn="ctr"/>
+          </a:p>
+        </p:txBody>
+      </p:sp>
+      <p:sp>
+        <p:nvSpPr>
+          <p:cNvPr id="9" name="TextBox 8"/>
+          <p:cNvSpPr txBox="1"/>
+          <p:nvPr/>
+        </p:nvSpPr>
+        <p:spPr>
+          <a:xfrm>
+            <a:off x="1143000" y="2781300"/>
+            <a:ext cx="3482340" cy="590550"/>
+          </a:xfrm>
+          <a:prstGeom prst="rect">
+            <a:avLst/>
+          </a:prstGeom>
+          <a:noFill/>
+        </p:spPr>
+        <p:txBody>
+          <a:bodyPr wrap="square" lIns="0" rIns="0" tIns="0" bIns="0" anchor="ctr">
+            <a:spAutoFit/>
+          </a:bodyPr>
+          <a:lstStyle/>
+          <a:p>
+            <a:pPr algn="ctr">
+              <a:lnSpc>
+                <a:spcPct val="100000"/>
+              </a:lnSpc>
+            </a:pPr>
+            <a:r>
+              <a:rPr sz="2025" b="1">
+                <a:solidFill>
+                  <a:srgbClr val="FFFFFF"/>
+                </a:solidFill>
+                <a:latin typeface="Pretendard"/>
+                <a:ea typeface="Pretendard"/>
+                <a:cs typeface="Pretendard"/>
+              </a:rPr>
+              <a:t>핵심 역량</a:t>
+            </a:r>
+          </a:p>
+        </p:txBody>
+      </p:sp>
+      <p:sp>
+        <p:nvSpPr>
+          <p:cNvPr id="10" name="Rectangle 9"/>
+          <p:cNvSpPr/>
+          <p:nvPr/>
+        </p:nvSpPr>
+        <p:spPr>
+          <a:xfrm>
+            <a:off x="4663440" y="2781300"/>
+            <a:ext cx="6042660" cy="590550"/>
+          </a:xfrm>
+          <a:prstGeom prst="rect">
+            <a:avLst/>
+          </a:prstGeom>
+          <a:solidFill>
+            <a:srgbClr val="1E7F5B"/>
+          </a:solidFill>
+          <a:ln>
+            <a:noFill/>
+          </a:ln>
+          <a:effectLst/>
+        </p:spPr>
+        <p:txBody>
+          <a:bodyPr rtlCol="0" anchor="ctr" wrap="square"/>
+          <a:lstStyle/>
+          <a:p>
+            <a:pPr algn="ctr"/>
+          </a:p>
+        </p:txBody>
+      </p:sp>
+      <p:sp>
+        <p:nvSpPr>
+          <p:cNvPr id="11" name="TextBox 10"/>
+          <p:cNvSpPr txBox="1"/>
+          <p:nvPr/>
+        </p:nvSpPr>
+        <p:spPr>
+          <a:xfrm>
+            <a:off x="4663440" y="2781300"/>
+            <a:ext cx="6042660" cy="590550"/>
+          </a:xfrm>
+          <a:prstGeom prst="rect">
+            <a:avLst/>
+          </a:prstGeom>
+          <a:noFill/>
+        </p:spPr>
+        <p:txBody>
+          <a:bodyPr wrap="square" lIns="0" rIns="0" tIns="0" bIns="0" anchor="ctr">
+            <a:spAutoFit/>
+          </a:bodyPr>
+          <a:lstStyle/>
+          <a:p>
+            <a:pPr algn="ctr">
+              <a:lnSpc>
+                <a:spcPct val="100000"/>
+              </a:lnSpc>
+            </a:pPr>
+            <a:r>
+              <a:rPr sz="2025" b="1">
+                <a:solidFill>
+                  <a:srgbClr val="FFFFFF"/>
+                </a:solidFill>
+                <a:latin typeface="Pretendard"/>
+                <a:ea typeface="Pretendard"/>
+                <a:cs typeface="Pretendard"/>
+              </a:rPr>
+              <a:t>공고 근거</a:t>
+            </a:r>
+          </a:p>
+        </p:txBody>
+      </p:sp>
+      <p:sp>
+        <p:nvSpPr>
+          <p:cNvPr id="12" name="Rectangle 11"/>
+          <p:cNvSpPr/>
+          <p:nvPr/>
+        </p:nvSpPr>
+        <p:spPr>
+          <a:xfrm>
+            <a:off x="10744200" y="2781300"/>
+            <a:ext cx="6400800" cy="590550"/>
+          </a:xfrm>
+          <a:prstGeom prst="rect">
+            <a:avLst/>
+          </a:prstGeom>
+          <a:solidFill>
+            <a:srgbClr val="1E7F5B"/>
+          </a:solidFill>
+          <a:ln>
+            <a:noFill/>
+          </a:ln>
+          <a:effectLst/>
+        </p:spPr>
+        <p:txBody>
+          <a:bodyPr rtlCol="0" anchor="ctr" wrap="square"/>
+          <a:lstStyle/>
+          <a:p>
+            <a:pPr algn="ctr"/>
+          </a:p>
+        </p:txBody>
+      </p:sp>
+      <p:sp>
+        <p:nvSpPr>
+          <p:cNvPr id="13" name="TextBox 12"/>
+          <p:cNvSpPr txBox="1"/>
+          <p:nvPr/>
+        </p:nvSpPr>
+        <p:spPr>
+          <a:xfrm>
+            <a:off x="10744200" y="2781300"/>
+            <a:ext cx="6400800" cy="590550"/>
+          </a:xfrm>
+          <a:prstGeom prst="rect">
+            <a:avLst/>
+          </a:prstGeom>
+          <a:noFill/>
+        </p:spPr>
+        <p:txBody>
+          <a:bodyPr wrap="square" lIns="0" rIns="0" tIns="0" bIns="0" anchor="ctr">
+            <a:spAutoFit/>
+          </a:bodyPr>
+          <a:lstStyle/>
+          <a:p>
+            <a:pPr algn="ctr">
+              <a:lnSpc>
+                <a:spcPct val="100000"/>
+              </a:lnSpc>
+            </a:pPr>
+            <a:r>
+              <a:rPr sz="2025" b="1">
+                <a:solidFill>
+                  <a:srgbClr val="FFFFFF"/>
+                </a:solidFill>
+                <a:latin typeface="Pretendard"/>
+                <a:ea typeface="Pretendard"/>
+                <a:cs typeface="Pretendard"/>
+              </a:rPr>
+              <a:t>준비할 것</a:t>
+            </a:r>
+          </a:p>
+        </p:txBody>
+      </p:sp>
+      <p:sp>
+        <p:nvSpPr>
+          <p:cNvPr id="14" name="Rounded Rectangle 13"/>
+          <p:cNvSpPr/>
+          <p:nvPr/>
+        </p:nvSpPr>
+        <p:spPr>
+          <a:xfrm>
+            <a:off x="1143000" y="3448050"/>
+            <a:ext cx="3482340" cy="647700"/>
           </a:xfrm>
           <a:prstGeom prst="roundRect">
             <a:avLst>
-              <a:gd name="adj" fmla="val 6097"/>
+              <a:gd name="adj" fmla="val 5882"/>
+            </a:avLst>
+          </a:prstGeom>
+          <a:solidFill>
+            <a:srgbClr val="E6F4EE"/>
+          </a:solidFill>
+          <a:ln w="9525">
+            <a:solidFill>
+              <a:srgbClr val="C3E6D8"/>
+            </a:solidFill>
+          </a:ln>
+          <a:effectLst/>
+        </p:spPr>
+        <p:txBody>
+          <a:bodyPr rtlCol="0" anchor="ctr" wrap="square"/>
+          <a:lstStyle/>
+          <a:p>
+            <a:pPr algn="ctr"/>
+          </a:p>
+        </p:txBody>
+      </p:sp>
+      <p:sp>
+        <p:nvSpPr>
+          <p:cNvPr id="15" name="TextBox 14"/>
+          <p:cNvSpPr txBox="1"/>
+          <p:nvPr/>
+        </p:nvSpPr>
+        <p:spPr>
+          <a:xfrm>
+            <a:off x="1238250" y="3448050"/>
+            <a:ext cx="3291840" cy="647700"/>
+          </a:xfrm>
+          <a:prstGeom prst="rect">
+            <a:avLst/>
+          </a:prstGeom>
+          <a:noFill/>
+        </p:spPr>
+        <p:txBody>
+          <a:bodyPr wrap="square" lIns="0" rIns="0" tIns="0" bIns="0" anchor="ctr">
+            <a:spAutoFit/>
+          </a:bodyPr>
+          <a:lstStyle/>
+          <a:p>
+            <a:pPr algn="l">
+              <a:lnSpc>
+                <a:spcPct val="115000"/>
+              </a:lnSpc>
+            </a:pPr>
+            <a:r>
+              <a:rPr sz="1875" b="1">
+                <a:solidFill>
+                  <a:srgbClr val="1E3E69"/>
+                </a:solidFill>
+                <a:latin typeface="Pretendard"/>
+                <a:ea typeface="Pretendard"/>
+                <a:cs typeface="Pretendard"/>
+              </a:rPr>
+              <a:t>일정 조율력</a:t>
+            </a:r>
+          </a:p>
+        </p:txBody>
+      </p:sp>
+      <p:sp>
+        <p:nvSpPr>
+          <p:cNvPr id="16" name="Rounded Rectangle 15"/>
+          <p:cNvSpPr/>
+          <p:nvPr/>
+        </p:nvSpPr>
+        <p:spPr>
+          <a:xfrm>
+            <a:off x="4663440" y="3448050"/>
+            <a:ext cx="6042660" cy="647700"/>
+          </a:xfrm>
+          <a:prstGeom prst="roundRect">
+            <a:avLst>
+              <a:gd name="adj" fmla="val 5882"/>
             </a:avLst>
           </a:prstGeom>
           <a:solidFill>
@@ -8325,93 +8404,59 @@
       </p:sp>
       <p:sp>
         <p:nvSpPr>
-          <p:cNvPr id="9" name="Rounded Rectangle 8"/>
-          <p:cNvSpPr/>
-          <p:nvPr/>
-        </p:nvSpPr>
-        <p:spPr>
-          <a:xfrm>
-            <a:off x="1466850" y="2840355"/>
-            <a:ext cx="400050" cy="400050"/>
+          <p:cNvPr id="17" name="TextBox 16"/>
+          <p:cNvSpPr txBox="1"/>
+          <p:nvPr/>
+        </p:nvSpPr>
+        <p:spPr>
+          <a:xfrm>
+            <a:off x="4758690" y="3448050"/>
+            <a:ext cx="5852160" cy="647700"/>
+          </a:xfrm>
+          <a:prstGeom prst="rect">
+            <a:avLst/>
+          </a:prstGeom>
+          <a:noFill/>
+        </p:spPr>
+        <p:txBody>
+          <a:bodyPr wrap="square" lIns="0" rIns="0" tIns="0" bIns="0" anchor="ctr">
+            <a:spAutoFit/>
+          </a:bodyPr>
+          <a:lstStyle/>
+          <a:p>
+            <a:pPr algn="ctr">
+              <a:lnSpc>
+                <a:spcPct val="115000"/>
+              </a:lnSpc>
+            </a:pPr>
+            <a:r>
+              <a:rPr sz="1875" b="0">
+                <a:solidFill>
+                  <a:srgbClr val="22252B"/>
+                </a:solidFill>
+                <a:latin typeface="Pretendard"/>
+                <a:ea typeface="Pretendard"/>
+                <a:cs typeface="Pretendard"/>
+              </a:rPr>
+              <a:t>입고 · 출고 일정 관리 / 배차 조율</a:t>
+            </a:r>
+          </a:p>
+        </p:txBody>
+      </p:sp>
+      <p:sp>
+        <p:nvSpPr>
+          <p:cNvPr id="18" name="Rounded Rectangle 17"/>
+          <p:cNvSpPr/>
+          <p:nvPr/>
+        </p:nvSpPr>
+        <p:spPr>
+          <a:xfrm>
+            <a:off x="10744200" y="3448050"/>
+            <a:ext cx="6400800" cy="647700"/>
           </a:xfrm>
           <a:prstGeom prst="roundRect">
             <a:avLst>
-              <a:gd name="adj" fmla="val 14285"/>
-            </a:avLst>
-          </a:prstGeom>
-          <a:solidFill>
-            <a:srgbClr val="FFFFFF"/>
-          </a:solidFill>
-          <a:ln w="28575">
-            <a:solidFill>
-              <a:srgbClr val="1E3E69"/>
-            </a:solidFill>
-          </a:ln>
-          <a:effectLst/>
-        </p:spPr>
-        <p:txBody>
-          <a:bodyPr rtlCol="0" anchor="ctr" wrap="square"/>
-          <a:lstStyle/>
-          <a:p>
-            <a:pPr algn="ctr"/>
-          </a:p>
-        </p:txBody>
-      </p:sp>
-      <p:sp>
-        <p:nvSpPr>
-          <p:cNvPr id="10" name="TextBox 9"/>
-          <p:cNvSpPr txBox="1"/>
-          <p:nvPr/>
-        </p:nvSpPr>
-        <p:spPr>
-          <a:xfrm>
-            <a:off x="2133600" y="2667000"/>
-            <a:ext cx="14725650" cy="746760"/>
-          </a:xfrm>
-          <a:prstGeom prst="rect">
-            <a:avLst/>
-          </a:prstGeom>
-          <a:noFill/>
-        </p:spPr>
-        <p:txBody>
-          <a:bodyPr wrap="square" lIns="0" rIns="0" tIns="0" bIns="0" anchor="ctr">
-            <a:spAutoFit/>
-          </a:bodyPr>
-          <a:lstStyle/>
-          <a:p>
-            <a:pPr>
-              <a:lnSpc>
-                <a:spcPct val="120000"/>
-              </a:lnSpc>
-            </a:pPr>
-            <a:r>
-              <a:rPr sz="2400" b="1">
-                <a:solidFill>
-                  <a:srgbClr val="1E3E69"/>
-                </a:solidFill>
-                <a:latin typeface="Pretendard"/>
-                <a:ea typeface="Pretendard"/>
-                <a:cs typeface="Pretendard"/>
-              </a:rPr>
-              <a:t>역량마다 실제 공고의 근거 문장이 붙어 있다</a:t>
-            </a:r>
-          </a:p>
-        </p:txBody>
-      </p:sp>
-      <p:sp>
-        <p:nvSpPr>
-          <p:cNvPr id="11" name="Rounded Rectangle 10"/>
-          <p:cNvSpPr/>
-          <p:nvPr/>
-        </p:nvSpPr>
-        <p:spPr>
-          <a:xfrm>
-            <a:off x="1143000" y="3661410"/>
-            <a:ext cx="16002000" cy="937260"/>
-          </a:xfrm>
-          <a:prstGeom prst="roundRect">
-            <a:avLst>
-              <a:gd name="adj" fmla="val 6097"/>
+              <a:gd name="adj" fmla="val 5882"/>
             </a:avLst>
           </a:prstGeom>
           <a:solidFill>
@@ -8434,26 +8479,67 @@
       </p:sp>
       <p:sp>
         <p:nvSpPr>
-          <p:cNvPr id="12" name="Rounded Rectangle 11"/>
-          <p:cNvSpPr/>
-          <p:nvPr/>
-        </p:nvSpPr>
-        <p:spPr>
-          <a:xfrm>
-            <a:off x="1466850" y="3930015"/>
-            <a:ext cx="400050" cy="400050"/>
+          <p:cNvPr id="19" name="TextBox 18"/>
+          <p:cNvSpPr txBox="1"/>
+          <p:nvPr/>
+        </p:nvSpPr>
+        <p:spPr>
+          <a:xfrm>
+            <a:off x="10839450" y="3448050"/>
+            <a:ext cx="6210300" cy="647700"/>
+          </a:xfrm>
+          <a:prstGeom prst="rect">
+            <a:avLst/>
+          </a:prstGeom>
+          <a:noFill/>
+        </p:spPr>
+        <p:txBody>
+          <a:bodyPr wrap="square" lIns="0" rIns="0" tIns="0" bIns="0" anchor="ctr">
+            <a:spAutoFit/>
+          </a:bodyPr>
+          <a:lstStyle/>
+          <a:p>
+            <a:pPr algn="ctr">
+              <a:lnSpc>
+                <a:spcPct val="115000"/>
+              </a:lnSpc>
+            </a:pPr>
+            <a:r>
+              <a:rPr sz="1875" b="0">
+                <a:solidFill>
+                  <a:srgbClr val="22252B"/>
+                </a:solidFill>
+                <a:latin typeface="Pretendard"/>
+                <a:ea typeface="Pretendard"/>
+                <a:cs typeface="Pretendard"/>
+              </a:rPr>
+              <a:t>22년 납기 일정 조율 경험을 사례 하나로</a:t>
+            </a:r>
+          </a:p>
+        </p:txBody>
+      </p:sp>
+      <p:sp>
+        <p:nvSpPr>
+          <p:cNvPr id="20" name="Rounded Rectangle 19"/>
+          <p:cNvSpPr/>
+          <p:nvPr/>
+        </p:nvSpPr>
+        <p:spPr>
+          <a:xfrm>
+            <a:off x="1143000" y="4171950"/>
+            <a:ext cx="3482340" cy="647700"/>
           </a:xfrm>
           <a:prstGeom prst="roundRect">
             <a:avLst>
-              <a:gd name="adj" fmla="val 14285"/>
+              <a:gd name="adj" fmla="val 5882"/>
             </a:avLst>
           </a:prstGeom>
           <a:solidFill>
-            <a:srgbClr val="FFFFFF"/>
-          </a:solidFill>
-          <a:ln w="28575">
+            <a:srgbClr val="E6F4EE"/>
+          </a:solidFill>
+          <a:ln w="9525">
             <a:solidFill>
-              <a:srgbClr val="1E3E69"/>
+              <a:srgbClr val="C3E6D8"/>
             </a:solidFill>
           </a:ln>
           <a:effectLst/>
@@ -8468,14 +8554,14 @@
       </p:sp>
       <p:sp>
         <p:nvSpPr>
-          <p:cNvPr id="13" name="TextBox 12"/>
-          <p:cNvSpPr txBox="1"/>
-          <p:nvPr/>
-        </p:nvSpPr>
-        <p:spPr>
-          <a:xfrm>
-            <a:off x="2133600" y="3756660"/>
-            <a:ext cx="14725650" cy="746760"/>
+          <p:cNvPr id="21" name="TextBox 20"/>
+          <p:cNvSpPr txBox="1"/>
+          <p:nvPr/>
+        </p:nvSpPr>
+        <p:spPr>
+          <a:xfrm>
+            <a:off x="1238250" y="4171950"/>
+            <a:ext cx="3291840" cy="647700"/>
           </a:xfrm>
           <a:prstGeom prst="rect">
             <a:avLst/>
@@ -8488,13 +8574,13 @@
           </a:bodyPr>
           <a:lstStyle/>
           <a:p>
-            <a:pPr>
-              <a:lnSpc>
-                <a:spcPct val="120000"/>
-              </a:lnSpc>
-            </a:pPr>
-            <a:r>
-              <a:rPr sz="2400" b="1">
+            <a:pPr algn="l">
+              <a:lnSpc>
+                <a:spcPct val="115000"/>
+              </a:lnSpc>
+            </a:pPr>
+            <a:r>
+              <a:rPr sz="1875" b="1">
                 <a:solidFill>
                   <a:srgbClr val="1E3E69"/>
                 </a:solidFill>
@@ -8502,25 +8588,25 @@
                 <a:ea typeface="Pretendard"/>
                 <a:cs typeface="Pretendard"/>
               </a:rPr>
-              <a:t>공고에 없는 급여 · 복지 숫자가 끼어 있지 않다</a:t>
-            </a:r>
-          </a:p>
-        </p:txBody>
-      </p:sp>
-      <p:sp>
-        <p:nvSpPr>
-          <p:cNvPr id="14" name="Rounded Rectangle 13"/>
-          <p:cNvSpPr/>
-          <p:nvPr/>
-        </p:nvSpPr>
-        <p:spPr>
-          <a:xfrm>
-            <a:off x="1143000" y="4751070"/>
-            <a:ext cx="16002000" cy="937260"/>
+              <a:t>재고 · 전산 관리</a:t>
+            </a:r>
+          </a:p>
+        </p:txBody>
+      </p:sp>
+      <p:sp>
+        <p:nvSpPr>
+          <p:cNvPr id="22" name="Rounded Rectangle 21"/>
+          <p:cNvSpPr/>
+          <p:nvPr/>
+        </p:nvSpPr>
+        <p:spPr>
+          <a:xfrm>
+            <a:off x="4663440" y="4171950"/>
+            <a:ext cx="6042660" cy="647700"/>
           </a:xfrm>
           <a:prstGeom prst="roundRect">
             <a:avLst>
-              <a:gd name="adj" fmla="val 6097"/>
+              <a:gd name="adj" fmla="val 5882"/>
             </a:avLst>
           </a:prstGeom>
           <a:solidFill>
@@ -8543,93 +8629,59 @@
       </p:sp>
       <p:sp>
         <p:nvSpPr>
-          <p:cNvPr id="15" name="Rounded Rectangle 14"/>
-          <p:cNvSpPr/>
-          <p:nvPr/>
-        </p:nvSpPr>
-        <p:spPr>
-          <a:xfrm>
-            <a:off x="1466850" y="5019675"/>
-            <a:ext cx="400050" cy="400050"/>
+          <p:cNvPr id="23" name="TextBox 22"/>
+          <p:cNvSpPr txBox="1"/>
+          <p:nvPr/>
+        </p:nvSpPr>
+        <p:spPr>
+          <a:xfrm>
+            <a:off x="4758690" y="4171950"/>
+            <a:ext cx="5852160" cy="647700"/>
+          </a:xfrm>
+          <a:prstGeom prst="rect">
+            <a:avLst/>
+          </a:prstGeom>
+          <a:noFill/>
+        </p:spPr>
+        <p:txBody>
+          <a:bodyPr wrap="square" lIns="0" rIns="0" tIns="0" bIns="0" anchor="ctr">
+            <a:spAutoFit/>
+          </a:bodyPr>
+          <a:lstStyle/>
+          <a:p>
+            <a:pPr algn="ctr">
+              <a:lnSpc>
+                <a:spcPct val="115000"/>
+              </a:lnSpc>
+            </a:pPr>
+            <a:r>
+              <a:rPr sz="1875" b="0">
+                <a:solidFill>
+                  <a:srgbClr val="22252B"/>
+                </a:solidFill>
+                <a:latin typeface="Pretendard"/>
+                <a:ea typeface="Pretendard"/>
+                <a:cs typeface="Pretendard"/>
+              </a:rPr>
+              <a:t>재고 현황 점검 · 월간 보고 / 전산 입력</a:t>
+            </a:r>
+          </a:p>
+        </p:txBody>
+      </p:sp>
+      <p:sp>
+        <p:nvSpPr>
+          <p:cNvPr id="24" name="Rounded Rectangle 23"/>
+          <p:cNvSpPr/>
+          <p:nvPr/>
+        </p:nvSpPr>
+        <p:spPr>
+          <a:xfrm>
+            <a:off x="10744200" y="4171950"/>
+            <a:ext cx="6400800" cy="647700"/>
           </a:xfrm>
           <a:prstGeom prst="roundRect">
             <a:avLst>
-              <a:gd name="adj" fmla="val 14285"/>
-            </a:avLst>
-          </a:prstGeom>
-          <a:solidFill>
-            <a:srgbClr val="FFFFFF"/>
-          </a:solidFill>
-          <a:ln w="28575">
-            <a:solidFill>
-              <a:srgbClr val="1E3E69"/>
-            </a:solidFill>
-          </a:ln>
-          <a:effectLst/>
-        </p:spPr>
-        <p:txBody>
-          <a:bodyPr rtlCol="0" anchor="ctr" wrap="square"/>
-          <a:lstStyle/>
-          <a:p>
-            <a:pPr algn="ctr"/>
-          </a:p>
-        </p:txBody>
-      </p:sp>
-      <p:sp>
-        <p:nvSpPr>
-          <p:cNvPr id="16" name="TextBox 15"/>
-          <p:cNvSpPr txBox="1"/>
-          <p:nvPr/>
-        </p:nvSpPr>
-        <p:spPr>
-          <a:xfrm>
-            <a:off x="2133600" y="4846320"/>
-            <a:ext cx="14725650" cy="746760"/>
-          </a:xfrm>
-          <a:prstGeom prst="rect">
-            <a:avLst/>
-          </a:prstGeom>
-          <a:noFill/>
-        </p:spPr>
-        <p:txBody>
-          <a:bodyPr wrap="square" lIns="0" rIns="0" tIns="0" bIns="0" anchor="ctr">
-            <a:spAutoFit/>
-          </a:bodyPr>
-          <a:lstStyle/>
-          <a:p>
-            <a:pPr>
-              <a:lnSpc>
-                <a:spcPct val="120000"/>
-              </a:lnSpc>
-            </a:pPr>
-            <a:r>
-              <a:rPr sz="2400" b="1">
-                <a:solidFill>
-                  <a:srgbClr val="1E3E69"/>
-                </a:solidFill>
-                <a:latin typeface="Pretendard"/>
-                <a:ea typeface="Pretendard"/>
-                <a:cs typeface="Pretendard"/>
-              </a:rPr>
-              <a:t>키워드 5개가 공고에 실제로 나오는 낱말이다</a:t>
-            </a:r>
-          </a:p>
-        </p:txBody>
-      </p:sp>
-      <p:sp>
-        <p:nvSpPr>
-          <p:cNvPr id="17" name="Rounded Rectangle 16"/>
-          <p:cNvSpPr/>
-          <p:nvPr/>
-        </p:nvSpPr>
-        <p:spPr>
-          <a:xfrm>
-            <a:off x="1143000" y="5840730"/>
-            <a:ext cx="16002000" cy="937260"/>
-          </a:xfrm>
-          <a:prstGeom prst="roundRect">
-            <a:avLst>
-              <a:gd name="adj" fmla="val 6097"/>
+              <a:gd name="adj" fmla="val 5882"/>
             </a:avLst>
           </a:prstGeom>
           <a:solidFill>
@@ -8652,26 +8704,67 @@
       </p:sp>
       <p:sp>
         <p:nvSpPr>
-          <p:cNvPr id="18" name="Rounded Rectangle 17"/>
-          <p:cNvSpPr/>
-          <p:nvPr/>
-        </p:nvSpPr>
-        <p:spPr>
-          <a:xfrm>
-            <a:off x="1466850" y="6109335"/>
-            <a:ext cx="400050" cy="400050"/>
+          <p:cNvPr id="25" name="TextBox 24"/>
+          <p:cNvSpPr txBox="1"/>
+          <p:nvPr/>
+        </p:nvSpPr>
+        <p:spPr>
+          <a:xfrm>
+            <a:off x="10839450" y="4171950"/>
+            <a:ext cx="6210300" cy="647700"/>
+          </a:xfrm>
+          <a:prstGeom prst="rect">
+            <a:avLst/>
+          </a:prstGeom>
+          <a:noFill/>
+        </p:spPr>
+        <p:txBody>
+          <a:bodyPr wrap="square" lIns="0" rIns="0" tIns="0" bIns="0" anchor="ctr">
+            <a:spAutoFit/>
+          </a:bodyPr>
+          <a:lstStyle/>
+          <a:p>
+            <a:pPr algn="ctr">
+              <a:lnSpc>
+                <a:spcPct val="115000"/>
+              </a:lnSpc>
+            </a:pPr>
+            <a:r>
+              <a:rPr sz="1875" b="0">
+                <a:solidFill>
+                  <a:srgbClr val="22252B"/>
+                </a:solidFill>
+                <a:latin typeface="Pretendard"/>
+                <a:ea typeface="Pretendard"/>
+                <a:cs typeface="Pretendard"/>
+              </a:rPr>
+              <a:t>엑셀 활용 수준 — 확인 필요</a:t>
+            </a:r>
+          </a:p>
+        </p:txBody>
+      </p:sp>
+      <p:sp>
+        <p:nvSpPr>
+          <p:cNvPr id="26" name="Rounded Rectangle 25"/>
+          <p:cNvSpPr/>
+          <p:nvPr/>
+        </p:nvSpPr>
+        <p:spPr>
+          <a:xfrm>
+            <a:off x="1143000" y="4895850"/>
+            <a:ext cx="3482340" cy="647700"/>
           </a:xfrm>
           <a:prstGeom prst="roundRect">
             <a:avLst>
-              <a:gd name="adj" fmla="val 14285"/>
+              <a:gd name="adj" fmla="val 5882"/>
             </a:avLst>
           </a:prstGeom>
           <a:solidFill>
-            <a:srgbClr val="FFFFFF"/>
-          </a:solidFill>
-          <a:ln w="28575">
+            <a:srgbClr val="E6F4EE"/>
+          </a:solidFill>
+          <a:ln w="9525">
             <a:solidFill>
-              <a:srgbClr val="1E3E69"/>
+              <a:srgbClr val="C3E6D8"/>
             </a:solidFill>
           </a:ln>
           <a:effectLst/>
@@ -8686,14 +8779,14 @@
       </p:sp>
       <p:sp>
         <p:nvSpPr>
-          <p:cNvPr id="19" name="TextBox 18"/>
-          <p:cNvSpPr txBox="1"/>
-          <p:nvPr/>
-        </p:nvSpPr>
-        <p:spPr>
-          <a:xfrm>
-            <a:off x="2133600" y="5935980"/>
-            <a:ext cx="14725650" cy="746760"/>
+          <p:cNvPr id="27" name="TextBox 26"/>
+          <p:cNvSpPr txBox="1"/>
+          <p:nvPr/>
+        </p:nvSpPr>
+        <p:spPr>
+          <a:xfrm>
+            <a:off x="1238250" y="4895850"/>
+            <a:ext cx="3291840" cy="647700"/>
           </a:xfrm>
           <a:prstGeom prst="rect">
             <a:avLst/>
@@ -8706,13 +8799,13 @@
           </a:bodyPr>
           <a:lstStyle/>
           <a:p>
-            <a:pPr>
-              <a:lnSpc>
-                <a:spcPct val="120000"/>
-              </a:lnSpc>
-            </a:pPr>
-            <a:r>
-              <a:rPr sz="2400" b="1">
+            <a:pPr algn="l">
+              <a:lnSpc>
+                <a:spcPct val="115000"/>
+              </a:lnSpc>
+            </a:pPr>
+            <a:r>
+              <a:rPr sz="1875" b="1">
                 <a:solidFill>
                   <a:srgbClr val="1E3E69"/>
                 </a:solidFill>
@@ -8720,25 +8813,25 @@
                 <a:ea typeface="Pretendard"/>
                 <a:cs typeface="Pretendard"/>
               </a:rPr>
-              <a:t>흥미 유형과의 연결이 내 결과지와 맞는다</a:t>
-            </a:r>
-          </a:p>
-        </p:txBody>
-      </p:sp>
-      <p:sp>
-        <p:nvSpPr>
-          <p:cNvPr id="20" name="Rounded Rectangle 19"/>
-          <p:cNvSpPr/>
-          <p:nvPr/>
-        </p:nvSpPr>
-        <p:spPr>
-          <a:xfrm>
-            <a:off x="1143000" y="6930390"/>
-            <a:ext cx="16002000" cy="937260"/>
+              <a:t>거래처 소통</a:t>
+            </a:r>
+          </a:p>
+        </p:txBody>
+      </p:sp>
+      <p:sp>
+        <p:nvSpPr>
+          <p:cNvPr id="28" name="Rounded Rectangle 27"/>
+          <p:cNvSpPr/>
+          <p:nvPr/>
+        </p:nvSpPr>
+        <p:spPr>
+          <a:xfrm>
+            <a:off x="4663440" y="4895850"/>
+            <a:ext cx="6042660" cy="647700"/>
           </a:xfrm>
           <a:prstGeom prst="roundRect">
             <a:avLst>
-              <a:gd name="adj" fmla="val 6097"/>
+              <a:gd name="adj" fmla="val 5882"/>
             </a:avLst>
           </a:prstGeom>
           <a:solidFill>
@@ -8761,26 +8854,67 @@
       </p:sp>
       <p:sp>
         <p:nvSpPr>
-          <p:cNvPr id="21" name="Rounded Rectangle 20"/>
-          <p:cNvSpPr/>
-          <p:nvPr/>
-        </p:nvSpPr>
-        <p:spPr>
-          <a:xfrm>
-            <a:off x="1466850" y="7198995"/>
-            <a:ext cx="400050" cy="400050"/>
+          <p:cNvPr id="29" name="TextBox 28"/>
+          <p:cNvSpPr txBox="1"/>
+          <p:nvPr/>
+        </p:nvSpPr>
+        <p:spPr>
+          <a:xfrm>
+            <a:off x="4758690" y="4895850"/>
+            <a:ext cx="5852160" cy="647700"/>
+          </a:xfrm>
+          <a:prstGeom prst="rect">
+            <a:avLst/>
+          </a:prstGeom>
+          <a:noFill/>
+        </p:spPr>
+        <p:txBody>
+          <a:bodyPr wrap="square" lIns="0" rIns="0" tIns="0" bIns="0" anchor="ctr">
+            <a:spAutoFit/>
+          </a:bodyPr>
+          <a:lstStyle/>
+          <a:p>
+            <a:pPr algn="ctr">
+              <a:lnSpc>
+                <a:spcPct val="115000"/>
+              </a:lnSpc>
+            </a:pPr>
+            <a:r>
+              <a:rPr sz="1875" b="0">
+                <a:solidFill>
+                  <a:srgbClr val="22252B"/>
+                </a:solidFill>
+                <a:latin typeface="Pretendard"/>
+                <a:ea typeface="Pretendard"/>
+                <a:cs typeface="Pretendard"/>
+              </a:rPr>
+              <a:t>거래처 주문 확인 · 우대: 거래처 관리 경험</a:t>
+            </a:r>
+          </a:p>
+        </p:txBody>
+      </p:sp>
+      <p:sp>
+        <p:nvSpPr>
+          <p:cNvPr id="30" name="Rounded Rectangle 29"/>
+          <p:cNvSpPr/>
+          <p:nvPr/>
+        </p:nvSpPr>
+        <p:spPr>
+          <a:xfrm>
+            <a:off x="10744200" y="4895850"/>
+            <a:ext cx="6400800" cy="647700"/>
           </a:xfrm>
           <a:prstGeom prst="roundRect">
             <a:avLst>
-              <a:gd name="adj" fmla="val 14285"/>
+              <a:gd name="adj" fmla="val 5882"/>
             </a:avLst>
           </a:prstGeom>
           <a:solidFill>
-            <a:srgbClr val="FFFFFF"/>
-          </a:solidFill>
-          <a:ln w="28575">
+            <a:srgbClr val="F4F7FA"/>
+          </a:solidFill>
+          <a:ln w="9525">
             <a:solidFill>
-              <a:srgbClr val="1E3E69"/>
+              <a:srgbClr val="D8E1EE"/>
             </a:solidFill>
           </a:ln>
           <a:effectLst/>
@@ -8795,14 +8929,14 @@
       </p:sp>
       <p:sp>
         <p:nvSpPr>
-          <p:cNvPr id="22" name="TextBox 21"/>
-          <p:cNvSpPr txBox="1"/>
-          <p:nvPr/>
-        </p:nvSpPr>
-        <p:spPr>
-          <a:xfrm>
-            <a:off x="2133600" y="7025640"/>
-            <a:ext cx="14725650" cy="746760"/>
+          <p:cNvPr id="31" name="TextBox 30"/>
+          <p:cNvSpPr txBox="1"/>
+          <p:nvPr/>
+        </p:nvSpPr>
+        <p:spPr>
+          <a:xfrm>
+            <a:off x="10839450" y="4895850"/>
+            <a:ext cx="6210300" cy="647700"/>
           </a:xfrm>
           <a:prstGeom prst="rect">
             <a:avLst/>
@@ -8815,28 +8949,69 @@
           </a:bodyPr>
           <a:lstStyle/>
           <a:p>
-            <a:pPr>
-              <a:lnSpc>
-                <a:spcPct val="120000"/>
-              </a:lnSpc>
-            </a:pPr>
-            <a:r>
-              <a:rPr sz="2400" b="1">
-                <a:solidFill>
-                  <a:srgbClr val="1E3E69"/>
-                </a:solidFill>
-                <a:latin typeface="Pretendard"/>
-                <a:ea typeface="Pretendard"/>
-                <a:cs typeface="Pretendard"/>
-              </a:rPr>
-              <a:t>개인정보를 넣지 않았다</a:t>
-            </a:r>
-          </a:p>
-        </p:txBody>
-      </p:sp>
-      <p:sp>
-        <p:nvSpPr>
-          <p:cNvPr id="23" name="Rectangle 22"/>
+            <a:pPr algn="ctr">
+              <a:lnSpc>
+                <a:spcPct val="115000"/>
+              </a:lnSpc>
+            </a:pPr>
+            <a:r>
+              <a:rPr sz="1875" b="0">
+                <a:solidFill>
+                  <a:srgbClr val="22252B"/>
+                </a:solidFill>
+                <a:latin typeface="Pretendard"/>
+                <a:ea typeface="Pretendard"/>
+                <a:cs typeface="Pretendard"/>
+              </a:rPr>
+              <a:t>거래처 40여 곳 관리 · 클레임 처리</a:t>
+            </a:r>
+          </a:p>
+        </p:txBody>
+      </p:sp>
+      <p:sp>
+        <p:nvSpPr>
+          <p:cNvPr id="32" name="TextBox 31"/>
+          <p:cNvSpPr txBox="1"/>
+          <p:nvPr/>
+        </p:nvSpPr>
+        <p:spPr>
+          <a:xfrm>
+            <a:off x="1143000" y="7620000"/>
+            <a:ext cx="16002000" cy="342900"/>
+          </a:xfrm>
+          <a:prstGeom prst="rect">
+            <a:avLst/>
+          </a:prstGeom>
+          <a:noFill/>
+        </p:spPr>
+        <p:txBody>
+          <a:bodyPr wrap="square" lIns="0" rIns="0" tIns="0" bIns="0" anchor="t">
+            <a:spAutoFit/>
+          </a:bodyPr>
+          <a:lstStyle/>
+          <a:p>
+            <a:pPr algn="l">
+              <a:lnSpc>
+                <a:spcPct val="100000"/>
+              </a:lnSpc>
+            </a:pPr>
+            <a:r>
+              <a:rPr sz="1875" b="1">
+                <a:solidFill>
+                  <a:srgbClr val="5E6370"/>
+                </a:solidFill>
+                <a:latin typeface="Pretendard"/>
+                <a:ea typeface="Pretendard"/>
+                <a:cs typeface="Pretendard"/>
+              </a:rPr>
+              <a:t>예시입니다 — 실제 AI 답은 조금씩 다르게 나옵니다. 근거 문장이 공고에 있는지 꼭 대조합니다</a:t>
+            </a:r>
+          </a:p>
+        </p:txBody>
+      </p:sp>
+      <p:sp>
+        <p:nvSpPr>
+          <p:cNvPr id="33" name="Rectangle 32"/>
           <p:cNvSpPr/>
           <p:nvPr/>
         </p:nvSpPr>
@@ -8866,7 +9041,7 @@
       </p:sp>
       <p:sp>
         <p:nvSpPr>
-          <p:cNvPr id="24" name="TextBox 23"/>
+          <p:cNvPr id="34" name="TextBox 33"/>
           <p:cNvSpPr txBox="1"/>
           <p:nvPr/>
         </p:nvSpPr>
@@ -8907,7 +9082,7 @@
       </p:sp>
       <p:sp>
         <p:nvSpPr>
-          <p:cNvPr id="25" name="TextBox 24"/>
+          <p:cNvPr id="35" name="TextBox 34"/>
           <p:cNvSpPr txBox="1"/>
           <p:nvPr/>
         </p:nvSpPr>
@@ -8955,6 +9130,2209 @@
 </file>
 
 <file path=ppt/slides/slide16.xml><?xml version="1.0" encoding="utf-8"?>
+<p:sld xmlns:a="http://schemas.openxmlformats.org/drawingml/2006/main" xmlns:p="http://schemas.openxmlformats.org/presentationml/2006/main" xmlns:r="http://schemas.openxmlformats.org/officeDocument/2006/relationships">
+  <p:cSld>
+    <p:spTree>
+      <p:nvGrpSpPr>
+        <p:cNvPr id="1" name=""/>
+        <p:cNvGrpSpPr/>
+        <p:nvPr/>
+      </p:nvGrpSpPr>
+      <p:grpSpPr/>
+      <p:sp>
+        <p:nvSpPr>
+          <p:cNvPr id="2" name="deckgen:decor"/>
+          <p:cNvSpPr/>
+          <p:nvPr/>
+        </p:nvSpPr>
+        <p:spPr>
+          <a:xfrm>
+            <a:off x="15811500" y="8382000"/>
+            <a:ext cx="4953000" cy="4953000"/>
+          </a:xfrm>
+          <a:prstGeom prst="ellipse">
+            <a:avLst/>
+          </a:prstGeom>
+          <a:solidFill>
+            <a:srgbClr val="F3F8F6"/>
+          </a:solidFill>
+          <a:ln>
+            <a:noFill/>
+          </a:ln>
+          <a:effectLst/>
+        </p:spPr>
+        <p:txBody>
+          <a:bodyPr rtlCol="0" anchor="ctr" wrap="square"/>
+          <a:lstStyle/>
+          <a:p>
+            <a:pPr algn="ctr"/>
+          </a:p>
+        </p:txBody>
+      </p:sp>
+      <p:sp>
+        <p:nvSpPr>
+          <p:cNvPr id="3" name="deckgen:decor"/>
+          <p:cNvSpPr/>
+          <p:nvPr/>
+        </p:nvSpPr>
+        <p:spPr>
+          <a:xfrm>
+            <a:off x="16859250" y="9429750"/>
+            <a:ext cx="2857500" cy="2857500"/>
+          </a:xfrm>
+          <a:prstGeom prst="ellipse">
+            <a:avLst/>
+          </a:prstGeom>
+          <a:solidFill>
+            <a:srgbClr val="FFFFFF"/>
+          </a:solidFill>
+          <a:ln>
+            <a:noFill/>
+          </a:ln>
+          <a:effectLst/>
+        </p:spPr>
+        <p:txBody>
+          <a:bodyPr rtlCol="0" anchor="ctr" wrap="square"/>
+          <a:lstStyle/>
+          <a:p>
+            <a:pPr algn="ctr"/>
+          </a:p>
+        </p:txBody>
+      </p:sp>
+      <p:sp>
+        <p:nvSpPr>
+          <p:cNvPr id="4" name="deckgen:decor"/>
+          <p:cNvSpPr/>
+          <p:nvPr/>
+        </p:nvSpPr>
+        <p:spPr>
+          <a:xfrm>
+            <a:off x="-1428750" y="1428750"/>
+            <a:ext cx="2857500" cy="2857500"/>
+          </a:xfrm>
+          <a:prstGeom prst="ellipse">
+            <a:avLst/>
+          </a:prstGeom>
+          <a:solidFill>
+            <a:srgbClr val="F8F9FA"/>
+          </a:solidFill>
+          <a:ln>
+            <a:noFill/>
+          </a:ln>
+          <a:effectLst/>
+        </p:spPr>
+        <p:txBody>
+          <a:bodyPr rtlCol="0" anchor="ctr" wrap="square"/>
+          <a:lstStyle/>
+          <a:p>
+            <a:pPr algn="ctr"/>
+          </a:p>
+        </p:txBody>
+      </p:sp>
+      <p:sp>
+        <p:nvSpPr>
+          <p:cNvPr id="5" name="Rounded Rectangle 4"/>
+          <p:cNvSpPr/>
+          <p:nvPr/>
+        </p:nvSpPr>
+        <p:spPr>
+          <a:xfrm>
+            <a:off x="13582650" y="1181100"/>
+            <a:ext cx="3562350" cy="590550"/>
+          </a:xfrm>
+          <a:prstGeom prst="roundRect">
+            <a:avLst>
+              <a:gd name="adj" fmla="val 50000"/>
+            </a:avLst>
+          </a:prstGeom>
+          <a:solidFill>
+            <a:srgbClr val="1E7F5B"/>
+          </a:solidFill>
+          <a:ln>
+            <a:noFill/>
+          </a:ln>
+          <a:effectLst/>
+        </p:spPr>
+        <p:txBody>
+          <a:bodyPr rtlCol="0" anchor="ctr" wrap="square"/>
+          <a:lstStyle/>
+          <a:p>
+            <a:pPr algn="ctr"/>
+          </a:p>
+        </p:txBody>
+      </p:sp>
+      <p:sp>
+        <p:nvSpPr>
+          <p:cNvPr id="6" name="Oval 5"/>
+          <p:cNvSpPr/>
+          <p:nvPr/>
+        </p:nvSpPr>
+        <p:spPr>
+          <a:xfrm>
+            <a:off x="13906500" y="1400175"/>
+            <a:ext cx="152400" cy="152400"/>
+          </a:xfrm>
+          <a:prstGeom prst="ellipse">
+            <a:avLst/>
+          </a:prstGeom>
+          <a:solidFill>
+            <a:srgbClr val="FFFFFF"/>
+          </a:solidFill>
+          <a:ln>
+            <a:noFill/>
+          </a:ln>
+          <a:effectLst/>
+        </p:spPr>
+        <p:txBody>
+          <a:bodyPr rtlCol="0" anchor="ctr" wrap="square"/>
+          <a:lstStyle/>
+          <a:p>
+            <a:pPr algn="ctr"/>
+          </a:p>
+        </p:txBody>
+      </p:sp>
+      <p:sp>
+        <p:nvSpPr>
+          <p:cNvPr id="7" name="TextBox 6"/>
+          <p:cNvSpPr txBox="1"/>
+          <p:nvPr/>
+        </p:nvSpPr>
+        <p:spPr>
+          <a:xfrm>
+            <a:off x="14097000" y="1295400"/>
+            <a:ext cx="2819400" cy="381000"/>
+          </a:xfrm>
+          <a:prstGeom prst="rect">
+            <a:avLst/>
+          </a:prstGeom>
+          <a:noFill/>
+        </p:spPr>
+        <p:txBody>
+          <a:bodyPr wrap="square" lIns="0" rIns="0" tIns="0" bIns="0" anchor="t">
+            <a:spAutoFit/>
+          </a:bodyPr>
+          <a:lstStyle/>
+          <a:p>
+            <a:pPr algn="ctr">
+              <a:lnSpc>
+                <a:spcPct val="100000"/>
+              </a:lnSpc>
+            </a:pPr>
+            <a:r>
+              <a:rPr sz="2325" b="1">
+                <a:solidFill>
+                  <a:srgbClr val="FFFFFF"/>
+                </a:solidFill>
+                <a:latin typeface="Pretendard"/>
+                <a:ea typeface="Pretendard"/>
+                <a:cs typeface="Pretendard"/>
+              </a:rPr>
+              <a:t>직무분석 메모</a:t>
+            </a:r>
+          </a:p>
+        </p:txBody>
+      </p:sp>
+      <p:sp>
+        <p:nvSpPr>
+          <p:cNvPr id="8" name="TextBox 7"/>
+          <p:cNvSpPr txBox="1"/>
+          <p:nvPr/>
+        </p:nvSpPr>
+        <p:spPr>
+          <a:xfrm>
+            <a:off x="1143000" y="838200"/>
+            <a:ext cx="12058650" cy="342900"/>
+          </a:xfrm>
+          <a:prstGeom prst="rect">
+            <a:avLst/>
+          </a:prstGeom>
+          <a:noFill/>
+        </p:spPr>
+        <p:txBody>
+          <a:bodyPr wrap="square" lIns="0" rIns="0" tIns="0" bIns="0" anchor="t">
+            <a:spAutoFit/>
+          </a:bodyPr>
+          <a:lstStyle/>
+          <a:p>
+            <a:pPr algn="l">
+              <a:lnSpc>
+                <a:spcPct val="100000"/>
+              </a:lnSpc>
+            </a:pPr>
+            <a:r>
+              <a:rPr sz="1950" b="1" spc="160">
+                <a:solidFill>
+                  <a:srgbClr val="1E7F5B"/>
+                </a:solidFill>
+                <a:latin typeface="Pretendard"/>
+                <a:ea typeface="Pretendard"/>
+                <a:cs typeface="Pretendard"/>
+              </a:rPr>
+              <a:t>2교시 산출물</a:t>
+            </a:r>
+          </a:p>
+        </p:txBody>
+      </p:sp>
+      <p:sp>
+        <p:nvSpPr>
+          <p:cNvPr id="9" name="TextBox 8"/>
+          <p:cNvSpPr txBox="1"/>
+          <p:nvPr/>
+        </p:nvSpPr>
+        <p:spPr>
+          <a:xfrm>
+            <a:off x="1143000" y="1162050"/>
+            <a:ext cx="12058650" cy="762000"/>
+          </a:xfrm>
+          <a:prstGeom prst="rect">
+            <a:avLst/>
+          </a:prstGeom>
+          <a:noFill/>
+        </p:spPr>
+        <p:txBody>
+          <a:bodyPr wrap="square" lIns="0" rIns="0" tIns="0" bIns="0" anchor="t">
+            <a:spAutoFit/>
+          </a:bodyPr>
+          <a:lstStyle/>
+          <a:p>
+            <a:pPr algn="l">
+              <a:lnSpc>
+                <a:spcPct val="100000"/>
+              </a:lnSpc>
+            </a:pPr>
+            <a:r>
+              <a:rPr sz="5100" b="1">
+                <a:solidFill>
+                  <a:srgbClr val="1E3E69"/>
+                </a:solidFill>
+                <a:latin typeface="Pretendard"/>
+                <a:ea typeface="Pretendard"/>
+                <a:cs typeface="Pretendard"/>
+              </a:rPr>
+              <a:t>직무분석 메모</a:t>
+            </a:r>
+          </a:p>
+        </p:txBody>
+      </p:sp>
+      <p:sp>
+        <p:nvSpPr>
+          <p:cNvPr id="10" name="Rectangle 9"/>
+          <p:cNvSpPr/>
+          <p:nvPr/>
+        </p:nvSpPr>
+        <p:spPr>
+          <a:xfrm>
+            <a:off x="1143000" y="2038350"/>
+            <a:ext cx="16002000" cy="28575"/>
+          </a:xfrm>
+          <a:prstGeom prst="rect">
+            <a:avLst/>
+          </a:prstGeom>
+          <a:solidFill>
+            <a:srgbClr val="1E3E69"/>
+          </a:solidFill>
+          <a:ln>
+            <a:noFill/>
+          </a:ln>
+          <a:effectLst/>
+        </p:spPr>
+        <p:txBody>
+          <a:bodyPr rtlCol="0" anchor="ctr" wrap="square"/>
+          <a:lstStyle/>
+          <a:p>
+            <a:pPr algn="ctr"/>
+          </a:p>
+        </p:txBody>
+      </p:sp>
+      <p:sp>
+        <p:nvSpPr>
+          <p:cNvPr id="11" name="Rounded Rectangle 10"/>
+          <p:cNvSpPr/>
+          <p:nvPr/>
+        </p:nvSpPr>
+        <p:spPr>
+          <a:xfrm>
+            <a:off x="1143000" y="2476500"/>
+            <a:ext cx="4000500" cy="793750"/>
+          </a:xfrm>
+          <a:prstGeom prst="roundRect">
+            <a:avLst>
+              <a:gd name="adj" fmla="val 7200"/>
+            </a:avLst>
+          </a:prstGeom>
+          <a:solidFill>
+            <a:srgbClr val="F4F7FA"/>
+          </a:solidFill>
+          <a:ln w="9525">
+            <a:solidFill>
+              <a:srgbClr val="D8E1EE"/>
+            </a:solidFill>
+          </a:ln>
+          <a:effectLst/>
+        </p:spPr>
+        <p:txBody>
+          <a:bodyPr rtlCol="0" anchor="ctr" wrap="square"/>
+          <a:lstStyle/>
+          <a:p>
+            <a:pPr algn="ctr"/>
+          </a:p>
+        </p:txBody>
+      </p:sp>
+      <p:sp>
+        <p:nvSpPr>
+          <p:cNvPr id="12" name="Rectangle 11"/>
+          <p:cNvSpPr/>
+          <p:nvPr/>
+        </p:nvSpPr>
+        <p:spPr>
+          <a:xfrm>
+            <a:off x="1143000" y="2476500"/>
+            <a:ext cx="57150" cy="793750"/>
+          </a:xfrm>
+          <a:prstGeom prst="rect">
+            <a:avLst/>
+          </a:prstGeom>
+          <a:solidFill>
+            <a:srgbClr val="1E3E69"/>
+          </a:solidFill>
+          <a:ln>
+            <a:noFill/>
+          </a:ln>
+          <a:effectLst/>
+        </p:spPr>
+        <p:txBody>
+          <a:bodyPr rtlCol="0" anchor="ctr" wrap="square"/>
+          <a:lstStyle/>
+          <a:p>
+            <a:pPr algn="ctr"/>
+          </a:p>
+        </p:txBody>
+      </p:sp>
+      <p:sp>
+        <p:nvSpPr>
+          <p:cNvPr id="13" name="TextBox 12"/>
+          <p:cNvSpPr txBox="1"/>
+          <p:nvPr/>
+        </p:nvSpPr>
+        <p:spPr>
+          <a:xfrm>
+            <a:off x="1409700" y="2590800"/>
+            <a:ext cx="3467100" cy="565150"/>
+          </a:xfrm>
+          <a:prstGeom prst="rect">
+            <a:avLst/>
+          </a:prstGeom>
+          <a:noFill/>
+        </p:spPr>
+        <p:txBody>
+          <a:bodyPr wrap="square" lIns="0" rIns="0" tIns="0" bIns="0" anchor="t">
+            <a:spAutoFit/>
+          </a:bodyPr>
+          <a:lstStyle/>
+          <a:p>
+            <a:pPr>
+              <a:lnSpc>
+                <a:spcPct val="115000"/>
+              </a:lnSpc>
+            </a:pPr>
+            <a:r>
+              <a:rPr sz="1725" b="1">
+                <a:solidFill>
+                  <a:srgbClr val="1E3E69"/>
+                </a:solidFill>
+                <a:latin typeface="Pretendard"/>
+                <a:ea typeface="Pretendard"/>
+                <a:cs typeface="Pretendard"/>
+              </a:rPr>
+              <a:t>지원 직종 · 공고</a:t>
+            </a:r>
+          </a:p>
+          <a:p>
+            <a:pPr>
+              <a:lnSpc>
+                <a:spcPct val="120000"/>
+              </a:lnSpc>
+              <a:spcBef>
+                <a:spcPts val="300"/>
+              </a:spcBef>
+            </a:pPr>
+            <a:r>
+              <a:rPr sz="1650" b="0">
+                <a:solidFill>
+                  <a:srgbClr val="5E6370"/>
+                </a:solidFill>
+                <a:latin typeface="Pretendard"/>
+                <a:ea typeface="Pretendard"/>
+                <a:cs typeface="Pretendard"/>
+              </a:rPr>
+              <a:t>회사 이름은 빼도 됩니다</a:t>
+            </a:r>
+          </a:p>
+        </p:txBody>
+      </p:sp>
+      <p:sp>
+        <p:nvSpPr>
+          <p:cNvPr id="14" name="Rectangle 13"/>
+          <p:cNvSpPr/>
+          <p:nvPr/>
+        </p:nvSpPr>
+        <p:spPr>
+          <a:xfrm>
+            <a:off x="5143500" y="2476500"/>
+            <a:ext cx="12001500" cy="793750"/>
+          </a:xfrm>
+          <a:prstGeom prst="rect">
+            <a:avLst/>
+          </a:prstGeom>
+          <a:solidFill>
+            <a:srgbClr val="FFFFFF"/>
+          </a:solidFill>
+          <a:ln w="9525">
+            <a:solidFill>
+              <a:srgbClr val="D8E1EE"/>
+            </a:solidFill>
+          </a:ln>
+          <a:effectLst/>
+        </p:spPr>
+        <p:txBody>
+          <a:bodyPr rtlCol="0" anchor="ctr" wrap="square"/>
+          <a:lstStyle/>
+          <a:p>
+            <a:pPr algn="ctr"/>
+          </a:p>
+        </p:txBody>
+      </p:sp>
+      <p:sp>
+        <p:nvSpPr>
+          <p:cNvPr id="15" name="Rounded Rectangle 14"/>
+          <p:cNvSpPr/>
+          <p:nvPr/>
+        </p:nvSpPr>
+        <p:spPr>
+          <a:xfrm>
+            <a:off x="1143000" y="3403600"/>
+            <a:ext cx="4000500" cy="1244600"/>
+          </a:xfrm>
+          <a:prstGeom prst="roundRect">
+            <a:avLst>
+              <a:gd name="adj" fmla="val 4591"/>
+            </a:avLst>
+          </a:prstGeom>
+          <a:solidFill>
+            <a:srgbClr val="F4F7FA"/>
+          </a:solidFill>
+          <a:ln w="9525">
+            <a:solidFill>
+              <a:srgbClr val="D8E1EE"/>
+            </a:solidFill>
+          </a:ln>
+          <a:effectLst/>
+        </p:spPr>
+        <p:txBody>
+          <a:bodyPr rtlCol="0" anchor="ctr" wrap="square"/>
+          <a:lstStyle/>
+          <a:p>
+            <a:pPr algn="ctr"/>
+          </a:p>
+        </p:txBody>
+      </p:sp>
+      <p:sp>
+        <p:nvSpPr>
+          <p:cNvPr id="16" name="Rectangle 15"/>
+          <p:cNvSpPr/>
+          <p:nvPr/>
+        </p:nvSpPr>
+        <p:spPr>
+          <a:xfrm>
+            <a:off x="1143000" y="3403600"/>
+            <a:ext cx="57150" cy="1244600"/>
+          </a:xfrm>
+          <a:prstGeom prst="rect">
+            <a:avLst/>
+          </a:prstGeom>
+          <a:solidFill>
+            <a:srgbClr val="1E3E69"/>
+          </a:solidFill>
+          <a:ln>
+            <a:noFill/>
+          </a:ln>
+          <a:effectLst/>
+        </p:spPr>
+        <p:txBody>
+          <a:bodyPr rtlCol="0" anchor="ctr" wrap="square"/>
+          <a:lstStyle/>
+          <a:p>
+            <a:pPr algn="ctr"/>
+          </a:p>
+        </p:txBody>
+      </p:sp>
+      <p:sp>
+        <p:nvSpPr>
+          <p:cNvPr id="17" name="TextBox 16"/>
+          <p:cNvSpPr txBox="1"/>
+          <p:nvPr/>
+        </p:nvSpPr>
+        <p:spPr>
+          <a:xfrm>
+            <a:off x="1409700" y="3517900"/>
+            <a:ext cx="3467100" cy="1016000"/>
+          </a:xfrm>
+          <a:prstGeom prst="rect">
+            <a:avLst/>
+          </a:prstGeom>
+          <a:noFill/>
+        </p:spPr>
+        <p:txBody>
+          <a:bodyPr wrap="square" lIns="0" rIns="0" tIns="0" bIns="0" anchor="t">
+            <a:spAutoFit/>
+          </a:bodyPr>
+          <a:lstStyle/>
+          <a:p>
+            <a:pPr>
+              <a:lnSpc>
+                <a:spcPct val="115000"/>
+              </a:lnSpc>
+            </a:pPr>
+            <a:r>
+              <a:rPr sz="1725" b="1">
+                <a:solidFill>
+                  <a:srgbClr val="1E3E69"/>
+                </a:solidFill>
+                <a:latin typeface="Pretendard"/>
+                <a:ea typeface="Pretendard"/>
+                <a:cs typeface="Pretendard"/>
+              </a:rPr>
+              <a:t>핵심 역량 3가지</a:t>
+            </a:r>
+          </a:p>
+          <a:p>
+            <a:pPr>
+              <a:lnSpc>
+                <a:spcPct val="120000"/>
+              </a:lnSpc>
+              <a:spcBef>
+                <a:spcPts val="300"/>
+              </a:spcBef>
+            </a:pPr>
+            <a:r>
+              <a:rPr sz="1650" b="0">
+                <a:solidFill>
+                  <a:srgbClr val="5E6370"/>
+                </a:solidFill>
+                <a:latin typeface="Pretendard"/>
+                <a:ea typeface="Pretendard"/>
+                <a:cs typeface="Pretendard"/>
+              </a:rPr>
+              <a:t>공고 근거 문장과 함께</a:t>
+            </a:r>
+          </a:p>
+        </p:txBody>
+      </p:sp>
+      <p:sp>
+        <p:nvSpPr>
+          <p:cNvPr id="18" name="Rectangle 17"/>
+          <p:cNvSpPr/>
+          <p:nvPr/>
+        </p:nvSpPr>
+        <p:spPr>
+          <a:xfrm>
+            <a:off x="5143500" y="3403600"/>
+            <a:ext cx="12001500" cy="1244600"/>
+          </a:xfrm>
+          <a:prstGeom prst="rect">
+            <a:avLst/>
+          </a:prstGeom>
+          <a:solidFill>
+            <a:srgbClr val="FFFFFF"/>
+          </a:solidFill>
+          <a:ln w="9525">
+            <a:solidFill>
+              <a:srgbClr val="D8E1EE"/>
+            </a:solidFill>
+          </a:ln>
+          <a:effectLst/>
+        </p:spPr>
+        <p:txBody>
+          <a:bodyPr rtlCol="0" anchor="ctr" wrap="square"/>
+          <a:lstStyle/>
+          <a:p>
+            <a:pPr algn="ctr"/>
+          </a:p>
+        </p:txBody>
+      </p:sp>
+      <p:sp>
+        <p:nvSpPr>
+          <p:cNvPr id="19" name="Rectangle 18"/>
+          <p:cNvSpPr/>
+          <p:nvPr/>
+        </p:nvSpPr>
+        <p:spPr>
+          <a:xfrm>
+            <a:off x="5295900" y="4025900"/>
+            <a:ext cx="11696700" cy="9525"/>
+          </a:xfrm>
+          <a:prstGeom prst="rect">
+            <a:avLst/>
+          </a:prstGeom>
+          <a:solidFill>
+            <a:srgbClr val="D8E1EE"/>
+          </a:solidFill>
+          <a:ln>
+            <a:noFill/>
+          </a:ln>
+          <a:effectLst/>
+        </p:spPr>
+        <p:txBody>
+          <a:bodyPr rtlCol="0" anchor="ctr" wrap="square"/>
+          <a:lstStyle/>
+          <a:p>
+            <a:pPr algn="ctr"/>
+          </a:p>
+        </p:txBody>
+      </p:sp>
+      <p:sp>
+        <p:nvSpPr>
+          <p:cNvPr id="20" name="Rounded Rectangle 19"/>
+          <p:cNvSpPr/>
+          <p:nvPr/>
+        </p:nvSpPr>
+        <p:spPr>
+          <a:xfrm>
+            <a:off x="1143000" y="4781550"/>
+            <a:ext cx="4000500" cy="793750"/>
+          </a:xfrm>
+          <a:prstGeom prst="roundRect">
+            <a:avLst>
+              <a:gd name="adj" fmla="val 7200"/>
+            </a:avLst>
+          </a:prstGeom>
+          <a:solidFill>
+            <a:srgbClr val="F4F7FA"/>
+          </a:solidFill>
+          <a:ln w="9525">
+            <a:solidFill>
+              <a:srgbClr val="D8E1EE"/>
+            </a:solidFill>
+          </a:ln>
+          <a:effectLst/>
+        </p:spPr>
+        <p:txBody>
+          <a:bodyPr rtlCol="0" anchor="ctr" wrap="square"/>
+          <a:lstStyle/>
+          <a:p>
+            <a:pPr algn="ctr"/>
+          </a:p>
+        </p:txBody>
+      </p:sp>
+      <p:sp>
+        <p:nvSpPr>
+          <p:cNvPr id="21" name="Rectangle 20"/>
+          <p:cNvSpPr/>
+          <p:nvPr/>
+        </p:nvSpPr>
+        <p:spPr>
+          <a:xfrm>
+            <a:off x="1143000" y="4781550"/>
+            <a:ext cx="57150" cy="793750"/>
+          </a:xfrm>
+          <a:prstGeom prst="rect">
+            <a:avLst/>
+          </a:prstGeom>
+          <a:solidFill>
+            <a:srgbClr val="1E3E69"/>
+          </a:solidFill>
+          <a:ln>
+            <a:noFill/>
+          </a:ln>
+          <a:effectLst/>
+        </p:spPr>
+        <p:txBody>
+          <a:bodyPr rtlCol="0" anchor="ctr" wrap="square"/>
+          <a:lstStyle/>
+          <a:p>
+            <a:pPr algn="ctr"/>
+          </a:p>
+        </p:txBody>
+      </p:sp>
+      <p:sp>
+        <p:nvSpPr>
+          <p:cNvPr id="22" name="TextBox 21"/>
+          <p:cNvSpPr txBox="1"/>
+          <p:nvPr/>
+        </p:nvSpPr>
+        <p:spPr>
+          <a:xfrm>
+            <a:off x="1409700" y="4895850"/>
+            <a:ext cx="3467100" cy="565150"/>
+          </a:xfrm>
+          <a:prstGeom prst="rect">
+            <a:avLst/>
+          </a:prstGeom>
+          <a:noFill/>
+        </p:spPr>
+        <p:txBody>
+          <a:bodyPr wrap="square" lIns="0" rIns="0" tIns="0" bIns="0" anchor="t">
+            <a:spAutoFit/>
+          </a:bodyPr>
+          <a:lstStyle/>
+          <a:p>
+            <a:pPr>
+              <a:lnSpc>
+                <a:spcPct val="115000"/>
+              </a:lnSpc>
+            </a:pPr>
+            <a:r>
+              <a:rPr sz="1725" b="1">
+                <a:solidFill>
+                  <a:srgbClr val="1E3E69"/>
+                </a:solidFill>
+                <a:latin typeface="Pretendard"/>
+                <a:ea typeface="Pretendard"/>
+                <a:cs typeface="Pretendard"/>
+              </a:rPr>
+              <a:t>핵심 키워드 5개</a:t>
+            </a:r>
+          </a:p>
+          <a:p>
+            <a:pPr>
+              <a:lnSpc>
+                <a:spcPct val="120000"/>
+              </a:lnSpc>
+              <a:spcBef>
+                <a:spcPts val="300"/>
+              </a:spcBef>
+            </a:pPr>
+            <a:r>
+              <a:rPr sz="1650" b="0">
+                <a:solidFill>
+                  <a:srgbClr val="5E6370"/>
+                </a:solidFill>
+                <a:latin typeface="Pretendard"/>
+                <a:ea typeface="Pretendard"/>
+                <a:cs typeface="Pretendard"/>
+              </a:rPr>
+              <a:t>서류에 그대로 살릴 낱말</a:t>
+            </a:r>
+          </a:p>
+        </p:txBody>
+      </p:sp>
+      <p:sp>
+        <p:nvSpPr>
+          <p:cNvPr id="23" name="Rectangle 22"/>
+          <p:cNvSpPr/>
+          <p:nvPr/>
+        </p:nvSpPr>
+        <p:spPr>
+          <a:xfrm>
+            <a:off x="5143500" y="4781550"/>
+            <a:ext cx="12001500" cy="793750"/>
+          </a:xfrm>
+          <a:prstGeom prst="rect">
+            <a:avLst/>
+          </a:prstGeom>
+          <a:solidFill>
+            <a:srgbClr val="FFFFFF"/>
+          </a:solidFill>
+          <a:ln w="9525">
+            <a:solidFill>
+              <a:srgbClr val="D8E1EE"/>
+            </a:solidFill>
+          </a:ln>
+          <a:effectLst/>
+        </p:spPr>
+        <p:txBody>
+          <a:bodyPr rtlCol="0" anchor="ctr" wrap="square"/>
+          <a:lstStyle/>
+          <a:p>
+            <a:pPr algn="ctr"/>
+          </a:p>
+        </p:txBody>
+      </p:sp>
+      <p:sp>
+        <p:nvSpPr>
+          <p:cNvPr id="24" name="Rounded Rectangle 23"/>
+          <p:cNvSpPr/>
+          <p:nvPr/>
+        </p:nvSpPr>
+        <p:spPr>
+          <a:xfrm>
+            <a:off x="1143000" y="5708650"/>
+            <a:ext cx="4000500" cy="793750"/>
+          </a:xfrm>
+          <a:prstGeom prst="roundRect">
+            <a:avLst>
+              <a:gd name="adj" fmla="val 7200"/>
+            </a:avLst>
+          </a:prstGeom>
+          <a:solidFill>
+            <a:srgbClr val="F4F7FA"/>
+          </a:solidFill>
+          <a:ln w="9525">
+            <a:solidFill>
+              <a:srgbClr val="D8E1EE"/>
+            </a:solidFill>
+          </a:ln>
+          <a:effectLst/>
+        </p:spPr>
+        <p:txBody>
+          <a:bodyPr rtlCol="0" anchor="ctr" wrap="square"/>
+          <a:lstStyle/>
+          <a:p>
+            <a:pPr algn="ctr"/>
+          </a:p>
+        </p:txBody>
+      </p:sp>
+      <p:sp>
+        <p:nvSpPr>
+          <p:cNvPr id="25" name="Rectangle 24"/>
+          <p:cNvSpPr/>
+          <p:nvPr/>
+        </p:nvSpPr>
+        <p:spPr>
+          <a:xfrm>
+            <a:off x="1143000" y="5708650"/>
+            <a:ext cx="57150" cy="793750"/>
+          </a:xfrm>
+          <a:prstGeom prst="rect">
+            <a:avLst/>
+          </a:prstGeom>
+          <a:solidFill>
+            <a:srgbClr val="1E3E69"/>
+          </a:solidFill>
+          <a:ln>
+            <a:noFill/>
+          </a:ln>
+          <a:effectLst/>
+        </p:spPr>
+        <p:txBody>
+          <a:bodyPr rtlCol="0" anchor="ctr" wrap="square"/>
+          <a:lstStyle/>
+          <a:p>
+            <a:pPr algn="ctr"/>
+          </a:p>
+        </p:txBody>
+      </p:sp>
+      <p:sp>
+        <p:nvSpPr>
+          <p:cNvPr id="26" name="TextBox 25"/>
+          <p:cNvSpPr txBox="1"/>
+          <p:nvPr/>
+        </p:nvSpPr>
+        <p:spPr>
+          <a:xfrm>
+            <a:off x="1409700" y="5822950"/>
+            <a:ext cx="3467100" cy="565150"/>
+          </a:xfrm>
+          <a:prstGeom prst="rect">
+            <a:avLst/>
+          </a:prstGeom>
+          <a:noFill/>
+        </p:spPr>
+        <p:txBody>
+          <a:bodyPr wrap="square" lIns="0" rIns="0" tIns="0" bIns="0" anchor="t">
+            <a:spAutoFit/>
+          </a:bodyPr>
+          <a:lstStyle/>
+          <a:p>
+            <a:pPr>
+              <a:lnSpc>
+                <a:spcPct val="115000"/>
+              </a:lnSpc>
+            </a:pPr>
+            <a:r>
+              <a:rPr sz="1725" b="1">
+                <a:solidFill>
+                  <a:srgbClr val="1E3E69"/>
+                </a:solidFill>
+                <a:latin typeface="Pretendard"/>
+                <a:ea typeface="Pretendard"/>
+                <a:cs typeface="Pretendard"/>
+              </a:rPr>
+              <a:t>내 흥미 유형과의 연결</a:t>
+            </a:r>
+          </a:p>
+          <a:p>
+            <a:pPr>
+              <a:lnSpc>
+                <a:spcPct val="120000"/>
+              </a:lnSpc>
+              <a:spcBef>
+                <a:spcPts val="300"/>
+              </a:spcBef>
+            </a:pPr>
+            <a:r>
+              <a:rPr sz="1650" b="0">
+                <a:solidFill>
+                  <a:srgbClr val="5E6370"/>
+                </a:solidFill>
+                <a:latin typeface="Pretendard"/>
+                <a:ea typeface="Pretendard"/>
+                <a:cs typeface="Pretendard"/>
+              </a:rPr>
+              <a:t>두 줄</a:t>
+            </a:r>
+          </a:p>
+        </p:txBody>
+      </p:sp>
+      <p:sp>
+        <p:nvSpPr>
+          <p:cNvPr id="27" name="Rectangle 26"/>
+          <p:cNvSpPr/>
+          <p:nvPr/>
+        </p:nvSpPr>
+        <p:spPr>
+          <a:xfrm>
+            <a:off x="5143500" y="5708650"/>
+            <a:ext cx="12001500" cy="793750"/>
+          </a:xfrm>
+          <a:prstGeom prst="rect">
+            <a:avLst/>
+          </a:prstGeom>
+          <a:solidFill>
+            <a:srgbClr val="FFFFFF"/>
+          </a:solidFill>
+          <a:ln w="9525">
+            <a:solidFill>
+              <a:srgbClr val="D8E1EE"/>
+            </a:solidFill>
+          </a:ln>
+          <a:effectLst/>
+        </p:spPr>
+        <p:txBody>
+          <a:bodyPr rtlCol="0" anchor="ctr" wrap="square"/>
+          <a:lstStyle/>
+          <a:p>
+            <a:pPr algn="ctr"/>
+          </a:p>
+        </p:txBody>
+      </p:sp>
+      <p:sp>
+        <p:nvSpPr>
+          <p:cNvPr id="28" name="Rounded Rectangle 27"/>
+          <p:cNvSpPr/>
+          <p:nvPr/>
+        </p:nvSpPr>
+        <p:spPr>
+          <a:xfrm>
+            <a:off x="1143000" y="6635750"/>
+            <a:ext cx="4000500" cy="793750"/>
+          </a:xfrm>
+          <a:prstGeom prst="roundRect">
+            <a:avLst>
+              <a:gd name="adj" fmla="val 7200"/>
+            </a:avLst>
+          </a:prstGeom>
+          <a:solidFill>
+            <a:srgbClr val="F4F7FA"/>
+          </a:solidFill>
+          <a:ln w="9525">
+            <a:solidFill>
+              <a:srgbClr val="D8E1EE"/>
+            </a:solidFill>
+          </a:ln>
+          <a:effectLst/>
+        </p:spPr>
+        <p:txBody>
+          <a:bodyPr rtlCol="0" anchor="ctr" wrap="square"/>
+          <a:lstStyle/>
+          <a:p>
+            <a:pPr algn="ctr"/>
+          </a:p>
+        </p:txBody>
+      </p:sp>
+      <p:sp>
+        <p:nvSpPr>
+          <p:cNvPr id="29" name="Rectangle 28"/>
+          <p:cNvSpPr/>
+          <p:nvPr/>
+        </p:nvSpPr>
+        <p:spPr>
+          <a:xfrm>
+            <a:off x="1143000" y="6635750"/>
+            <a:ext cx="57150" cy="793750"/>
+          </a:xfrm>
+          <a:prstGeom prst="rect">
+            <a:avLst/>
+          </a:prstGeom>
+          <a:solidFill>
+            <a:srgbClr val="1E3E69"/>
+          </a:solidFill>
+          <a:ln>
+            <a:noFill/>
+          </a:ln>
+          <a:effectLst/>
+        </p:spPr>
+        <p:txBody>
+          <a:bodyPr rtlCol="0" anchor="ctr" wrap="square"/>
+          <a:lstStyle/>
+          <a:p>
+            <a:pPr algn="ctr"/>
+          </a:p>
+        </p:txBody>
+      </p:sp>
+      <p:sp>
+        <p:nvSpPr>
+          <p:cNvPr id="30" name="TextBox 29"/>
+          <p:cNvSpPr txBox="1"/>
+          <p:nvPr/>
+        </p:nvSpPr>
+        <p:spPr>
+          <a:xfrm>
+            <a:off x="1409700" y="6750050"/>
+            <a:ext cx="3467100" cy="565150"/>
+          </a:xfrm>
+          <a:prstGeom prst="rect">
+            <a:avLst/>
+          </a:prstGeom>
+          <a:noFill/>
+        </p:spPr>
+        <p:txBody>
+          <a:bodyPr wrap="square" lIns="0" rIns="0" tIns="0" bIns="0" anchor="t">
+            <a:spAutoFit/>
+          </a:bodyPr>
+          <a:lstStyle/>
+          <a:p>
+            <a:pPr>
+              <a:lnSpc>
+                <a:spcPct val="115000"/>
+              </a:lnSpc>
+            </a:pPr>
+            <a:r>
+              <a:rPr sz="1725" b="1">
+                <a:solidFill>
+                  <a:srgbClr val="1E3E69"/>
+                </a:solidFill>
+                <a:latin typeface="Pretendard"/>
+                <a:ea typeface="Pretendard"/>
+                <a:cs typeface="Pretendard"/>
+              </a:rPr>
+              <a:t>보완할 것 한 가지</a:t>
+            </a:r>
+          </a:p>
+          <a:p>
+            <a:pPr>
+              <a:lnSpc>
+                <a:spcPct val="120000"/>
+              </a:lnSpc>
+              <a:spcBef>
+                <a:spcPts val="300"/>
+              </a:spcBef>
+            </a:pPr>
+            <a:r>
+              <a:rPr sz="1650" b="0">
+                <a:solidFill>
+                  <a:srgbClr val="5E6370"/>
+                </a:solidFill>
+                <a:latin typeface="Pretendard"/>
+                <a:ea typeface="Pretendard"/>
+                <a:cs typeface="Pretendard"/>
+              </a:rPr>
+              <a:t>자격 · 경험 · 공부</a:t>
+            </a:r>
+          </a:p>
+        </p:txBody>
+      </p:sp>
+      <p:sp>
+        <p:nvSpPr>
+          <p:cNvPr id="31" name="Rectangle 30"/>
+          <p:cNvSpPr/>
+          <p:nvPr/>
+        </p:nvSpPr>
+        <p:spPr>
+          <a:xfrm>
+            <a:off x="5143500" y="6635750"/>
+            <a:ext cx="12001500" cy="793750"/>
+          </a:xfrm>
+          <a:prstGeom prst="rect">
+            <a:avLst/>
+          </a:prstGeom>
+          <a:solidFill>
+            <a:srgbClr val="FFFFFF"/>
+          </a:solidFill>
+          <a:ln w="9525">
+            <a:solidFill>
+              <a:srgbClr val="D8E1EE"/>
+            </a:solidFill>
+          </a:ln>
+          <a:effectLst/>
+        </p:spPr>
+        <p:txBody>
+          <a:bodyPr rtlCol="0" anchor="ctr" wrap="square"/>
+          <a:lstStyle/>
+          <a:p>
+            <a:pPr algn="ctr"/>
+          </a:p>
+        </p:txBody>
+      </p:sp>
+      <p:sp>
+        <p:nvSpPr>
+          <p:cNvPr id="32" name="Rectangle 31"/>
+          <p:cNvSpPr/>
+          <p:nvPr/>
+        </p:nvSpPr>
+        <p:spPr>
+          <a:xfrm>
+            <a:off x="1143000" y="7600950"/>
+            <a:ext cx="38100" cy="323850"/>
+          </a:xfrm>
+          <a:prstGeom prst="rect">
+            <a:avLst/>
+          </a:prstGeom>
+          <a:solidFill>
+            <a:srgbClr val="C3E6D8"/>
+          </a:solidFill>
+          <a:ln>
+            <a:noFill/>
+          </a:ln>
+          <a:effectLst/>
+        </p:spPr>
+        <p:txBody>
+          <a:bodyPr rtlCol="0" anchor="ctr" wrap="square"/>
+          <a:lstStyle/>
+          <a:p>
+            <a:pPr algn="ctr"/>
+          </a:p>
+        </p:txBody>
+      </p:sp>
+      <p:sp>
+        <p:nvSpPr>
+          <p:cNvPr id="33" name="TextBox 32"/>
+          <p:cNvSpPr txBox="1"/>
+          <p:nvPr/>
+        </p:nvSpPr>
+        <p:spPr>
+          <a:xfrm>
+            <a:off x="1314450" y="7600950"/>
+            <a:ext cx="15830550" cy="342900"/>
+          </a:xfrm>
+          <a:prstGeom prst="rect">
+            <a:avLst/>
+          </a:prstGeom>
+          <a:noFill/>
+        </p:spPr>
+        <p:txBody>
+          <a:bodyPr wrap="square" lIns="0" rIns="0" tIns="0" bIns="0" anchor="t">
+            <a:spAutoFit/>
+          </a:bodyPr>
+          <a:lstStyle/>
+          <a:p>
+            <a:pPr algn="l">
+              <a:lnSpc>
+                <a:spcPct val="100000"/>
+              </a:lnSpc>
+            </a:pPr>
+            <a:r>
+              <a:rPr sz="1725" b="1">
+                <a:solidFill>
+                  <a:srgbClr val="5E6370"/>
+                </a:solidFill>
+                <a:latin typeface="Pretendard"/>
+                <a:ea typeface="Pretendard"/>
+                <a:cs typeface="Pretendard"/>
+              </a:rPr>
+              <a:t>메모장 · 한글 · 워드 파일에 붙여 두고, 한 줄은 패들릿 「2교시 강의 · 나누기」에 올립니다</a:t>
+            </a:r>
+          </a:p>
+        </p:txBody>
+      </p:sp>
+      <p:sp>
+        <p:nvSpPr>
+          <p:cNvPr id="34" name="Rectangle 33"/>
+          <p:cNvSpPr/>
+          <p:nvPr/>
+        </p:nvSpPr>
+        <p:spPr>
+          <a:xfrm>
+            <a:off x="1143000" y="8058150"/>
+            <a:ext cx="16002000" cy="9525"/>
+          </a:xfrm>
+          <a:prstGeom prst="rect">
+            <a:avLst/>
+          </a:prstGeom>
+          <a:solidFill>
+            <a:srgbClr val="D8E1EE"/>
+          </a:solidFill>
+          <a:ln>
+            <a:noFill/>
+          </a:ln>
+          <a:effectLst/>
+        </p:spPr>
+        <p:txBody>
+          <a:bodyPr rtlCol="0" anchor="ctr" wrap="square"/>
+          <a:lstStyle/>
+          <a:p>
+            <a:pPr algn="ctr"/>
+          </a:p>
+        </p:txBody>
+      </p:sp>
+      <p:sp>
+        <p:nvSpPr>
+          <p:cNvPr id="35" name="TextBox 34"/>
+          <p:cNvSpPr txBox="1"/>
+          <p:nvPr/>
+        </p:nvSpPr>
+        <p:spPr>
+          <a:xfrm>
+            <a:off x="1143000" y="8248650"/>
+            <a:ext cx="13335000" cy="323850"/>
+          </a:xfrm>
+          <a:prstGeom prst="rect">
+            <a:avLst/>
+          </a:prstGeom>
+          <a:noFill/>
+        </p:spPr>
+        <p:txBody>
+          <a:bodyPr wrap="square" lIns="0" rIns="0" tIns="0" bIns="0" anchor="t">
+            <a:spAutoFit/>
+          </a:bodyPr>
+          <a:lstStyle/>
+          <a:p>
+            <a:pPr algn="l">
+              <a:lnSpc>
+                <a:spcPct val="100000"/>
+              </a:lnSpc>
+            </a:pPr>
+            <a:r>
+              <a:rPr sz="1725" b="0">
+                <a:solidFill>
+                  <a:srgbClr val="5E6370"/>
+                </a:solidFill>
+                <a:latin typeface="Pretendard"/>
+                <a:ea typeface="Pretendard"/>
+                <a:cs typeface="Pretendard"/>
+              </a:rPr>
+              <a:t>경산 취업특강 · AI와 함께하는 취업준비 · 2교시</a:t>
+            </a:r>
+          </a:p>
+        </p:txBody>
+      </p:sp>
+      <p:sp>
+        <p:nvSpPr>
+          <p:cNvPr id="36" name="TextBox 35"/>
+          <p:cNvSpPr txBox="1"/>
+          <p:nvPr/>
+        </p:nvSpPr>
+        <p:spPr>
+          <a:xfrm>
+            <a:off x="15240000" y="8248650"/>
+            <a:ext cx="1905000" cy="323850"/>
+          </a:xfrm>
+          <a:prstGeom prst="rect">
+            <a:avLst/>
+          </a:prstGeom>
+          <a:noFill/>
+        </p:spPr>
+        <p:txBody>
+          <a:bodyPr wrap="square" lIns="0" rIns="0" tIns="0" bIns="0" anchor="t">
+            <a:spAutoFit/>
+          </a:bodyPr>
+          <a:lstStyle/>
+          <a:p>
+            <a:pPr algn="r">
+              <a:lnSpc>
+                <a:spcPct val="100000"/>
+              </a:lnSpc>
+            </a:pPr>
+            <a:r>
+              <a:rPr sz="1725" b="0">
+                <a:solidFill>
+                  <a:srgbClr val="5E6370"/>
+                </a:solidFill>
+                <a:latin typeface="Pretendard"/>
+                <a:ea typeface="Pretendard"/>
+                <a:cs typeface="Pretendard"/>
+              </a:rPr>
+              <a:t>16</a:t>
+            </a:r>
+          </a:p>
+        </p:txBody>
+      </p:sp>
+    </p:spTree>
+  </p:cSld>
+  <p:clrMapOvr>
+    <a:masterClrMapping/>
+  </p:clrMapOvr>
+</p:sld>
+</file>
+
+<file path=ppt/slides/slide17.xml><?xml version="1.0" encoding="utf-8"?>
+<p:sld xmlns:a="http://schemas.openxmlformats.org/drawingml/2006/main" xmlns:p="http://schemas.openxmlformats.org/presentationml/2006/main" xmlns:r="http://schemas.openxmlformats.org/officeDocument/2006/relationships">
+  <p:cSld>
+    <p:spTree>
+      <p:nvGrpSpPr>
+        <p:cNvPr id="1" name=""/>
+        <p:cNvGrpSpPr/>
+        <p:nvPr/>
+      </p:nvGrpSpPr>
+      <p:grpSpPr/>
+      <p:sp>
+        <p:nvSpPr>
+          <p:cNvPr id="2" name="deckgen:decor"/>
+          <p:cNvSpPr/>
+          <p:nvPr/>
+        </p:nvSpPr>
+        <p:spPr>
+          <a:xfrm>
+            <a:off x="15811500" y="8382000"/>
+            <a:ext cx="4953000" cy="4953000"/>
+          </a:xfrm>
+          <a:prstGeom prst="ellipse">
+            <a:avLst/>
+          </a:prstGeom>
+          <a:solidFill>
+            <a:srgbClr val="F3F8F6"/>
+          </a:solidFill>
+          <a:ln>
+            <a:noFill/>
+          </a:ln>
+          <a:effectLst/>
+        </p:spPr>
+        <p:txBody>
+          <a:bodyPr rtlCol="0" anchor="ctr" wrap="square"/>
+          <a:lstStyle/>
+          <a:p>
+            <a:pPr algn="ctr"/>
+          </a:p>
+        </p:txBody>
+      </p:sp>
+      <p:sp>
+        <p:nvSpPr>
+          <p:cNvPr id="3" name="deckgen:decor"/>
+          <p:cNvSpPr/>
+          <p:nvPr/>
+        </p:nvSpPr>
+        <p:spPr>
+          <a:xfrm>
+            <a:off x="16859250" y="9429750"/>
+            <a:ext cx="2857500" cy="2857500"/>
+          </a:xfrm>
+          <a:prstGeom prst="ellipse">
+            <a:avLst/>
+          </a:prstGeom>
+          <a:solidFill>
+            <a:srgbClr val="FFFFFF"/>
+          </a:solidFill>
+          <a:ln>
+            <a:noFill/>
+          </a:ln>
+          <a:effectLst/>
+        </p:spPr>
+        <p:txBody>
+          <a:bodyPr rtlCol="0" anchor="ctr" wrap="square"/>
+          <a:lstStyle/>
+          <a:p>
+            <a:pPr algn="ctr"/>
+          </a:p>
+        </p:txBody>
+      </p:sp>
+      <p:sp>
+        <p:nvSpPr>
+          <p:cNvPr id="4" name="deckgen:decor"/>
+          <p:cNvSpPr/>
+          <p:nvPr/>
+        </p:nvSpPr>
+        <p:spPr>
+          <a:xfrm>
+            <a:off x="-1428750" y="1428750"/>
+            <a:ext cx="2857500" cy="2857500"/>
+          </a:xfrm>
+          <a:prstGeom prst="ellipse">
+            <a:avLst/>
+          </a:prstGeom>
+          <a:solidFill>
+            <a:srgbClr val="F8F9FA"/>
+          </a:solidFill>
+          <a:ln>
+            <a:noFill/>
+          </a:ln>
+          <a:effectLst/>
+        </p:spPr>
+        <p:txBody>
+          <a:bodyPr rtlCol="0" anchor="ctr" wrap="square"/>
+          <a:lstStyle/>
+          <a:p>
+            <a:pPr algn="ctr"/>
+          </a:p>
+        </p:txBody>
+      </p:sp>
+      <p:sp>
+        <p:nvSpPr>
+          <p:cNvPr id="5" name="TextBox 4"/>
+          <p:cNvSpPr txBox="1"/>
+          <p:nvPr/>
+        </p:nvSpPr>
+        <p:spPr>
+          <a:xfrm>
+            <a:off x="1143000" y="838200"/>
+            <a:ext cx="16002000" cy="342900"/>
+          </a:xfrm>
+          <a:prstGeom prst="rect">
+            <a:avLst/>
+          </a:prstGeom>
+          <a:noFill/>
+        </p:spPr>
+        <p:txBody>
+          <a:bodyPr wrap="square" lIns="0" rIns="0" tIns="0" bIns="0" anchor="t">
+            <a:spAutoFit/>
+          </a:bodyPr>
+          <a:lstStyle/>
+          <a:p>
+            <a:pPr algn="l">
+              <a:lnSpc>
+                <a:spcPct val="100000"/>
+              </a:lnSpc>
+            </a:pPr>
+            <a:r>
+              <a:rPr sz="1950" b="1" spc="160">
+                <a:solidFill>
+                  <a:srgbClr val="1E7F5B"/>
+                </a:solidFill>
+                <a:latin typeface="Pretendard"/>
+                <a:ea typeface="Pretendard"/>
+                <a:cs typeface="Pretendard"/>
+              </a:rPr>
+              <a:t>결과 확인</a:t>
+            </a:r>
+          </a:p>
+        </p:txBody>
+      </p:sp>
+      <p:sp>
+        <p:nvSpPr>
+          <p:cNvPr id="6" name="TextBox 5"/>
+          <p:cNvSpPr txBox="1"/>
+          <p:nvPr/>
+        </p:nvSpPr>
+        <p:spPr>
+          <a:xfrm>
+            <a:off x="1143000" y="1162050"/>
+            <a:ext cx="16002000" cy="762000"/>
+          </a:xfrm>
+          <a:prstGeom prst="rect">
+            <a:avLst/>
+          </a:prstGeom>
+          <a:noFill/>
+        </p:spPr>
+        <p:txBody>
+          <a:bodyPr wrap="square" lIns="0" rIns="0" tIns="0" bIns="0" anchor="t">
+            <a:spAutoFit/>
+          </a:bodyPr>
+          <a:lstStyle/>
+          <a:p>
+            <a:pPr algn="l">
+              <a:lnSpc>
+                <a:spcPct val="100000"/>
+              </a:lnSpc>
+            </a:pPr>
+            <a:r>
+              <a:rPr sz="5100" b="1">
+                <a:solidFill>
+                  <a:srgbClr val="1E3E69"/>
+                </a:solidFill>
+                <a:latin typeface="Pretendard"/>
+                <a:ea typeface="Pretendard"/>
+                <a:cs typeface="Pretendard"/>
+              </a:rPr>
+              <a:t>이렇게 나왔으면 잘된 것입니다</a:t>
+            </a:r>
+          </a:p>
+        </p:txBody>
+      </p:sp>
+      <p:sp>
+        <p:nvSpPr>
+          <p:cNvPr id="7" name="Rectangle 6"/>
+          <p:cNvSpPr/>
+          <p:nvPr/>
+        </p:nvSpPr>
+        <p:spPr>
+          <a:xfrm>
+            <a:off x="1143000" y="2038350"/>
+            <a:ext cx="16002000" cy="28575"/>
+          </a:xfrm>
+          <a:prstGeom prst="rect">
+            <a:avLst/>
+          </a:prstGeom>
+          <a:solidFill>
+            <a:srgbClr val="1E3E69"/>
+          </a:solidFill>
+          <a:ln>
+            <a:noFill/>
+          </a:ln>
+          <a:effectLst/>
+        </p:spPr>
+        <p:txBody>
+          <a:bodyPr rtlCol="0" anchor="ctr" wrap="square"/>
+          <a:lstStyle/>
+          <a:p>
+            <a:pPr algn="ctr"/>
+          </a:p>
+        </p:txBody>
+      </p:sp>
+      <p:sp>
+        <p:nvSpPr>
+          <p:cNvPr id="8" name="Rounded Rectangle 7"/>
+          <p:cNvSpPr/>
+          <p:nvPr/>
+        </p:nvSpPr>
+        <p:spPr>
+          <a:xfrm>
+            <a:off x="1143000" y="2571750"/>
+            <a:ext cx="16002000" cy="937260"/>
+          </a:xfrm>
+          <a:prstGeom prst="roundRect">
+            <a:avLst>
+              <a:gd name="adj" fmla="val 6097"/>
+            </a:avLst>
+          </a:prstGeom>
+          <a:solidFill>
+            <a:srgbClr val="F4F7FA"/>
+          </a:solidFill>
+          <a:ln w="9525">
+            <a:solidFill>
+              <a:srgbClr val="D8E1EE"/>
+            </a:solidFill>
+          </a:ln>
+          <a:effectLst/>
+        </p:spPr>
+        <p:txBody>
+          <a:bodyPr rtlCol="0" anchor="ctr" wrap="square"/>
+          <a:lstStyle/>
+          <a:p>
+            <a:pPr algn="ctr"/>
+          </a:p>
+        </p:txBody>
+      </p:sp>
+      <p:sp>
+        <p:nvSpPr>
+          <p:cNvPr id="9" name="Rounded Rectangle 8"/>
+          <p:cNvSpPr/>
+          <p:nvPr/>
+        </p:nvSpPr>
+        <p:spPr>
+          <a:xfrm>
+            <a:off x="1466850" y="2840355"/>
+            <a:ext cx="400050" cy="400050"/>
+          </a:xfrm>
+          <a:prstGeom prst="roundRect">
+            <a:avLst>
+              <a:gd name="adj" fmla="val 14285"/>
+            </a:avLst>
+          </a:prstGeom>
+          <a:solidFill>
+            <a:srgbClr val="FFFFFF"/>
+          </a:solidFill>
+          <a:ln w="28575">
+            <a:solidFill>
+              <a:srgbClr val="1E3E69"/>
+            </a:solidFill>
+          </a:ln>
+          <a:effectLst/>
+        </p:spPr>
+        <p:txBody>
+          <a:bodyPr rtlCol="0" anchor="ctr" wrap="square"/>
+          <a:lstStyle/>
+          <a:p>
+            <a:pPr algn="ctr"/>
+          </a:p>
+        </p:txBody>
+      </p:sp>
+      <p:sp>
+        <p:nvSpPr>
+          <p:cNvPr id="10" name="TextBox 9"/>
+          <p:cNvSpPr txBox="1"/>
+          <p:nvPr/>
+        </p:nvSpPr>
+        <p:spPr>
+          <a:xfrm>
+            <a:off x="2133600" y="2667000"/>
+            <a:ext cx="14725650" cy="746760"/>
+          </a:xfrm>
+          <a:prstGeom prst="rect">
+            <a:avLst/>
+          </a:prstGeom>
+          <a:noFill/>
+        </p:spPr>
+        <p:txBody>
+          <a:bodyPr wrap="square" lIns="0" rIns="0" tIns="0" bIns="0" anchor="ctr">
+            <a:spAutoFit/>
+          </a:bodyPr>
+          <a:lstStyle/>
+          <a:p>
+            <a:pPr>
+              <a:lnSpc>
+                <a:spcPct val="120000"/>
+              </a:lnSpc>
+            </a:pPr>
+            <a:r>
+              <a:rPr sz="2400" b="1">
+                <a:solidFill>
+                  <a:srgbClr val="1E3E69"/>
+                </a:solidFill>
+                <a:latin typeface="Pretendard"/>
+                <a:ea typeface="Pretendard"/>
+                <a:cs typeface="Pretendard"/>
+              </a:rPr>
+              <a:t>역량마다 실제 공고의 근거 문장이 붙어 있다</a:t>
+            </a:r>
+          </a:p>
+        </p:txBody>
+      </p:sp>
+      <p:sp>
+        <p:nvSpPr>
+          <p:cNvPr id="11" name="Rounded Rectangle 10"/>
+          <p:cNvSpPr/>
+          <p:nvPr/>
+        </p:nvSpPr>
+        <p:spPr>
+          <a:xfrm>
+            <a:off x="1143000" y="3661410"/>
+            <a:ext cx="16002000" cy="937260"/>
+          </a:xfrm>
+          <a:prstGeom prst="roundRect">
+            <a:avLst>
+              <a:gd name="adj" fmla="val 6097"/>
+            </a:avLst>
+          </a:prstGeom>
+          <a:solidFill>
+            <a:srgbClr val="F4F7FA"/>
+          </a:solidFill>
+          <a:ln w="9525">
+            <a:solidFill>
+              <a:srgbClr val="D8E1EE"/>
+            </a:solidFill>
+          </a:ln>
+          <a:effectLst/>
+        </p:spPr>
+        <p:txBody>
+          <a:bodyPr rtlCol="0" anchor="ctr" wrap="square"/>
+          <a:lstStyle/>
+          <a:p>
+            <a:pPr algn="ctr"/>
+          </a:p>
+        </p:txBody>
+      </p:sp>
+      <p:sp>
+        <p:nvSpPr>
+          <p:cNvPr id="12" name="Rounded Rectangle 11"/>
+          <p:cNvSpPr/>
+          <p:nvPr/>
+        </p:nvSpPr>
+        <p:spPr>
+          <a:xfrm>
+            <a:off x="1466850" y="3930015"/>
+            <a:ext cx="400050" cy="400050"/>
+          </a:xfrm>
+          <a:prstGeom prst="roundRect">
+            <a:avLst>
+              <a:gd name="adj" fmla="val 14285"/>
+            </a:avLst>
+          </a:prstGeom>
+          <a:solidFill>
+            <a:srgbClr val="FFFFFF"/>
+          </a:solidFill>
+          <a:ln w="28575">
+            <a:solidFill>
+              <a:srgbClr val="1E3E69"/>
+            </a:solidFill>
+          </a:ln>
+          <a:effectLst/>
+        </p:spPr>
+        <p:txBody>
+          <a:bodyPr rtlCol="0" anchor="ctr" wrap="square"/>
+          <a:lstStyle/>
+          <a:p>
+            <a:pPr algn="ctr"/>
+          </a:p>
+        </p:txBody>
+      </p:sp>
+      <p:sp>
+        <p:nvSpPr>
+          <p:cNvPr id="13" name="TextBox 12"/>
+          <p:cNvSpPr txBox="1"/>
+          <p:nvPr/>
+        </p:nvSpPr>
+        <p:spPr>
+          <a:xfrm>
+            <a:off x="2133600" y="3756660"/>
+            <a:ext cx="14725650" cy="746760"/>
+          </a:xfrm>
+          <a:prstGeom prst="rect">
+            <a:avLst/>
+          </a:prstGeom>
+          <a:noFill/>
+        </p:spPr>
+        <p:txBody>
+          <a:bodyPr wrap="square" lIns="0" rIns="0" tIns="0" bIns="0" anchor="ctr">
+            <a:spAutoFit/>
+          </a:bodyPr>
+          <a:lstStyle/>
+          <a:p>
+            <a:pPr>
+              <a:lnSpc>
+                <a:spcPct val="120000"/>
+              </a:lnSpc>
+            </a:pPr>
+            <a:r>
+              <a:rPr sz="2400" b="1">
+                <a:solidFill>
+                  <a:srgbClr val="1E3E69"/>
+                </a:solidFill>
+                <a:latin typeface="Pretendard"/>
+                <a:ea typeface="Pretendard"/>
+                <a:cs typeface="Pretendard"/>
+              </a:rPr>
+              <a:t>공고에 없는 급여 · 복지 숫자가 끼어 있지 않다</a:t>
+            </a:r>
+          </a:p>
+        </p:txBody>
+      </p:sp>
+      <p:sp>
+        <p:nvSpPr>
+          <p:cNvPr id="14" name="Rounded Rectangle 13"/>
+          <p:cNvSpPr/>
+          <p:nvPr/>
+        </p:nvSpPr>
+        <p:spPr>
+          <a:xfrm>
+            <a:off x="1143000" y="4751070"/>
+            <a:ext cx="16002000" cy="937260"/>
+          </a:xfrm>
+          <a:prstGeom prst="roundRect">
+            <a:avLst>
+              <a:gd name="adj" fmla="val 6097"/>
+            </a:avLst>
+          </a:prstGeom>
+          <a:solidFill>
+            <a:srgbClr val="F4F7FA"/>
+          </a:solidFill>
+          <a:ln w="9525">
+            <a:solidFill>
+              <a:srgbClr val="D8E1EE"/>
+            </a:solidFill>
+          </a:ln>
+          <a:effectLst/>
+        </p:spPr>
+        <p:txBody>
+          <a:bodyPr rtlCol="0" anchor="ctr" wrap="square"/>
+          <a:lstStyle/>
+          <a:p>
+            <a:pPr algn="ctr"/>
+          </a:p>
+        </p:txBody>
+      </p:sp>
+      <p:sp>
+        <p:nvSpPr>
+          <p:cNvPr id="15" name="Rounded Rectangle 14"/>
+          <p:cNvSpPr/>
+          <p:nvPr/>
+        </p:nvSpPr>
+        <p:spPr>
+          <a:xfrm>
+            <a:off x="1466850" y="5019675"/>
+            <a:ext cx="400050" cy="400050"/>
+          </a:xfrm>
+          <a:prstGeom prst="roundRect">
+            <a:avLst>
+              <a:gd name="adj" fmla="val 14285"/>
+            </a:avLst>
+          </a:prstGeom>
+          <a:solidFill>
+            <a:srgbClr val="FFFFFF"/>
+          </a:solidFill>
+          <a:ln w="28575">
+            <a:solidFill>
+              <a:srgbClr val="1E3E69"/>
+            </a:solidFill>
+          </a:ln>
+          <a:effectLst/>
+        </p:spPr>
+        <p:txBody>
+          <a:bodyPr rtlCol="0" anchor="ctr" wrap="square"/>
+          <a:lstStyle/>
+          <a:p>
+            <a:pPr algn="ctr"/>
+          </a:p>
+        </p:txBody>
+      </p:sp>
+      <p:sp>
+        <p:nvSpPr>
+          <p:cNvPr id="16" name="TextBox 15"/>
+          <p:cNvSpPr txBox="1"/>
+          <p:nvPr/>
+        </p:nvSpPr>
+        <p:spPr>
+          <a:xfrm>
+            <a:off x="2133600" y="4846320"/>
+            <a:ext cx="14725650" cy="746760"/>
+          </a:xfrm>
+          <a:prstGeom prst="rect">
+            <a:avLst/>
+          </a:prstGeom>
+          <a:noFill/>
+        </p:spPr>
+        <p:txBody>
+          <a:bodyPr wrap="square" lIns="0" rIns="0" tIns="0" bIns="0" anchor="ctr">
+            <a:spAutoFit/>
+          </a:bodyPr>
+          <a:lstStyle/>
+          <a:p>
+            <a:pPr>
+              <a:lnSpc>
+                <a:spcPct val="120000"/>
+              </a:lnSpc>
+            </a:pPr>
+            <a:r>
+              <a:rPr sz="2400" b="1">
+                <a:solidFill>
+                  <a:srgbClr val="1E3E69"/>
+                </a:solidFill>
+                <a:latin typeface="Pretendard"/>
+                <a:ea typeface="Pretendard"/>
+                <a:cs typeface="Pretendard"/>
+              </a:rPr>
+              <a:t>키워드 5개가 공고에 실제로 나오는 낱말이다</a:t>
+            </a:r>
+          </a:p>
+        </p:txBody>
+      </p:sp>
+      <p:sp>
+        <p:nvSpPr>
+          <p:cNvPr id="17" name="Rounded Rectangle 16"/>
+          <p:cNvSpPr/>
+          <p:nvPr/>
+        </p:nvSpPr>
+        <p:spPr>
+          <a:xfrm>
+            <a:off x="1143000" y="5840730"/>
+            <a:ext cx="16002000" cy="937260"/>
+          </a:xfrm>
+          <a:prstGeom prst="roundRect">
+            <a:avLst>
+              <a:gd name="adj" fmla="val 6097"/>
+            </a:avLst>
+          </a:prstGeom>
+          <a:solidFill>
+            <a:srgbClr val="F4F7FA"/>
+          </a:solidFill>
+          <a:ln w="9525">
+            <a:solidFill>
+              <a:srgbClr val="D8E1EE"/>
+            </a:solidFill>
+          </a:ln>
+          <a:effectLst/>
+        </p:spPr>
+        <p:txBody>
+          <a:bodyPr rtlCol="0" anchor="ctr" wrap="square"/>
+          <a:lstStyle/>
+          <a:p>
+            <a:pPr algn="ctr"/>
+          </a:p>
+        </p:txBody>
+      </p:sp>
+      <p:sp>
+        <p:nvSpPr>
+          <p:cNvPr id="18" name="Rounded Rectangle 17"/>
+          <p:cNvSpPr/>
+          <p:nvPr/>
+        </p:nvSpPr>
+        <p:spPr>
+          <a:xfrm>
+            <a:off x="1466850" y="6109335"/>
+            <a:ext cx="400050" cy="400050"/>
+          </a:xfrm>
+          <a:prstGeom prst="roundRect">
+            <a:avLst>
+              <a:gd name="adj" fmla="val 14285"/>
+            </a:avLst>
+          </a:prstGeom>
+          <a:solidFill>
+            <a:srgbClr val="FFFFFF"/>
+          </a:solidFill>
+          <a:ln w="28575">
+            <a:solidFill>
+              <a:srgbClr val="1E3E69"/>
+            </a:solidFill>
+          </a:ln>
+          <a:effectLst/>
+        </p:spPr>
+        <p:txBody>
+          <a:bodyPr rtlCol="0" anchor="ctr" wrap="square"/>
+          <a:lstStyle/>
+          <a:p>
+            <a:pPr algn="ctr"/>
+          </a:p>
+        </p:txBody>
+      </p:sp>
+      <p:sp>
+        <p:nvSpPr>
+          <p:cNvPr id="19" name="TextBox 18"/>
+          <p:cNvSpPr txBox="1"/>
+          <p:nvPr/>
+        </p:nvSpPr>
+        <p:spPr>
+          <a:xfrm>
+            <a:off x="2133600" y="5935980"/>
+            <a:ext cx="14725650" cy="746760"/>
+          </a:xfrm>
+          <a:prstGeom prst="rect">
+            <a:avLst/>
+          </a:prstGeom>
+          <a:noFill/>
+        </p:spPr>
+        <p:txBody>
+          <a:bodyPr wrap="square" lIns="0" rIns="0" tIns="0" bIns="0" anchor="ctr">
+            <a:spAutoFit/>
+          </a:bodyPr>
+          <a:lstStyle/>
+          <a:p>
+            <a:pPr>
+              <a:lnSpc>
+                <a:spcPct val="120000"/>
+              </a:lnSpc>
+            </a:pPr>
+            <a:r>
+              <a:rPr sz="2400" b="1">
+                <a:solidFill>
+                  <a:srgbClr val="1E3E69"/>
+                </a:solidFill>
+                <a:latin typeface="Pretendard"/>
+                <a:ea typeface="Pretendard"/>
+                <a:cs typeface="Pretendard"/>
+              </a:rPr>
+              <a:t>흥미 유형과의 연결이 내 결과지와 맞는다</a:t>
+            </a:r>
+          </a:p>
+        </p:txBody>
+      </p:sp>
+      <p:sp>
+        <p:nvSpPr>
+          <p:cNvPr id="20" name="Rounded Rectangle 19"/>
+          <p:cNvSpPr/>
+          <p:nvPr/>
+        </p:nvSpPr>
+        <p:spPr>
+          <a:xfrm>
+            <a:off x="1143000" y="6930390"/>
+            <a:ext cx="16002000" cy="937260"/>
+          </a:xfrm>
+          <a:prstGeom prst="roundRect">
+            <a:avLst>
+              <a:gd name="adj" fmla="val 6097"/>
+            </a:avLst>
+          </a:prstGeom>
+          <a:solidFill>
+            <a:srgbClr val="F4F7FA"/>
+          </a:solidFill>
+          <a:ln w="9525">
+            <a:solidFill>
+              <a:srgbClr val="D8E1EE"/>
+            </a:solidFill>
+          </a:ln>
+          <a:effectLst/>
+        </p:spPr>
+        <p:txBody>
+          <a:bodyPr rtlCol="0" anchor="ctr" wrap="square"/>
+          <a:lstStyle/>
+          <a:p>
+            <a:pPr algn="ctr"/>
+          </a:p>
+        </p:txBody>
+      </p:sp>
+      <p:sp>
+        <p:nvSpPr>
+          <p:cNvPr id="21" name="Rounded Rectangle 20"/>
+          <p:cNvSpPr/>
+          <p:nvPr/>
+        </p:nvSpPr>
+        <p:spPr>
+          <a:xfrm>
+            <a:off x="1466850" y="7198995"/>
+            <a:ext cx="400050" cy="400050"/>
+          </a:xfrm>
+          <a:prstGeom prst="roundRect">
+            <a:avLst>
+              <a:gd name="adj" fmla="val 14285"/>
+            </a:avLst>
+          </a:prstGeom>
+          <a:solidFill>
+            <a:srgbClr val="FFFFFF"/>
+          </a:solidFill>
+          <a:ln w="28575">
+            <a:solidFill>
+              <a:srgbClr val="1E3E69"/>
+            </a:solidFill>
+          </a:ln>
+          <a:effectLst/>
+        </p:spPr>
+        <p:txBody>
+          <a:bodyPr rtlCol="0" anchor="ctr" wrap="square"/>
+          <a:lstStyle/>
+          <a:p>
+            <a:pPr algn="ctr"/>
+          </a:p>
+        </p:txBody>
+      </p:sp>
+      <p:sp>
+        <p:nvSpPr>
+          <p:cNvPr id="22" name="TextBox 21"/>
+          <p:cNvSpPr txBox="1"/>
+          <p:nvPr/>
+        </p:nvSpPr>
+        <p:spPr>
+          <a:xfrm>
+            <a:off x="2133600" y="7025640"/>
+            <a:ext cx="14725650" cy="746760"/>
+          </a:xfrm>
+          <a:prstGeom prst="rect">
+            <a:avLst/>
+          </a:prstGeom>
+          <a:noFill/>
+        </p:spPr>
+        <p:txBody>
+          <a:bodyPr wrap="square" lIns="0" rIns="0" tIns="0" bIns="0" anchor="ctr">
+            <a:spAutoFit/>
+          </a:bodyPr>
+          <a:lstStyle/>
+          <a:p>
+            <a:pPr>
+              <a:lnSpc>
+                <a:spcPct val="120000"/>
+              </a:lnSpc>
+            </a:pPr>
+            <a:r>
+              <a:rPr sz="2400" b="1">
+                <a:solidFill>
+                  <a:srgbClr val="1E3E69"/>
+                </a:solidFill>
+                <a:latin typeface="Pretendard"/>
+                <a:ea typeface="Pretendard"/>
+                <a:cs typeface="Pretendard"/>
+              </a:rPr>
+              <a:t>개인정보를 넣지 않았다</a:t>
+            </a:r>
+          </a:p>
+        </p:txBody>
+      </p:sp>
+      <p:sp>
+        <p:nvSpPr>
+          <p:cNvPr id="23" name="Rectangle 22"/>
+          <p:cNvSpPr/>
+          <p:nvPr/>
+        </p:nvSpPr>
+        <p:spPr>
+          <a:xfrm>
+            <a:off x="1143000" y="8058150"/>
+            <a:ext cx="16002000" cy="9525"/>
+          </a:xfrm>
+          <a:prstGeom prst="rect">
+            <a:avLst/>
+          </a:prstGeom>
+          <a:solidFill>
+            <a:srgbClr val="D8E1EE"/>
+          </a:solidFill>
+          <a:ln>
+            <a:noFill/>
+          </a:ln>
+          <a:effectLst/>
+        </p:spPr>
+        <p:txBody>
+          <a:bodyPr rtlCol="0" anchor="ctr" wrap="square"/>
+          <a:lstStyle/>
+          <a:p>
+            <a:pPr algn="ctr"/>
+          </a:p>
+        </p:txBody>
+      </p:sp>
+      <p:sp>
+        <p:nvSpPr>
+          <p:cNvPr id="24" name="TextBox 23"/>
+          <p:cNvSpPr txBox="1"/>
+          <p:nvPr/>
+        </p:nvSpPr>
+        <p:spPr>
+          <a:xfrm>
+            <a:off x="1143000" y="8248650"/>
+            <a:ext cx="13335000" cy="323850"/>
+          </a:xfrm>
+          <a:prstGeom prst="rect">
+            <a:avLst/>
+          </a:prstGeom>
+          <a:noFill/>
+        </p:spPr>
+        <p:txBody>
+          <a:bodyPr wrap="square" lIns="0" rIns="0" tIns="0" bIns="0" anchor="t">
+            <a:spAutoFit/>
+          </a:bodyPr>
+          <a:lstStyle/>
+          <a:p>
+            <a:pPr algn="l">
+              <a:lnSpc>
+                <a:spcPct val="100000"/>
+              </a:lnSpc>
+            </a:pPr>
+            <a:r>
+              <a:rPr sz="1725" b="0">
+                <a:solidFill>
+                  <a:srgbClr val="5E6370"/>
+                </a:solidFill>
+                <a:latin typeface="Pretendard"/>
+                <a:ea typeface="Pretendard"/>
+                <a:cs typeface="Pretendard"/>
+              </a:rPr>
+              <a:t>경산 취업특강 · AI와 함께하는 취업준비 · 2교시</a:t>
+            </a:r>
+          </a:p>
+        </p:txBody>
+      </p:sp>
+      <p:sp>
+        <p:nvSpPr>
+          <p:cNvPr id="25" name="TextBox 24"/>
+          <p:cNvSpPr txBox="1"/>
+          <p:nvPr/>
+        </p:nvSpPr>
+        <p:spPr>
+          <a:xfrm>
+            <a:off x="15240000" y="8248650"/>
+            <a:ext cx="1905000" cy="323850"/>
+          </a:xfrm>
+          <a:prstGeom prst="rect">
+            <a:avLst/>
+          </a:prstGeom>
+          <a:noFill/>
+        </p:spPr>
+        <p:txBody>
+          <a:bodyPr wrap="square" lIns="0" rIns="0" tIns="0" bIns="0" anchor="t">
+            <a:spAutoFit/>
+          </a:bodyPr>
+          <a:lstStyle/>
+          <a:p>
+            <a:pPr algn="r">
+              <a:lnSpc>
+                <a:spcPct val="100000"/>
+              </a:lnSpc>
+            </a:pPr>
+            <a:r>
+              <a:rPr sz="1725" b="0">
+                <a:solidFill>
+                  <a:srgbClr val="5E6370"/>
+                </a:solidFill>
+                <a:latin typeface="Pretendard"/>
+                <a:ea typeface="Pretendard"/>
+                <a:cs typeface="Pretendard"/>
+              </a:rPr>
+              <a:t>17</a:t>
+            </a:r>
+          </a:p>
+        </p:txBody>
+      </p:sp>
+    </p:spTree>
+  </p:cSld>
+  <p:clrMapOvr>
+    <a:masterClrMapping/>
+  </p:clrMapOvr>
+</p:sld>
+</file>
+
+<file path=ppt/slides/slide18.xml><?xml version="1.0" encoding="utf-8"?>
 <p:sld xmlns:a="http://schemas.openxmlformats.org/drawingml/2006/main" xmlns:p="http://schemas.openxmlformats.org/presentationml/2006/main" xmlns:r="http://schemas.openxmlformats.org/officeDocument/2006/relationships">
   <p:cSld>
     <p:spTree>

--- a/gyeongsan/GSJOB2_2교시_강의_AI기초_직무분석.pptx
+++ b/gyeongsan/GSJOB2_2교시_강의_AI기초_직무분석.pptx
@@ -5205,7 +5205,7 @@
                 <a:ea typeface="Pretendard"/>
                 <a:cs typeface="Pretendard"/>
               </a:rPr>
-              <a:t>(가상) 대경로지스 — 물류관리 사무원</a:t>
+              <a:t>(가상) 대경로지스 — 물류관리 사무원(신입 · 경력)</a:t>
             </a:r>
           </a:p>
         </p:txBody>
@@ -5677,7 +5677,7 @@
                 <a:ea typeface="Pretendard"/>
                 <a:cs typeface="Pretendard"/>
               </a:rPr>
-              <a:t>컴퓨터 활용 가능(엑셀) / 원활한 의사소통</a:t>
+              <a:t>대학 졸업 또는 졸업예정자 / 컴퓨터 활용 가능(엑셀) / 원활한 의사소통</a:t>
             </a:r>
           </a:p>
         </p:txBody>
@@ -5827,7 +5827,7 @@
                 <a:ea typeface="Pretendard"/>
                 <a:cs typeface="Pretendard"/>
               </a:rPr>
-              <a:t>물류 · 영업관리 경력자 / 거래처 관리 경험 / 운전면허 소지자</a:t>
+              <a:t>물류 · 유통 · 경영 관련 전공 / 물류 현장 아르바이트 · 실습 경험 / 엑셀 활용 우수자 / 운전면허</a:t>
             </a:r>
           </a:p>
         </p:txBody>
@@ -8004,7 +8004,7 @@
                 <a:ea typeface="Pretendard"/>
                 <a:cs typeface="Pretendard"/>
               </a:rPr>
-              <a:t>시연 결과 예시 · 최정우(가명, 52)</a:t>
+              <a:t>시연 결과 예시 · 김서연(가명, 24)</a:t>
             </a:r>
           </a:p>
         </p:txBody>
@@ -8045,7 +8045,7 @@
                 <a:ea typeface="Pretendard"/>
                 <a:cs typeface="Pretendard"/>
               </a:rPr>
-              <a:t>섬유회사 영업관리 22년 → 물류관리 사무원</a:t>
+              <a:t>경영학과 졸업예정 → 물류관리 사무원(신입)</a:t>
             </a:r>
           </a:p>
         </p:txBody>
@@ -8363,7 +8363,7 @@
                 <a:ea typeface="Pretendard"/>
                 <a:cs typeface="Pretendard"/>
               </a:rPr>
-              <a:t>일정 조율력</a:t>
+              <a:t>일정 · 수량 관리</a:t>
             </a:r>
           </a:p>
         </p:txBody>
@@ -8438,7 +8438,7 @@
                 <a:ea typeface="Pretendard"/>
                 <a:cs typeface="Pretendard"/>
               </a:rPr>
-              <a:t>입고 · 출고 일정 관리 / 배차 조율</a:t>
+              <a:t>입고 · 출고 일정 관리 / 재고 현황 점검</a:t>
             </a:r>
           </a:p>
         </p:txBody>
@@ -8513,7 +8513,7 @@
                 <a:ea typeface="Pretendard"/>
                 <a:cs typeface="Pretendard"/>
               </a:rPr>
-              <a:t>22년 납기 일정 조율 경험을 사례 하나로</a:t>
+              <a:t>물류센터 입고 검수 경험을 사례 하나로</a:t>
             </a:r>
           </a:p>
         </p:txBody>
@@ -8588,7 +8588,7 @@
                 <a:ea typeface="Pretendard"/>
                 <a:cs typeface="Pretendard"/>
               </a:rPr>
-              <a:t>재고 · 전산 관리</a:t>
+              <a:t>엑셀 · 전산 활용</a:t>
             </a:r>
           </a:p>
         </p:txBody>
@@ -8663,7 +8663,7 @@
                 <a:ea typeface="Pretendard"/>
                 <a:cs typeface="Pretendard"/>
               </a:rPr>
-              <a:t>재고 현황 점검 · 월간 보고 / 전산 입력</a:t>
+              <a:t>전산 입력 · 월간 보고 / 우대: 엑셀 활용</a:t>
             </a:r>
           </a:p>
         </p:txBody>
@@ -8738,7 +8738,7 @@
                 <a:ea typeface="Pretendard"/>
                 <a:cs typeface="Pretendard"/>
               </a:rPr>
-              <a:t>엑셀 활용 수준 — 확인 필요</a:t>
+              <a:t>학생회 예산 엑셀 정리 — 수준은 확인 필요</a:t>
             </a:r>
           </a:p>
         </p:txBody>
@@ -8813,7 +8813,7 @@
                 <a:ea typeface="Pretendard"/>
                 <a:cs typeface="Pretendard"/>
               </a:rPr>
-              <a:t>거래처 소통</a:t>
+              <a:t>전공 연결</a:t>
             </a:r>
           </a:p>
         </p:txBody>
@@ -8888,7 +8888,7 @@
                 <a:ea typeface="Pretendard"/>
                 <a:cs typeface="Pretendard"/>
               </a:rPr>
-              <a:t>거래처 주문 확인 · 우대: 거래처 관리 경험</a:t>
+              <a:t>우대: 물류 · 유통 · 경영 전공</a:t>
             </a:r>
           </a:p>
         </p:txBody>
@@ -8963,7 +8963,7 @@
                 <a:ea typeface="Pretendard"/>
                 <a:cs typeface="Pretendard"/>
               </a:rPr>
-              <a:t>거래처 40여 곳 관리 · 클레임 처리</a:t>
+              <a:t>유통관리 · 생산운영관리 수강, 재고 회전 과제</a:t>
             </a:r>
           </a:p>
         </p:txBody>

--- a/gyeongsan/GSJOB2_2교시_강의_AI기초_직무분석.pptx
+++ b/gyeongsan/GSJOB2_2교시_강의_AI기초_직무분석.pptx
@@ -3120,7 +3120,7 @@
             <a:avLst/>
           </a:prstGeom>
           <a:solidFill>
-            <a:srgbClr val="F1F7F5"/>
+            <a:srgbClr val="F2F5F9"/>
           </a:solidFill>
           <a:ln>
             <a:noFill/>
@@ -3240,7 +3240,7 @@
             <a:avLst/>
           </a:prstGeom>
           <a:solidFill>
-            <a:srgbClr val="EEF5F2"/>
+            <a:srgbClr val="EFF3F8"/>
           </a:solidFill>
           <a:ln>
             <a:noFill/>
@@ -3330,7 +3330,7 @@
             <a:avLst/>
           </a:prstGeom>
           <a:solidFill>
-            <a:srgbClr val="E1EEE9"/>
+            <a:srgbClr val="E3EAF3"/>
           </a:solidFill>
           <a:ln>
             <a:noFill/>
@@ -3435,7 +3435,7 @@
             <a:r>
               <a:rPr sz="2400" b="1" spc="120">
                 <a:solidFill>
-                  <a:srgbClr val="1E7F5B"/>
+                  <a:srgbClr val="2B5FA8"/>
                 </a:solidFill>
                 <a:latin typeface="Pretendard"/>
                 <a:ea typeface="Pretendard"/>
@@ -3638,7 +3638,7 @@
             <a:avLst/>
           </a:prstGeom>
           <a:solidFill>
-            <a:srgbClr val="F3F8F6"/>
+            <a:srgbClr val="F4F7FA"/>
           </a:solidFill>
           <a:ln>
             <a:noFill/>
@@ -3743,7 +3743,7 @@
             <a:r>
               <a:rPr sz="2400" b="1">
                 <a:solidFill>
-                  <a:srgbClr val="1E7F5B"/>
+                  <a:srgbClr val="2B5FA8"/>
                 </a:solidFill>
                 <a:latin typeface="Pretendard"/>
                 <a:ea typeface="Pretendard"/>
@@ -3981,7 +3981,7 @@
             <a:avLst/>
           </a:prstGeom>
           <a:solidFill>
-            <a:srgbClr val="F3F8F6"/>
+            <a:srgbClr val="F4F7FA"/>
           </a:solidFill>
           <a:ln>
             <a:noFill/>
@@ -4086,7 +4086,7 @@
             <a:r>
               <a:rPr sz="1950" b="1" spc="160">
                 <a:solidFill>
-                  <a:srgbClr val="1E7F5B"/>
+                  <a:srgbClr val="2B5FA8"/>
                 </a:solidFill>
                 <a:latin typeface="Pretendard"/>
                 <a:ea typeface="Pretendard"/>
@@ -4217,7 +4217,7 @@
             <a:avLst/>
           </a:prstGeom>
           <a:solidFill>
-            <a:srgbClr val="1E7F5B"/>
+            <a:srgbClr val="2B5FA8"/>
           </a:solidFill>
           <a:ln>
             <a:noFill/>
@@ -4402,7 +4402,7 @@
             <a:avLst/>
           </a:prstGeom>
           <a:solidFill>
-            <a:srgbClr val="1E7F5B"/>
+            <a:srgbClr val="2B5FA8"/>
           </a:solidFill>
           <a:ln>
             <a:noFill/>
@@ -4587,7 +4587,7 @@
             <a:avLst/>
           </a:prstGeom>
           <a:solidFill>
-            <a:srgbClr val="1E7F5B"/>
+            <a:srgbClr val="2B5FA8"/>
           </a:solidFill>
           <a:ln>
             <a:noFill/>
@@ -4772,7 +4772,7 @@
             <a:avLst/>
           </a:prstGeom>
           <a:solidFill>
-            <a:srgbClr val="1E7F5B"/>
+            <a:srgbClr val="2B5FA8"/>
           </a:solidFill>
           <a:ln>
             <a:noFill/>
@@ -5053,7 +5053,7 @@
             <a:avLst/>
           </a:prstGeom>
           <a:solidFill>
-            <a:srgbClr val="F3F8F6"/>
+            <a:srgbClr val="F4F7FA"/>
           </a:solidFill>
           <a:ln>
             <a:noFill/>
@@ -5158,7 +5158,7 @@
             <a:r>
               <a:rPr sz="1950" b="1" spc="160">
                 <a:solidFill>
-                  <a:srgbClr val="1E7F5B"/>
+                  <a:srgbClr val="2B5FA8"/>
                 </a:solidFill>
                 <a:latin typeface="Pretendard"/>
                 <a:ea typeface="Pretendard"/>
@@ -5326,7 +5326,7 @@
             <a:avLst/>
           </a:prstGeom>
           <a:solidFill>
-            <a:srgbClr val="1E7F5B"/>
+            <a:srgbClr val="2B5FA8"/>
           </a:solidFill>
           <a:ln>
             <a:noFill/>
@@ -5399,11 +5399,11 @@
             </a:avLst>
           </a:prstGeom>
           <a:solidFill>
-            <a:srgbClr val="E6F4EE"/>
+            <a:srgbClr val="EAF0F8"/>
           </a:solidFill>
           <a:ln w="9525">
             <a:solidFill>
-              <a:srgbClr val="C3E6D8"/>
+              <a:srgbClr val="C9DAF2"/>
             </a:solidFill>
           </a:ln>
           <a:effectLst/>
@@ -5549,11 +5549,11 @@
             </a:avLst>
           </a:prstGeom>
           <a:solidFill>
-            <a:srgbClr val="E6F4EE"/>
+            <a:srgbClr val="EAF0F8"/>
           </a:solidFill>
           <a:ln w="9525">
             <a:solidFill>
-              <a:srgbClr val="C3E6D8"/>
+              <a:srgbClr val="C9DAF2"/>
             </a:solidFill>
           </a:ln>
           <a:effectLst/>
@@ -5699,11 +5699,11 @@
             </a:avLst>
           </a:prstGeom>
           <a:solidFill>
-            <a:srgbClr val="E6F4EE"/>
+            <a:srgbClr val="EAF0F8"/>
           </a:solidFill>
           <a:ln w="9525">
             <a:solidFill>
-              <a:srgbClr val="C3E6D8"/>
+              <a:srgbClr val="C9DAF2"/>
             </a:solidFill>
           </a:ln>
           <a:effectLst/>
@@ -5849,11 +5849,11 @@
             </a:avLst>
           </a:prstGeom>
           <a:solidFill>
-            <a:srgbClr val="E6F4EE"/>
+            <a:srgbClr val="EAF0F8"/>
           </a:solidFill>
           <a:ln w="9525">
             <a:solidFill>
-              <a:srgbClr val="C3E6D8"/>
+              <a:srgbClr val="C9DAF2"/>
             </a:solidFill>
           </a:ln>
           <a:effectLst/>
@@ -6168,7 +6168,7 @@
             <a:avLst/>
           </a:prstGeom>
           <a:solidFill>
-            <a:srgbClr val="F3F8F6"/>
+            <a:srgbClr val="F4F7FA"/>
           </a:solidFill>
           <a:ln>
             <a:noFill/>
@@ -6273,7 +6273,7 @@
             <a:r>
               <a:rPr sz="1950" b="1" spc="160">
                 <a:solidFill>
-                  <a:srgbClr val="1E7F5B"/>
+                  <a:srgbClr val="2B5FA8"/>
                 </a:solidFill>
                 <a:latin typeface="Pretendard"/>
                 <a:ea typeface="Pretendard"/>
@@ -6956,11 +6956,11 @@
             </a:avLst>
           </a:prstGeom>
           <a:solidFill>
-            <a:srgbClr val="E6F4EE"/>
+            <a:srgbClr val="EAF0F8"/>
           </a:solidFill>
           <a:ln w="9525">
             <a:solidFill>
-              <a:srgbClr val="C3E6D8"/>
+              <a:srgbClr val="C9DAF2"/>
             </a:solidFill>
           </a:ln>
           <a:effectLst/>
@@ -7159,7 +7159,7 @@
             <a:avLst/>
           </a:prstGeom>
           <a:solidFill>
-            <a:srgbClr val="F3F8F6"/>
+            <a:srgbClr val="F4F7FA"/>
           </a:solidFill>
           <a:ln>
             <a:noFill/>
@@ -7251,7 +7251,7 @@
             </a:avLst>
           </a:prstGeom>
           <a:solidFill>
-            <a:srgbClr val="1E7F5B"/>
+            <a:srgbClr val="2B5FA8"/>
           </a:solidFill>
           <a:ln>
             <a:noFill/>
@@ -7367,7 +7367,7 @@
             <a:r>
               <a:rPr sz="1950" b="1" spc="160">
                 <a:solidFill>
-                  <a:srgbClr val="1E7F5B"/>
+                  <a:srgbClr val="2B5FA8"/>
                 </a:solidFill>
                 <a:latin typeface="Pretendard"/>
                 <a:ea typeface="Pretendard"/>
@@ -7479,7 +7479,7 @@
             <a:r>
               <a:rPr sz="2250" b="1">
                 <a:solidFill>
-                  <a:srgbClr val="1E7F5B"/>
+                  <a:srgbClr val="2B5FA8"/>
                 </a:solidFill>
                 <a:latin typeface="Pretendard"/>
                 <a:ea typeface="Pretendard"/>
@@ -7651,7 +7651,7 @@
             <a:avLst/>
           </a:prstGeom>
           <a:solidFill>
-            <a:srgbClr val="1E7F5B"/>
+            <a:srgbClr val="2B5FA8"/>
           </a:solidFill>
           <a:ln>
             <a:noFill/>
@@ -7696,7 +7696,7 @@
             <a:r>
               <a:rPr sz="1875" b="1" spc="150">
                 <a:solidFill>
-                  <a:srgbClr val="1E7F5B"/>
+                  <a:srgbClr val="2B5FA8"/>
                 </a:solidFill>
                 <a:latin typeface="Pretendard"/>
                 <a:ea typeface="Pretendard"/>
@@ -7893,7 +7893,7 @@
             <a:avLst/>
           </a:prstGeom>
           <a:solidFill>
-            <a:srgbClr val="F3F8F6"/>
+            <a:srgbClr val="F4F7FA"/>
           </a:solidFill>
           <a:ln>
             <a:noFill/>
@@ -7998,7 +7998,7 @@
             <a:r>
               <a:rPr sz="1950" b="1" spc="160">
                 <a:solidFill>
-                  <a:srgbClr val="1E7F5B"/>
+                  <a:srgbClr val="2B5FA8"/>
                 </a:solidFill>
                 <a:latin typeface="Pretendard"/>
                 <a:ea typeface="Pretendard"/>
@@ -8166,7 +8166,7 @@
             <a:avLst/>
           </a:prstGeom>
           <a:solidFill>
-            <a:srgbClr val="1E7F5B"/>
+            <a:srgbClr val="2B5FA8"/>
           </a:solidFill>
           <a:ln>
             <a:noFill/>
@@ -8237,7 +8237,7 @@
             <a:avLst/>
           </a:prstGeom>
           <a:solidFill>
-            <a:srgbClr val="1E7F5B"/>
+            <a:srgbClr val="2B5FA8"/>
           </a:solidFill>
           <a:ln>
             <a:noFill/>
@@ -8310,11 +8310,11 @@
             </a:avLst>
           </a:prstGeom>
           <a:solidFill>
-            <a:srgbClr val="E6F4EE"/>
+            <a:srgbClr val="EAF0F8"/>
           </a:solidFill>
           <a:ln w="9525">
             <a:solidFill>
-              <a:srgbClr val="C3E6D8"/>
+              <a:srgbClr val="C9DAF2"/>
             </a:solidFill>
           </a:ln>
           <a:effectLst/>
@@ -8535,11 +8535,11 @@
             </a:avLst>
           </a:prstGeom>
           <a:solidFill>
-            <a:srgbClr val="E6F4EE"/>
+            <a:srgbClr val="EAF0F8"/>
           </a:solidFill>
           <a:ln w="9525">
             <a:solidFill>
-              <a:srgbClr val="C3E6D8"/>
+              <a:srgbClr val="C9DAF2"/>
             </a:solidFill>
           </a:ln>
           <a:effectLst/>
@@ -8760,11 +8760,11 @@
             </a:avLst>
           </a:prstGeom>
           <a:solidFill>
-            <a:srgbClr val="E6F4EE"/>
+            <a:srgbClr val="EAF0F8"/>
           </a:solidFill>
           <a:ln w="9525">
             <a:solidFill>
-              <a:srgbClr val="C3E6D8"/>
+              <a:srgbClr val="C9DAF2"/>
             </a:solidFill>
           </a:ln>
           <a:effectLst/>
@@ -9154,7 +9154,7 @@
             <a:avLst/>
           </a:prstGeom>
           <a:solidFill>
-            <a:srgbClr val="F3F8F6"/>
+            <a:srgbClr val="F4F7FA"/>
           </a:solidFill>
           <a:ln>
             <a:noFill/>
@@ -9246,7 +9246,7 @@
             </a:avLst>
           </a:prstGeom>
           <a:solidFill>
-            <a:srgbClr val="1E7F5B"/>
+            <a:srgbClr val="2B5FA8"/>
           </a:solidFill>
           <a:ln>
             <a:noFill/>
@@ -9362,7 +9362,7 @@
             <a:r>
               <a:rPr sz="1950" b="1" spc="160">
                 <a:solidFill>
-                  <a:srgbClr val="1E7F5B"/>
+                  <a:srgbClr val="2B5FA8"/>
                 </a:solidFill>
                 <a:latin typeface="Pretendard"/>
                 <a:ea typeface="Pretendard"/>
@@ -10279,7 +10279,7 @@
             <a:avLst/>
           </a:prstGeom>
           <a:solidFill>
-            <a:srgbClr val="C3E6D8"/>
+            <a:srgbClr val="C9DAF2"/>
           </a:solidFill>
           <a:ln>
             <a:noFill/>
@@ -10480,7 +10480,7 @@
             <a:avLst/>
           </a:prstGeom>
           <a:solidFill>
-            <a:srgbClr val="F3F8F6"/>
+            <a:srgbClr val="F4F7FA"/>
           </a:solidFill>
           <a:ln>
             <a:noFill/>
@@ -10585,7 +10585,7 @@
             <a:r>
               <a:rPr sz="1950" b="1" spc="160">
                 <a:solidFill>
-                  <a:srgbClr val="1E7F5B"/>
+                  <a:srgbClr val="2B5FA8"/>
                 </a:solidFill>
                 <a:latin typeface="Pretendard"/>
                 <a:ea typeface="Pretendard"/>
@@ -11357,7 +11357,7 @@
             <a:avLst/>
           </a:prstGeom>
           <a:solidFill>
-            <a:srgbClr val="F3F8F6"/>
+            <a:srgbClr val="F4F7FA"/>
           </a:solidFill>
           <a:ln>
             <a:noFill/>
@@ -11462,7 +11462,7 @@
             <a:r>
               <a:rPr sz="2400" b="1">
                 <a:solidFill>
-                  <a:srgbClr val="1E7F5B"/>
+                  <a:srgbClr val="2B5FA8"/>
                 </a:solidFill>
                 <a:latin typeface="Pretendard"/>
                 <a:ea typeface="Pretendard"/>
@@ -11619,7 +11619,7 @@
             <a:r>
               <a:rPr sz="2475" b="1">
                 <a:solidFill>
-                  <a:srgbClr val="1E7F5B"/>
+                  <a:srgbClr val="2B5FA8"/>
                 </a:solidFill>
                 <a:latin typeface="Pretendard"/>
                 <a:ea typeface="Pretendard"/>
@@ -11735,7 +11735,7 @@
             <a:r>
               <a:rPr sz="2475" b="1">
                 <a:solidFill>
-                  <a:srgbClr val="1E7F5B"/>
+                  <a:srgbClr val="2B5FA8"/>
                 </a:solidFill>
                 <a:latin typeface="Pretendard"/>
                 <a:ea typeface="Pretendard"/>
@@ -11851,7 +11851,7 @@
             <a:r>
               <a:rPr sz="2475" b="1">
                 <a:solidFill>
-                  <a:srgbClr val="1E7F5B"/>
+                  <a:srgbClr val="2B5FA8"/>
                 </a:solidFill>
                 <a:latin typeface="Pretendard"/>
                 <a:ea typeface="Pretendard"/>
@@ -11967,7 +11967,7 @@
             <a:r>
               <a:rPr sz="2475" b="1">
                 <a:solidFill>
-                  <a:srgbClr val="1E7F5B"/>
+                  <a:srgbClr val="2B5FA8"/>
                 </a:solidFill>
                 <a:latin typeface="Pretendard"/>
                 <a:ea typeface="Pretendard"/>
@@ -12034,7 +12034,7 @@
             <a:avLst/>
           </a:prstGeom>
           <a:solidFill>
-            <a:srgbClr val="1E7F5B"/>
+            <a:srgbClr val="2B5FA8"/>
           </a:solidFill>
           <a:ln>
             <a:noFill/>
@@ -12079,7 +12079,7 @@
             <a:r>
               <a:rPr sz="1800" b="1" spc="140">
                 <a:solidFill>
-                  <a:srgbClr val="1E7F5B"/>
+                  <a:srgbClr val="2B5FA8"/>
                 </a:solidFill>
                 <a:latin typeface="Pretendard"/>
                 <a:ea typeface="Pretendard"/>
@@ -12164,7 +12164,7 @@
             <a:avLst/>
           </a:prstGeom>
           <a:solidFill>
-            <a:srgbClr val="F3F8F6"/>
+            <a:srgbClr val="F4F7FA"/>
           </a:solidFill>
           <a:ln>
             <a:noFill/>
@@ -12269,7 +12269,7 @@
             <a:r>
               <a:rPr sz="1950" b="1" spc="160">
                 <a:solidFill>
-                  <a:srgbClr val="1E7F5B"/>
+                  <a:srgbClr val="2B5FA8"/>
                 </a:solidFill>
                 <a:latin typeface="Pretendard"/>
                 <a:ea typeface="Pretendard"/>
@@ -12366,7 +12366,7 @@
             <a:avLst/>
           </a:prstGeom>
           <a:solidFill>
-            <a:srgbClr val="C3E6D8"/>
+            <a:srgbClr val="C9DAF2"/>
           </a:solidFill>
           <a:ln>
             <a:noFill/>
@@ -12411,7 +12411,7 @@
             <a:r>
               <a:rPr sz="1950" b="1">
                 <a:solidFill>
-                  <a:srgbClr val="1E7F5B"/>
+                  <a:srgbClr val="2B5FA8"/>
                 </a:solidFill>
                 <a:latin typeface="Pretendard"/>
                 <a:ea typeface="Pretendard"/>
@@ -12437,7 +12437,7 @@
             <a:avLst/>
           </a:prstGeom>
           <a:solidFill>
-            <a:srgbClr val="1E7F5B"/>
+            <a:srgbClr val="2B5FA8"/>
           </a:solidFill>
           <a:ln>
             <a:noFill/>
@@ -12587,7 +12587,7 @@
             <a:r>
               <a:rPr sz="1500" b="1" spc="120">
                 <a:solidFill>
-                  <a:srgbClr val="1E7F5B"/>
+                  <a:srgbClr val="2B5FA8"/>
                 </a:solidFill>
                 <a:latin typeface="Pretendard"/>
                 <a:ea typeface="Pretendard"/>
@@ -12727,7 +12727,7 @@
             </a:avLst>
           </a:prstGeom>
           <a:solidFill>
-            <a:srgbClr val="E6F4EE"/>
+            <a:srgbClr val="EAF0F8"/>
           </a:solidFill>
           <a:ln w="19050">
             <a:solidFill>
@@ -12845,7 +12845,7 @@
             <a:r>
               <a:rPr sz="1500" b="1" spc="120">
                 <a:solidFill>
-                  <a:srgbClr val="1E7F5B"/>
+                  <a:srgbClr val="2B5FA8"/>
                 </a:solidFill>
                 <a:latin typeface="Pretendard"/>
                 <a:ea typeface="Pretendard"/>
@@ -12927,7 +12927,7 @@
             <a:r>
               <a:rPr sz="1950" b="1">
                 <a:solidFill>
-                  <a:srgbClr val="1E7F5B"/>
+                  <a:srgbClr val="2B5FA8"/>
                 </a:solidFill>
                 <a:latin typeface="Pretendard"/>
                 <a:ea typeface="Pretendard"/>
@@ -12953,7 +12953,7 @@
             <a:avLst/>
           </a:prstGeom>
           <a:solidFill>
-            <a:srgbClr val="1E7F5B"/>
+            <a:srgbClr val="2B5FA8"/>
           </a:solidFill>
           <a:ln>
             <a:noFill/>
@@ -13103,7 +13103,7 @@
             <a:r>
               <a:rPr sz="1500" b="1" spc="120">
                 <a:solidFill>
-                  <a:srgbClr val="1E7F5B"/>
+                  <a:srgbClr val="2B5FA8"/>
                 </a:solidFill>
                 <a:latin typeface="Pretendard"/>
                 <a:ea typeface="Pretendard"/>
@@ -13185,7 +13185,7 @@
             <a:r>
               <a:rPr sz="1950" b="1">
                 <a:solidFill>
-                  <a:srgbClr val="1E7F5B"/>
+                  <a:srgbClr val="2B5FA8"/>
                 </a:solidFill>
                 <a:latin typeface="Pretendard"/>
                 <a:ea typeface="Pretendard"/>
@@ -13211,7 +13211,7 @@
             <a:avLst/>
           </a:prstGeom>
           <a:solidFill>
-            <a:srgbClr val="1E7F5B"/>
+            <a:srgbClr val="2B5FA8"/>
           </a:solidFill>
           <a:ln>
             <a:noFill/>
@@ -13361,7 +13361,7 @@
             <a:r>
               <a:rPr sz="1500" b="1" spc="120">
                 <a:solidFill>
-                  <a:srgbClr val="1E7F5B"/>
+                  <a:srgbClr val="2B5FA8"/>
                 </a:solidFill>
                 <a:latin typeface="Pretendard"/>
                 <a:ea typeface="Pretendard"/>
@@ -13558,7 +13558,7 @@
             <a:avLst/>
           </a:prstGeom>
           <a:solidFill>
-            <a:srgbClr val="F3F8F6"/>
+            <a:srgbClr val="F4F7FA"/>
           </a:solidFill>
           <a:ln>
             <a:noFill/>
@@ -13663,7 +13663,7 @@
             <a:r>
               <a:rPr sz="1950" b="1" spc="160">
                 <a:solidFill>
-                  <a:srgbClr val="1E7F5B"/>
+                  <a:srgbClr val="2B5FA8"/>
                 </a:solidFill>
                 <a:latin typeface="Pretendard"/>
                 <a:ea typeface="Pretendard"/>
@@ -14346,11 +14346,11 @@
             </a:avLst>
           </a:prstGeom>
           <a:solidFill>
-            <a:srgbClr val="E6F4EE"/>
+            <a:srgbClr val="EAF0F8"/>
           </a:solidFill>
           <a:ln w="9525">
             <a:solidFill>
-              <a:srgbClr val="C3E6D8"/>
+              <a:srgbClr val="C9DAF2"/>
             </a:solidFill>
           </a:ln>
           <a:effectLst/>
@@ -14549,7 +14549,7 @@
             <a:avLst/>
           </a:prstGeom>
           <a:solidFill>
-            <a:srgbClr val="F3F8F6"/>
+            <a:srgbClr val="F4F7FA"/>
           </a:solidFill>
           <a:ln>
             <a:noFill/>
@@ -14654,7 +14654,7 @@
             <a:r>
               <a:rPr sz="2400" b="1">
                 <a:solidFill>
-                  <a:srgbClr val="1E7F5B"/>
+                  <a:srgbClr val="2B5FA8"/>
                 </a:solidFill>
                 <a:latin typeface="Pretendard"/>
                 <a:ea typeface="Pretendard"/>
@@ -14892,7 +14892,7 @@
             <a:avLst/>
           </a:prstGeom>
           <a:solidFill>
-            <a:srgbClr val="F3F8F6"/>
+            <a:srgbClr val="F4F7FA"/>
           </a:solidFill>
           <a:ln>
             <a:noFill/>
@@ -14997,7 +14997,7 @@
             <a:r>
               <a:rPr sz="1950" b="1" spc="160">
                 <a:solidFill>
-                  <a:srgbClr val="1E7F5B"/>
+                  <a:srgbClr val="2B5FA8"/>
                 </a:solidFill>
                 <a:latin typeface="Pretendard"/>
                 <a:ea typeface="Pretendard"/>
@@ -15128,7 +15128,7 @@
             <a:avLst/>
           </a:prstGeom>
           <a:solidFill>
-            <a:srgbClr val="1E7F5B"/>
+            <a:srgbClr val="2B5FA8"/>
           </a:solidFill>
           <a:ln>
             <a:noFill/>
@@ -15313,7 +15313,7 @@
             <a:avLst/>
           </a:prstGeom>
           <a:solidFill>
-            <a:srgbClr val="1E7F5B"/>
+            <a:srgbClr val="2B5FA8"/>
           </a:solidFill>
           <a:ln>
             <a:noFill/>
@@ -15498,7 +15498,7 @@
             <a:avLst/>
           </a:prstGeom>
           <a:solidFill>
-            <a:srgbClr val="1E7F5B"/>
+            <a:srgbClr val="2B5FA8"/>
           </a:solidFill>
           <a:ln>
             <a:noFill/>
@@ -15779,7 +15779,7 @@
             <a:avLst/>
           </a:prstGeom>
           <a:solidFill>
-            <a:srgbClr val="F3F8F6"/>
+            <a:srgbClr val="F4F7FA"/>
           </a:solidFill>
           <a:ln>
             <a:noFill/>
@@ -15884,7 +15884,7 @@
             <a:r>
               <a:rPr sz="1950" b="1" spc="160">
                 <a:solidFill>
-                  <a:srgbClr val="1E7F5B"/>
+                  <a:srgbClr val="2B5FA8"/>
                 </a:solidFill>
                 <a:latin typeface="Pretendard"/>
                 <a:ea typeface="Pretendard"/>
@@ -16220,7 +16220,7 @@
             <a:avLst/>
           </a:prstGeom>
           <a:solidFill>
-            <a:srgbClr val="1E7F5B"/>
+            <a:srgbClr val="2B5FA8"/>
           </a:solidFill>
           <a:ln>
             <a:noFill/>
@@ -16548,7 +16548,7 @@
             <a:avLst/>
           </a:prstGeom>
           <a:solidFill>
-            <a:srgbClr val="1E7F5B"/>
+            <a:srgbClr val="2B5FA8"/>
           </a:solidFill>
           <a:ln>
             <a:noFill/>
@@ -16808,7 +16808,7 @@
             <a:avLst/>
           </a:prstGeom>
           <a:solidFill>
-            <a:srgbClr val="F3F8F6"/>
+            <a:srgbClr val="F4F7FA"/>
           </a:solidFill>
           <a:ln>
             <a:noFill/>
@@ -16913,7 +16913,7 @@
             <a:r>
               <a:rPr sz="1950" b="1" spc="160">
                 <a:solidFill>
-                  <a:srgbClr val="1E7F5B"/>
+                  <a:srgbClr val="2B5FA8"/>
                 </a:solidFill>
                 <a:latin typeface="Pretendard"/>
                 <a:ea typeface="Pretendard"/>
@@ -17660,7 +17660,7 @@
             <a:avLst/>
           </a:prstGeom>
           <a:solidFill>
-            <a:srgbClr val="C3E6D8"/>
+            <a:srgbClr val="C9DAF2"/>
           </a:solidFill>
           <a:ln>
             <a:noFill/>
@@ -17861,7 +17861,7 @@
             <a:avLst/>
           </a:prstGeom>
           <a:solidFill>
-            <a:srgbClr val="F3F8F6"/>
+            <a:srgbClr val="F4F7FA"/>
           </a:solidFill>
           <a:ln>
             <a:noFill/>
@@ -17966,7 +17966,7 @@
             <a:r>
               <a:rPr sz="1950" b="1" spc="160">
                 <a:solidFill>
-                  <a:srgbClr val="1E7F5B"/>
+                  <a:srgbClr val="2B5FA8"/>
                 </a:solidFill>
                 <a:latin typeface="Pretendard"/>
                 <a:ea typeface="Pretendard"/>
@@ -18227,7 +18227,7 @@
             <a:avLst/>
           </a:prstGeom>
           <a:solidFill>
-            <a:srgbClr val="1E7F5B"/>
+            <a:srgbClr val="2B5FA8"/>
           </a:solidFill>
           <a:ln>
             <a:noFill/>
@@ -18257,7 +18257,7 @@
             <a:avLst/>
           </a:prstGeom>
           <a:solidFill>
-            <a:srgbClr val="1E7F5B"/>
+            <a:srgbClr val="2B5FA8"/>
           </a:solidFill>
           <a:ln>
             <a:noFill/>
@@ -18421,7 +18421,7 @@
             <a:avLst/>
           </a:prstGeom>
           <a:solidFill>
-            <a:srgbClr val="1E7F5B"/>
+            <a:srgbClr val="2B5FA8"/>
           </a:solidFill>
           <a:ln>
             <a:noFill/>
@@ -18615,7 +18615,7 @@
             <a:avLst/>
           </a:prstGeom>
           <a:solidFill>
-            <a:srgbClr val="1E7F5B"/>
+            <a:srgbClr val="2B5FA8"/>
           </a:solidFill>
           <a:ln>
             <a:noFill/>
@@ -18645,7 +18645,7 @@
             <a:avLst/>
           </a:prstGeom>
           <a:solidFill>
-            <a:srgbClr val="1E7F5B"/>
+            <a:srgbClr val="2B5FA8"/>
           </a:solidFill>
           <a:ln>
             <a:noFill/>
@@ -18809,7 +18809,7 @@
             <a:avLst/>
           </a:prstGeom>
           <a:solidFill>
-            <a:srgbClr val="1E7F5B"/>
+            <a:srgbClr val="2B5FA8"/>
           </a:solidFill>
           <a:ln>
             <a:noFill/>
@@ -19174,7 +19174,7 @@
             <a:avLst/>
           </a:prstGeom>
           <a:solidFill>
-            <a:srgbClr val="F3F8F6"/>
+            <a:srgbClr val="F4F7FA"/>
           </a:solidFill>
           <a:ln>
             <a:noFill/>
@@ -19279,7 +19279,7 @@
             <a:r>
               <a:rPr sz="1950" b="1" spc="160">
                 <a:solidFill>
-                  <a:srgbClr val="1E7F5B"/>
+                  <a:srgbClr val="2B5FA8"/>
                 </a:solidFill>
                 <a:latin typeface="Pretendard"/>
                 <a:ea typeface="Pretendard"/>
@@ -19492,7 +19492,7 @@
             <a:avLst/>
           </a:prstGeom>
           <a:solidFill>
-            <a:srgbClr val="1E7F5B"/>
+            <a:srgbClr val="2B5FA8"/>
           </a:solidFill>
           <a:ln>
             <a:noFill/>
@@ -19563,7 +19563,7 @@
             <a:avLst/>
           </a:prstGeom>
           <a:solidFill>
-            <a:srgbClr val="1E7F5B"/>
+            <a:srgbClr val="2B5FA8"/>
           </a:solidFill>
           <a:ln>
             <a:noFill/>
@@ -19634,7 +19634,7 @@
             <a:avLst/>
           </a:prstGeom>
           <a:solidFill>
-            <a:srgbClr val="1E7F5B"/>
+            <a:srgbClr val="2B5FA8"/>
           </a:solidFill>
           <a:ln>
             <a:noFill/>
@@ -19821,7 +19821,7 @@
             <a:avLst/>
           </a:prstGeom>
           <a:solidFill>
-            <a:srgbClr val="1E7F5B"/>
+            <a:srgbClr val="2B5FA8"/>
           </a:solidFill>
           <a:ln>
             <a:noFill/>
@@ -19892,7 +19892,7 @@
             <a:avLst/>
           </a:prstGeom>
           <a:solidFill>
-            <a:srgbClr val="1E7F5B"/>
+            <a:srgbClr val="2B5FA8"/>
           </a:solidFill>
           <a:ln>
             <a:noFill/>
@@ -19963,7 +19963,7 @@
             <a:avLst/>
           </a:prstGeom>
           <a:solidFill>
-            <a:srgbClr val="1E7F5B"/>
+            <a:srgbClr val="2B5FA8"/>
           </a:solidFill>
           <a:ln>
             <a:noFill/>
